--- a/templates/files/ms_office/Projektovy_status_report_SK.pptx
+++ b/templates/files/ms_office/Projektovy_status_report_SK.pptx
@@ -1,31 +1,126 @@
 
 <file path=ppt/presentation.xml><?xml version="1.0" encoding="utf-8"?>
-<p:presentation xmlns:p="http://schemas.openxmlformats.org/presentationml/2006/main">
+<p:presentation xmlns:a="http://schemas.openxmlformats.org/drawingml/2006/main" xmlns:r="http://schemas.openxmlformats.org/officeDocument/2006/relationships" xmlns:p="http://schemas.openxmlformats.org/presentationml/2006/main">
   <p:sldMasterIdLst>
-    <p:sldMasterId xmlns:r="http://schemas.openxmlformats.org/officeDocument/2006/relationships" id="2147483648" r:id="R97f19356f221466b"/>
+    <p:sldMasterId id="2147483648" r:id="rId1"/>
   </p:sldMasterIdLst>
   <p:notesMasterIdLst>
-    <p:notesMasterId xmlns:r="http://schemas.openxmlformats.org/officeDocument/2006/relationships" r:id="Rb9fe87fb9c9e4f16"/>
+    <p:notesMasterId r:id="rId8"/>
   </p:notesMasterIdLst>
   <p:sldIdLst>
-    <p:sldId xmlns:r="http://schemas.openxmlformats.org/officeDocument/2006/relationships" id="256" r:id="Ref283fb5441b4ce6"/>
-    <p:sldId xmlns:r="http://schemas.openxmlformats.org/officeDocument/2006/relationships" id="257" r:id="R47d00df323ba40e4"/>
-    <p:sldId xmlns:r="http://schemas.openxmlformats.org/officeDocument/2006/relationships" id="258" r:id="R0dc23e8a2d64454e"/>
-    <p:sldId xmlns:r="http://schemas.openxmlformats.org/officeDocument/2006/relationships" id="259" r:id="R4793c90a275f4ec1"/>
-    <p:sldId xmlns:r="http://schemas.openxmlformats.org/officeDocument/2006/relationships" id="260" r:id="Rb077da2ae150440b"/>
-    <p:sldId xmlns:r="http://schemas.openxmlformats.org/officeDocument/2006/relationships" id="261" r:id="Ra5f624cbe9df4f34"/>
+    <p:sldId id="256" r:id="rId2"/>
+    <p:sldId id="257" r:id="rId3"/>
+    <p:sldId id="258" r:id="rId4"/>
+    <p:sldId id="259" r:id="rId5"/>
+    <p:sldId id="260" r:id="rId6"/>
+    <p:sldId id="261" r:id="rId7"/>
   </p:sldIdLst>
   <p:sldSz cx="12192000" cy="6858000"/>
   <p:notesSz cx="6858000" cy="9144000"/>
+  <p:defaultTextStyle>
+    <a:defPPr>
+      <a:defRPr lang="sk-SK"/>
+    </a:defPPr>
+    <a:lvl1pPr marL="0" algn="l" defTabSz="914400" rtl="0" eaLnBrk="1" latinLnBrk="0" hangingPunct="1">
+      <a:defRPr sz="1800" kern="1200">
+        <a:solidFill>
+          <a:schemeClr val="tx1"/>
+        </a:solidFill>
+        <a:latin typeface="+mn-lt"/>
+        <a:ea typeface="+mn-ea"/>
+        <a:cs typeface="+mn-cs"/>
+      </a:defRPr>
+    </a:lvl1pPr>
+    <a:lvl2pPr marL="457200" algn="l" defTabSz="914400" rtl="0" eaLnBrk="1" latinLnBrk="0" hangingPunct="1">
+      <a:defRPr sz="1800" kern="1200">
+        <a:solidFill>
+          <a:schemeClr val="tx1"/>
+        </a:solidFill>
+        <a:latin typeface="+mn-lt"/>
+        <a:ea typeface="+mn-ea"/>
+        <a:cs typeface="+mn-cs"/>
+      </a:defRPr>
+    </a:lvl2pPr>
+    <a:lvl3pPr marL="914400" algn="l" defTabSz="914400" rtl="0" eaLnBrk="1" latinLnBrk="0" hangingPunct="1">
+      <a:defRPr sz="1800" kern="1200">
+        <a:solidFill>
+          <a:schemeClr val="tx1"/>
+        </a:solidFill>
+        <a:latin typeface="+mn-lt"/>
+        <a:ea typeface="+mn-ea"/>
+        <a:cs typeface="+mn-cs"/>
+      </a:defRPr>
+    </a:lvl3pPr>
+    <a:lvl4pPr marL="1371600" algn="l" defTabSz="914400" rtl="0" eaLnBrk="1" latinLnBrk="0" hangingPunct="1">
+      <a:defRPr sz="1800" kern="1200">
+        <a:solidFill>
+          <a:schemeClr val="tx1"/>
+        </a:solidFill>
+        <a:latin typeface="+mn-lt"/>
+        <a:ea typeface="+mn-ea"/>
+        <a:cs typeface="+mn-cs"/>
+      </a:defRPr>
+    </a:lvl4pPr>
+    <a:lvl5pPr marL="1828800" algn="l" defTabSz="914400" rtl="0" eaLnBrk="1" latinLnBrk="0" hangingPunct="1">
+      <a:defRPr sz="1800" kern="1200">
+        <a:solidFill>
+          <a:schemeClr val="tx1"/>
+        </a:solidFill>
+        <a:latin typeface="+mn-lt"/>
+        <a:ea typeface="+mn-ea"/>
+        <a:cs typeface="+mn-cs"/>
+      </a:defRPr>
+    </a:lvl5pPr>
+    <a:lvl6pPr marL="2286000" algn="l" defTabSz="914400" rtl="0" eaLnBrk="1" latinLnBrk="0" hangingPunct="1">
+      <a:defRPr sz="1800" kern="1200">
+        <a:solidFill>
+          <a:schemeClr val="tx1"/>
+        </a:solidFill>
+        <a:latin typeface="+mn-lt"/>
+        <a:ea typeface="+mn-ea"/>
+        <a:cs typeface="+mn-cs"/>
+      </a:defRPr>
+    </a:lvl6pPr>
+    <a:lvl7pPr marL="2743200" algn="l" defTabSz="914400" rtl="0" eaLnBrk="1" latinLnBrk="0" hangingPunct="1">
+      <a:defRPr sz="1800" kern="1200">
+        <a:solidFill>
+          <a:schemeClr val="tx1"/>
+        </a:solidFill>
+        <a:latin typeface="+mn-lt"/>
+        <a:ea typeface="+mn-ea"/>
+        <a:cs typeface="+mn-cs"/>
+      </a:defRPr>
+    </a:lvl7pPr>
+    <a:lvl8pPr marL="3200400" algn="l" defTabSz="914400" rtl="0" eaLnBrk="1" latinLnBrk="0" hangingPunct="1">
+      <a:defRPr sz="1800" kern="1200">
+        <a:solidFill>
+          <a:schemeClr val="tx1"/>
+        </a:solidFill>
+        <a:latin typeface="+mn-lt"/>
+        <a:ea typeface="+mn-ea"/>
+        <a:cs typeface="+mn-cs"/>
+      </a:defRPr>
+    </a:lvl8pPr>
+    <a:lvl9pPr marL="3657600" algn="l" defTabSz="914400" rtl="0" eaLnBrk="1" latinLnBrk="0" hangingPunct="1">
+      <a:defRPr sz="1800" kern="1200">
+        <a:solidFill>
+          <a:schemeClr val="tx1"/>
+        </a:solidFill>
+        <a:latin typeface="+mn-lt"/>
+        <a:ea typeface="+mn-ea"/>
+        <a:cs typeface="+mn-cs"/>
+      </a:defRPr>
+    </a:lvl9pPr>
+  </p:defaultTextStyle>
 </p:presentation>
 </file>
 
 <file path=ppt/notesMasters/notesMaster1.xml><?xml version="1.0" encoding="utf-8"?>
-<p:notesMaster xmlns:p="http://schemas.openxmlformats.org/presentationml/2006/main">
+<p:notesMaster xmlns:a="http://schemas.openxmlformats.org/drawingml/2006/main" xmlns:r="http://schemas.openxmlformats.org/officeDocument/2006/relationships" xmlns:p="http://schemas.openxmlformats.org/presentationml/2006/main">
   <p:cSld>
     <p:bg>
       <p:bgRef idx="1001">
-        <a:schemeClr xmlns:a="http://schemas.openxmlformats.org/drawingml/2006/main" val="bg1"/>
+        <a:schemeClr val="bg1"/>
       </p:bgRef>
     </p:bg>
     <p:spTree>
@@ -35,380 +130,164 @@
         <p:nvPr/>
       </p:nvGrpSpPr>
       <p:grpSpPr>
-        <a:xfrm xmlns:a="http://schemas.openxmlformats.org/drawingml/2006/main"/>
+        <a:xfrm>
+          <a:off x="0" y="0"/>
+          <a:ext cx="0" cy="0"/>
+          <a:chOff x="0" y="0"/>
+          <a:chExt cx="0" cy="0"/>
+        </a:xfrm>
       </p:grpSpPr>
       <p:sp>
         <p:nvSpPr>
           <p:cNvPr id="2" name="Header Placeholder"/>
-          <p:cNvSpPr/>
+          <p:cNvSpPr>
+            <a:spLocks noGrp="1"/>
+          </p:cNvSpPr>
           <p:nvPr>
             <p:ph type="hdr" sz="quarter"/>
           </p:nvPr>
         </p:nvSpPr>
         <p:spPr>
-          <a:prstGeom xmlns:a="http://schemas.openxmlformats.org/drawingml/2006/main" prst="rect">
-            <a:avLst/>
-          </a:prstGeom>
-        </p:spPr>
-        <p:txBody>
-          <a:bodyPr xmlns:a="http://schemas.openxmlformats.org/drawingml/2006/main"/>
-          <a:lstStyle xmlns:a="http://schemas.openxmlformats.org/drawingml/2006/main"/>
-          <a:p xmlns:a="http://schemas.openxmlformats.org/drawingml/2006/main"/>
+          <a:prstGeom prst="rect">
+            <a:avLst/>
+          </a:prstGeom>
+        </p:spPr>
+        <p:txBody>
+          <a:bodyPr/>
+          <a:lstStyle/>
+          <a:p>
+            <a:endParaRPr/>
+          </a:p>
         </p:txBody>
       </p:sp>
       <p:sp>
         <p:nvSpPr>
           <p:cNvPr id="3" name="Date Placeholder"/>
-          <p:cNvSpPr/>
+          <p:cNvSpPr>
+            <a:spLocks noGrp="1"/>
+          </p:cNvSpPr>
           <p:nvPr>
             <p:ph type="dt" sz="quarter" idx="1"/>
           </p:nvPr>
         </p:nvSpPr>
         <p:spPr>
-          <a:prstGeom xmlns:a="http://schemas.openxmlformats.org/drawingml/2006/main" prst="rect">
-            <a:avLst/>
-          </a:prstGeom>
-        </p:spPr>
-        <p:txBody>
-          <a:bodyPr xmlns:a="http://schemas.openxmlformats.org/drawingml/2006/main"/>
-          <a:lstStyle xmlns:a="http://schemas.openxmlformats.org/drawingml/2006/main"/>
-          <a:p xmlns:a="http://schemas.openxmlformats.org/drawingml/2006/main"/>
+          <a:prstGeom prst="rect">
+            <a:avLst/>
+          </a:prstGeom>
+        </p:spPr>
+        <p:txBody>
+          <a:bodyPr/>
+          <a:lstStyle/>
+          <a:p>
+            <a:endParaRPr/>
+          </a:p>
         </p:txBody>
       </p:sp>
       <p:sp>
         <p:nvSpPr>
           <p:cNvPr id="4" name="Slide Image Placeholder"/>
-          <p:cNvSpPr/>
+          <p:cNvSpPr>
+            <a:spLocks noGrp="1" noRot="1" noChangeAspect="1"/>
+          </p:cNvSpPr>
           <p:nvPr>
             <p:ph type="sldImg" idx="2"/>
           </p:nvPr>
         </p:nvSpPr>
         <p:spPr>
-          <a:prstGeom xmlns:a="http://schemas.openxmlformats.org/drawingml/2006/main" prst="rect">
-            <a:avLst/>
-          </a:prstGeom>
-        </p:spPr>
-        <p:txBody>
-          <a:bodyPr xmlns:a="http://schemas.openxmlformats.org/drawingml/2006/main"/>
-          <a:lstStyle xmlns:a="http://schemas.openxmlformats.org/drawingml/2006/main"/>
-          <a:p xmlns:a="http://schemas.openxmlformats.org/drawingml/2006/main"/>
+          <a:prstGeom prst="rect">
+            <a:avLst/>
+          </a:prstGeom>
+        </p:spPr>
+        <p:txBody>
+          <a:bodyPr/>
+          <a:lstStyle/>
+          <a:p>
+            <a:endParaRPr/>
+          </a:p>
         </p:txBody>
       </p:sp>
       <p:sp>
         <p:nvSpPr>
           <p:cNvPr id="5" name="Notes Placeholder"/>
-          <p:cNvSpPr/>
+          <p:cNvSpPr>
+            <a:spLocks noGrp="1"/>
+          </p:cNvSpPr>
           <p:nvPr>
             <p:ph type="body" sz="quarter" idx="3"/>
           </p:nvPr>
         </p:nvSpPr>
         <p:spPr>
-          <a:prstGeom xmlns:a="http://schemas.openxmlformats.org/drawingml/2006/main" prst="rect">
-            <a:avLst/>
-          </a:prstGeom>
-        </p:spPr>
-        <p:txBody>
-          <a:bodyPr xmlns:a="http://schemas.openxmlformats.org/drawingml/2006/main"/>
-          <a:lstStyle xmlns:a="http://schemas.openxmlformats.org/drawingml/2006/main"/>
-          <a:p xmlns:a="http://schemas.openxmlformats.org/drawingml/2006/main"/>
+          <a:prstGeom prst="rect">
+            <a:avLst/>
+          </a:prstGeom>
+        </p:spPr>
+        <p:txBody>
+          <a:bodyPr/>
+          <a:lstStyle/>
+          <a:p>
+            <a:endParaRPr/>
+          </a:p>
         </p:txBody>
       </p:sp>
       <p:sp>
         <p:nvSpPr>
           <p:cNvPr id="6" name="Footer Placeholder"/>
-          <p:cNvSpPr/>
+          <p:cNvSpPr>
+            <a:spLocks noGrp="1"/>
+          </p:cNvSpPr>
           <p:nvPr>
             <p:ph type="ftr" sz="quarter" idx="4"/>
           </p:nvPr>
         </p:nvSpPr>
         <p:spPr>
-          <a:prstGeom xmlns:a="http://schemas.openxmlformats.org/drawingml/2006/main" prst="rect">
-            <a:avLst/>
-          </a:prstGeom>
-        </p:spPr>
-        <p:txBody>
-          <a:bodyPr xmlns:a="http://schemas.openxmlformats.org/drawingml/2006/main"/>
-          <a:lstStyle xmlns:a="http://schemas.openxmlformats.org/drawingml/2006/main"/>
-          <a:p xmlns:a="http://schemas.openxmlformats.org/drawingml/2006/main"/>
+          <a:prstGeom prst="rect">
+            <a:avLst/>
+          </a:prstGeom>
+        </p:spPr>
+        <p:txBody>
+          <a:bodyPr/>
+          <a:lstStyle/>
+          <a:p>
+            <a:endParaRPr/>
+          </a:p>
         </p:txBody>
       </p:sp>
       <p:sp>
         <p:nvSpPr>
           <p:cNvPr id="7" name="Slide Number Placeholder"/>
-          <p:cNvSpPr/>
+          <p:cNvSpPr>
+            <a:spLocks noGrp="1"/>
+          </p:cNvSpPr>
           <p:nvPr>
             <p:ph type="sldNum" sz="quarter" idx="5"/>
           </p:nvPr>
         </p:nvSpPr>
         <p:spPr>
-          <a:prstGeom xmlns:a="http://schemas.openxmlformats.org/drawingml/2006/main" prst="rect">
-            <a:avLst/>
-          </a:prstGeom>
-        </p:spPr>
-        <p:txBody>
-          <a:bodyPr xmlns:a="http://schemas.openxmlformats.org/drawingml/2006/main"/>
-          <a:lstStyle xmlns:a="http://schemas.openxmlformats.org/drawingml/2006/main"/>
-          <a:p xmlns:a="http://schemas.openxmlformats.org/drawingml/2006/main"/>
+          <a:prstGeom prst="rect">
+            <a:avLst/>
+          </a:prstGeom>
+        </p:spPr>
+        <p:txBody>
+          <a:bodyPr/>
+          <a:lstStyle/>
+          <a:p>
+            <a:endParaRPr/>
+          </a:p>
         </p:txBody>
       </p:sp>
     </p:spTree>
   </p:cSld>
   <p:clrMap bg1="lt1" tx1="dk1" bg2="lt2" tx2="dk2" accent1="accent1" accent2="accent2" accent3="accent3" accent4="accent4" accent5="accent5" accent6="accent6" hlink="hlink" folHlink="folHlink"/>
   <p:notesStyle>
-    <a:lvl1pPr xmlns:a="http://schemas.openxmlformats.org/drawingml/2006/main" marL="0" algn="l" defTabSz="914400" rtl="0" eaLnBrk="1" latinLnBrk="0" hangingPunct="1">
+    <a:lvl1pPr marL="0" algn="l" defTabSz="914400" rtl="0" eaLnBrk="1" latinLnBrk="0" hangingPunct="1">
       <a:defRPr sz="1200" kern="1200"/>
     </a:lvl1pPr>
   </p:notesStyle>
 </p:notesMaster>
 </file>
 
-<file path=ppt/notesMasters/theme/theme3.xml><?xml version="1.0" encoding="utf-8"?>
-<a:theme xmlns:a="http://schemas.openxmlformats.org/drawingml/2006/main" name="ChatGPT">
-  <a:themeElements>
-    <a:clrScheme name="ChatGPT">
-      <a:dk1>
-        <a:srgbClr val="000000"/>
-      </a:dk1>
-      <a:lt1>
-        <a:srgbClr val="FFFFFF"/>
-      </a:lt1>
-      <a:dk2>
-        <a:srgbClr val="0E2841"/>
-      </a:dk2>
-      <a:lt2>
-        <a:srgbClr val="E8E8E8"/>
-      </a:lt2>
-      <a:accent1>
-        <a:srgbClr val="156082"/>
-      </a:accent1>
-      <a:accent2>
-        <a:srgbClr val="E97132"/>
-      </a:accent2>
-      <a:accent3>
-        <a:srgbClr val="196B24"/>
-      </a:accent3>
-      <a:accent4>
-        <a:srgbClr val="0F9ED5"/>
-      </a:accent4>
-      <a:accent5>
-        <a:srgbClr val="A02B93"/>
-      </a:accent5>
-      <a:accent6>
-        <a:srgbClr val="4EA72E"/>
-      </a:accent6>
-      <a:hlink>
-        <a:srgbClr val="467886"/>
-      </a:hlink>
-      <a:folHlink>
-        <a:srgbClr val="96607D"/>
-      </a:folHlink>
-    </a:clrScheme>
-    <a:fontScheme name="Office">
-      <a:majorFont>
-        <a:latin typeface="Calibri Light"/>
-        <a:ea typeface="Calibri Light"/>
-        <a:cs typeface="Calibri Light"/>
-      </a:majorFont>
-      <a:minorFont>
-        <a:latin typeface="Calibri"/>
-        <a:ea typeface="Calibri"/>
-        <a:cs typeface="Calibri"/>
-      </a:minorFont>
-    </a:fontScheme>
-    <a:fmtScheme name="ChatGPT">
-      <a:fillStyleLst>
-        <a:solidFill>
-          <a:schemeClr val="phClr"/>
-        </a:solidFill>
-        <a:gradFill>
-          <a:gsLst>
-            <a:gs pos="0">
-              <a:schemeClr val="phClr">
-                <a:tint val="67000"/>
-                <a:lumMod val="110000"/>
-                <a:satMod val="105000"/>
-              </a:schemeClr>
-            </a:gs>
-            <a:gs pos="50000">
-              <a:schemeClr val="phClr">
-                <a:tint val="73000"/>
-                <a:lumMod val="105000"/>
-                <a:satMod val="103000"/>
-              </a:schemeClr>
-            </a:gs>
-            <a:gs pos="100000">
-              <a:schemeClr val="phClr">
-                <a:tint val="81000"/>
-                <a:lumMod val="105000"/>
-                <a:satMod val="109000"/>
-              </a:schemeClr>
-            </a:gs>
-          </a:gsLst>
-          <a:lin ang="5400000" scaled="0"/>
-        </a:gradFill>
-        <a:gradFill>
-          <a:gsLst>
-            <a:gs pos="0">
-              <a:schemeClr val="phClr">
-                <a:tint val="94000"/>
-                <a:lumMod val="102000"/>
-                <a:satMod val="103000"/>
-              </a:schemeClr>
-            </a:gs>
-            <a:gs pos="50000">
-              <a:schemeClr val="phClr">
-                <a:shade val="100000"/>
-                <a:lumMod val="100000"/>
-                <a:satMod val="110000"/>
-              </a:schemeClr>
-            </a:gs>
-            <a:gs pos="100000">
-              <a:schemeClr val="phClr">
-                <a:shade val="78000"/>
-                <a:lumMod val="99000"/>
-                <a:satMod val="120000"/>
-              </a:schemeClr>
-            </a:gs>
-          </a:gsLst>
-          <a:lin ang="5400000" scaled="0"/>
-        </a:gradFill>
-      </a:fillStyleLst>
-      <a:lnStyleLst>
-        <a:ln w="12700">
-          <a:solidFill>
-            <a:schemeClr val="phClr"/>
-          </a:solidFill>
-          <a:prstDash val="solid"/>
-        </a:ln>
-        <a:ln w="19050">
-          <a:solidFill>
-            <a:schemeClr val="phClr"/>
-          </a:solidFill>
-          <a:prstDash val="solid"/>
-        </a:ln>
-        <a:ln w="25400">
-          <a:solidFill>
-            <a:schemeClr val="phClr"/>
-          </a:solidFill>
-          <a:prstDash val="solid"/>
-        </a:ln>
-      </a:lnStyleLst>
-      <a:effectStyleLst>
-        <a:effectStyle>
-          <a:effectLst/>
-        </a:effectStyle>
-        <a:effectStyle>
-          <a:effectLst/>
-        </a:effectStyle>
-        <a:effectStyle>
-          <a:effectLst>
-            <a:outerShdw blurRad="57150" dist="19050" dir="5400000">
-              <a:srgbClr val="000000">
-                <a:alpha val="16000"/>
-              </a:srgbClr>
-            </a:outerShdw>
-          </a:effectLst>
-        </a:effectStyle>
-        <a:effectStyle>
-          <a:effectLst>
-            <a:outerShdw blurRad="19050" dist="9525" dir="5400000">
-              <a:srgbClr val="000000">
-                <a:alpha val="6000"/>
-              </a:srgbClr>
-            </a:outerShdw>
-          </a:effectLst>
-        </a:effectStyle>
-        <a:effectStyle>
-          <a:effectLst>
-            <a:outerShdw blurRad="28575" dist="9525" dir="5400000">
-              <a:srgbClr val="000000">
-                <a:alpha val="8000"/>
-              </a:srgbClr>
-            </a:outerShdw>
-          </a:effectLst>
-        </a:effectStyle>
-        <a:effectStyle>
-          <a:effectLst>
-            <a:outerShdw blurRad="57150" dist="19050" dir="5400000">
-              <a:srgbClr val="000000">
-                <a:alpha val="10000"/>
-              </a:srgbClr>
-            </a:outerShdw>
-          </a:effectLst>
-        </a:effectStyle>
-        <a:effectStyle>
-          <a:effectLst>
-            <a:outerShdw blurRad="114300" dist="38100" dir="5400000">
-              <a:srgbClr val="000000">
-                <a:alpha val="12000"/>
-              </a:srgbClr>
-            </a:outerShdw>
-          </a:effectLst>
-        </a:effectStyle>
-        <a:effectStyle>
-          <a:effectLst>
-            <a:outerShdw blurRad="171450" dist="57150" dir="5400000">
-              <a:srgbClr val="000000">
-                <a:alpha val="16000"/>
-              </a:srgbClr>
-            </a:outerShdw>
-          </a:effectLst>
-        </a:effectStyle>
-        <a:effectStyle>
-          <a:effectLst>
-            <a:outerShdw blurRad="266700" dist="95250" dir="5400000">
-              <a:srgbClr val="000000">
-                <a:alpha val="24000"/>
-              </a:srgbClr>
-            </a:outerShdw>
-          </a:effectLst>
-        </a:effectStyle>
-      </a:effectStyleLst>
-      <a:bgFillStyleLst>
-        <a:solidFill>
-          <a:schemeClr val="phClr"/>
-        </a:solidFill>
-        <a:solidFill>
-          <a:schemeClr val="phClr">
-            <a:tint val="95000"/>
-            <a:satMod val="170000"/>
-          </a:schemeClr>
-        </a:solidFill>
-        <a:gradFill>
-          <a:gsLst>
-            <a:gs pos="0">
-              <a:schemeClr val="phClr">
-                <a:tint val="93000"/>
-                <a:shade val="98000"/>
-                <a:lumMod val="102000"/>
-                <a:satMod val="150000"/>
-              </a:schemeClr>
-            </a:gs>
-            <a:gs pos="50000">
-              <a:schemeClr val="phClr">
-                <a:tint val="98000"/>
-                <a:shade val="90000"/>
-                <a:lumMod val="103000"/>
-                <a:satMod val="130000"/>
-              </a:schemeClr>
-            </a:gs>
-            <a:gs pos="100000">
-              <a:schemeClr val="phClr">
-                <a:shade val="63000"/>
-                <a:satMod val="120000"/>
-              </a:schemeClr>
-            </a:gs>
-          </a:gsLst>
-          <a:lin ang="5400000" scaled="0"/>
-        </a:gradFill>
-      </a:bgFillStyleLst>
-    </a:fmtScheme>
-  </a:themeElements>
-</a:theme>
-</file>
-
 <file path=ppt/notesSlides/notesSlide1.xml><?xml version="1.0" encoding="utf-8"?>
-<p:notes xmlns:p="http://schemas.openxmlformats.org/presentationml/2006/main">
+<p:notes xmlns:a="http://schemas.openxmlformats.org/drawingml/2006/main" xmlns:r="http://schemas.openxmlformats.org/officeDocument/2006/relationships" xmlns:p="http://schemas.openxmlformats.org/presentationml/2006/main">
   <p:cSld>
     <p:spTree>
       <p:nvGrpSpPr>
@@ -417,16 +296,21 @@
         <p:nvPr/>
       </p:nvGrpSpPr>
       <p:grpSpPr>
-        <a:xfrm xmlns:a="http://schemas.openxmlformats.org/drawingml/2006/main"/>
+        <a:xfrm>
+          <a:off x="0" y="0"/>
+          <a:ext cx="0" cy="0"/>
+          <a:chOff x="0" y="0"/>
+          <a:chExt cx="0" cy="0"/>
+        </a:xfrm>
       </p:grpSpPr>
       <p:sp>
         <p:nvSpPr>
           <p:cNvPr id="2" name="Slide Image Placeholder 1"/>
           <p:cNvSpPr>
-            <a:spLocks xmlns:a="http://schemas.openxmlformats.org/drawingml/2006/main" noGrp="1"/>
+            <a:spLocks noGrp="1" noRot="1" noChangeAspect="1"/>
           </p:cNvSpPr>
           <p:nvPr>
-            <p:ph type="sldImg" idx="0"/>
+            <p:ph type="sldImg"/>
           </p:nvPr>
         </p:nvSpPr>
         <p:spPr/>
@@ -435,7 +319,7 @@
         <p:nvSpPr>
           <p:cNvPr id="3" name="Notes Placeholder 2"/>
           <p:cNvSpPr>
-            <a:spLocks xmlns:a="http://schemas.openxmlformats.org/drawingml/2006/main" noGrp="1"/>
+            <a:spLocks noGrp="1"/>
           </p:cNvSpPr>
           <p:nvPr>
             <p:ph type="body" idx="1"/>
@@ -443,16 +327,18 @@
         </p:nvSpPr>
         <p:spPr/>
         <p:txBody>
-          <a:bodyPr xmlns:a="http://schemas.openxmlformats.org/drawingml/2006/main"/>
-          <a:lstStyle xmlns:a="http://schemas.openxmlformats.org/drawingml/2006/main"/>
-          <a:p xmlns:a="http://schemas.openxmlformats.org/drawingml/2006/main"/>
+          <a:bodyPr/>
+          <a:lstStyle/>
+          <a:p>
+            <a:endParaRPr/>
+          </a:p>
         </p:txBody>
       </p:sp>
       <p:sp>
         <p:nvSpPr>
           <p:cNvPr id="4" name="Slide Number Placeholder 3"/>
           <p:cNvSpPr>
-            <a:spLocks xmlns:a="http://schemas.openxmlformats.org/drawingml/2006/main" noGrp="1"/>
+            <a:spLocks noGrp="1"/>
           </p:cNvSpPr>
           <p:nvPr>
             <p:ph type="sldNum" idx="5"/>
@@ -460,21 +346,23 @@
         </p:nvSpPr>
         <p:spPr/>
         <p:txBody>
-          <a:bodyPr xmlns:a="http://schemas.openxmlformats.org/drawingml/2006/main"/>
-          <a:lstStyle xmlns:a="http://schemas.openxmlformats.org/drawingml/2006/main"/>
-          <a:p xmlns:a="http://schemas.openxmlformats.org/drawingml/2006/main"/>
+          <a:bodyPr/>
+          <a:lstStyle/>
+          <a:p>
+            <a:endParaRPr/>
+          </a:p>
         </p:txBody>
       </p:sp>
     </p:spTree>
   </p:cSld>
   <p:clrMapOvr>
-    <a:masterClrMapping xmlns:a="http://schemas.openxmlformats.org/drawingml/2006/main"/>
+    <a:masterClrMapping/>
   </p:clrMapOvr>
 </p:notes>
 </file>
 
 <file path=ppt/notesSlides/notesSlide2.xml><?xml version="1.0" encoding="utf-8"?>
-<p:notes xmlns:p="http://schemas.openxmlformats.org/presentationml/2006/main">
+<p:notes xmlns:a="http://schemas.openxmlformats.org/drawingml/2006/main" xmlns:r="http://schemas.openxmlformats.org/officeDocument/2006/relationships" xmlns:p="http://schemas.openxmlformats.org/presentationml/2006/main">
   <p:cSld>
     <p:spTree>
       <p:nvGrpSpPr>
@@ -483,16 +371,21 @@
         <p:nvPr/>
       </p:nvGrpSpPr>
       <p:grpSpPr>
-        <a:xfrm xmlns:a="http://schemas.openxmlformats.org/drawingml/2006/main"/>
+        <a:xfrm>
+          <a:off x="0" y="0"/>
+          <a:ext cx="0" cy="0"/>
+          <a:chOff x="0" y="0"/>
+          <a:chExt cx="0" cy="0"/>
+        </a:xfrm>
       </p:grpSpPr>
       <p:sp>
         <p:nvSpPr>
           <p:cNvPr id="2" name="Slide Image Placeholder 1"/>
           <p:cNvSpPr>
-            <a:spLocks xmlns:a="http://schemas.openxmlformats.org/drawingml/2006/main" noGrp="1"/>
+            <a:spLocks noGrp="1" noRot="1" noChangeAspect="1"/>
           </p:cNvSpPr>
           <p:nvPr>
-            <p:ph type="sldImg" idx="0"/>
+            <p:ph type="sldImg"/>
           </p:nvPr>
         </p:nvSpPr>
         <p:spPr/>
@@ -501,7 +394,7 @@
         <p:nvSpPr>
           <p:cNvPr id="3" name="Notes Placeholder 2"/>
           <p:cNvSpPr>
-            <a:spLocks xmlns:a="http://schemas.openxmlformats.org/drawingml/2006/main" noGrp="1"/>
+            <a:spLocks noGrp="1"/>
           </p:cNvSpPr>
           <p:nvPr>
             <p:ph type="body" idx="1"/>
@@ -509,16 +402,18 @@
         </p:nvSpPr>
         <p:spPr/>
         <p:txBody>
-          <a:bodyPr xmlns:a="http://schemas.openxmlformats.org/drawingml/2006/main"/>
-          <a:lstStyle xmlns:a="http://schemas.openxmlformats.org/drawingml/2006/main"/>
-          <a:p xmlns:a="http://schemas.openxmlformats.org/drawingml/2006/main"/>
+          <a:bodyPr/>
+          <a:lstStyle/>
+          <a:p>
+            <a:endParaRPr/>
+          </a:p>
         </p:txBody>
       </p:sp>
       <p:sp>
         <p:nvSpPr>
           <p:cNvPr id="4" name="Slide Number Placeholder 3"/>
           <p:cNvSpPr>
-            <a:spLocks xmlns:a="http://schemas.openxmlformats.org/drawingml/2006/main" noGrp="1"/>
+            <a:spLocks noGrp="1"/>
           </p:cNvSpPr>
           <p:nvPr>
             <p:ph type="sldNum" idx="5"/>
@@ -526,21 +421,23 @@
         </p:nvSpPr>
         <p:spPr/>
         <p:txBody>
-          <a:bodyPr xmlns:a="http://schemas.openxmlformats.org/drawingml/2006/main"/>
-          <a:lstStyle xmlns:a="http://schemas.openxmlformats.org/drawingml/2006/main"/>
-          <a:p xmlns:a="http://schemas.openxmlformats.org/drawingml/2006/main"/>
+          <a:bodyPr/>
+          <a:lstStyle/>
+          <a:p>
+            <a:endParaRPr/>
+          </a:p>
         </p:txBody>
       </p:sp>
     </p:spTree>
   </p:cSld>
   <p:clrMapOvr>
-    <a:masterClrMapping xmlns:a="http://schemas.openxmlformats.org/drawingml/2006/main"/>
+    <a:masterClrMapping/>
   </p:clrMapOvr>
 </p:notes>
 </file>
 
 <file path=ppt/notesSlides/notesSlide3.xml><?xml version="1.0" encoding="utf-8"?>
-<p:notes xmlns:p="http://schemas.openxmlformats.org/presentationml/2006/main">
+<p:notes xmlns:a="http://schemas.openxmlformats.org/drawingml/2006/main" xmlns:r="http://schemas.openxmlformats.org/officeDocument/2006/relationships" xmlns:p="http://schemas.openxmlformats.org/presentationml/2006/main">
   <p:cSld>
     <p:spTree>
       <p:nvGrpSpPr>
@@ -549,16 +446,21 @@
         <p:nvPr/>
       </p:nvGrpSpPr>
       <p:grpSpPr>
-        <a:xfrm xmlns:a="http://schemas.openxmlformats.org/drawingml/2006/main"/>
+        <a:xfrm>
+          <a:off x="0" y="0"/>
+          <a:ext cx="0" cy="0"/>
+          <a:chOff x="0" y="0"/>
+          <a:chExt cx="0" cy="0"/>
+        </a:xfrm>
       </p:grpSpPr>
       <p:sp>
         <p:nvSpPr>
           <p:cNvPr id="2" name="Slide Image Placeholder 1"/>
           <p:cNvSpPr>
-            <a:spLocks xmlns:a="http://schemas.openxmlformats.org/drawingml/2006/main" noGrp="1"/>
+            <a:spLocks noGrp="1" noRot="1" noChangeAspect="1"/>
           </p:cNvSpPr>
           <p:nvPr>
-            <p:ph type="sldImg" idx="0"/>
+            <p:ph type="sldImg"/>
           </p:nvPr>
         </p:nvSpPr>
         <p:spPr/>
@@ -567,7 +469,7 @@
         <p:nvSpPr>
           <p:cNvPr id="3" name="Notes Placeholder 2"/>
           <p:cNvSpPr>
-            <a:spLocks xmlns:a="http://schemas.openxmlformats.org/drawingml/2006/main" noGrp="1"/>
+            <a:spLocks noGrp="1"/>
           </p:cNvSpPr>
           <p:nvPr>
             <p:ph type="body" idx="1"/>
@@ -575,16 +477,18 @@
         </p:nvSpPr>
         <p:spPr/>
         <p:txBody>
-          <a:bodyPr xmlns:a="http://schemas.openxmlformats.org/drawingml/2006/main"/>
-          <a:lstStyle xmlns:a="http://schemas.openxmlformats.org/drawingml/2006/main"/>
-          <a:p xmlns:a="http://schemas.openxmlformats.org/drawingml/2006/main"/>
+          <a:bodyPr/>
+          <a:lstStyle/>
+          <a:p>
+            <a:endParaRPr/>
+          </a:p>
         </p:txBody>
       </p:sp>
       <p:sp>
         <p:nvSpPr>
           <p:cNvPr id="4" name="Slide Number Placeholder 3"/>
           <p:cNvSpPr>
-            <a:spLocks xmlns:a="http://schemas.openxmlformats.org/drawingml/2006/main" noGrp="1"/>
+            <a:spLocks noGrp="1"/>
           </p:cNvSpPr>
           <p:nvPr>
             <p:ph type="sldNum" idx="5"/>
@@ -592,21 +496,23 @@
         </p:nvSpPr>
         <p:spPr/>
         <p:txBody>
-          <a:bodyPr xmlns:a="http://schemas.openxmlformats.org/drawingml/2006/main"/>
-          <a:lstStyle xmlns:a="http://schemas.openxmlformats.org/drawingml/2006/main"/>
-          <a:p xmlns:a="http://schemas.openxmlformats.org/drawingml/2006/main"/>
+          <a:bodyPr/>
+          <a:lstStyle/>
+          <a:p>
+            <a:endParaRPr/>
+          </a:p>
         </p:txBody>
       </p:sp>
     </p:spTree>
   </p:cSld>
   <p:clrMapOvr>
-    <a:masterClrMapping xmlns:a="http://schemas.openxmlformats.org/drawingml/2006/main"/>
+    <a:masterClrMapping/>
   </p:clrMapOvr>
 </p:notes>
 </file>
 
 <file path=ppt/notesSlides/notesSlide4.xml><?xml version="1.0" encoding="utf-8"?>
-<p:notes xmlns:p="http://schemas.openxmlformats.org/presentationml/2006/main">
+<p:notes xmlns:a="http://schemas.openxmlformats.org/drawingml/2006/main" xmlns:r="http://schemas.openxmlformats.org/officeDocument/2006/relationships" xmlns:p="http://schemas.openxmlformats.org/presentationml/2006/main">
   <p:cSld>
     <p:spTree>
       <p:nvGrpSpPr>
@@ -615,16 +521,21 @@
         <p:nvPr/>
       </p:nvGrpSpPr>
       <p:grpSpPr>
-        <a:xfrm xmlns:a="http://schemas.openxmlformats.org/drawingml/2006/main"/>
+        <a:xfrm>
+          <a:off x="0" y="0"/>
+          <a:ext cx="0" cy="0"/>
+          <a:chOff x="0" y="0"/>
+          <a:chExt cx="0" cy="0"/>
+        </a:xfrm>
       </p:grpSpPr>
       <p:sp>
         <p:nvSpPr>
           <p:cNvPr id="2" name="Slide Image Placeholder 1"/>
           <p:cNvSpPr>
-            <a:spLocks xmlns:a="http://schemas.openxmlformats.org/drawingml/2006/main" noGrp="1"/>
+            <a:spLocks noGrp="1" noRot="1" noChangeAspect="1"/>
           </p:cNvSpPr>
           <p:nvPr>
-            <p:ph type="sldImg" idx="0"/>
+            <p:ph type="sldImg"/>
           </p:nvPr>
         </p:nvSpPr>
         <p:spPr/>
@@ -633,7 +544,7 @@
         <p:nvSpPr>
           <p:cNvPr id="3" name="Notes Placeholder 2"/>
           <p:cNvSpPr>
-            <a:spLocks xmlns:a="http://schemas.openxmlformats.org/drawingml/2006/main" noGrp="1"/>
+            <a:spLocks noGrp="1"/>
           </p:cNvSpPr>
           <p:nvPr>
             <p:ph type="body" idx="1"/>
@@ -641,16 +552,18 @@
         </p:nvSpPr>
         <p:spPr/>
         <p:txBody>
-          <a:bodyPr xmlns:a="http://schemas.openxmlformats.org/drawingml/2006/main"/>
-          <a:lstStyle xmlns:a="http://schemas.openxmlformats.org/drawingml/2006/main"/>
-          <a:p xmlns:a="http://schemas.openxmlformats.org/drawingml/2006/main"/>
+          <a:bodyPr/>
+          <a:lstStyle/>
+          <a:p>
+            <a:endParaRPr/>
+          </a:p>
         </p:txBody>
       </p:sp>
       <p:sp>
         <p:nvSpPr>
           <p:cNvPr id="4" name="Slide Number Placeholder 3"/>
           <p:cNvSpPr>
-            <a:spLocks xmlns:a="http://schemas.openxmlformats.org/drawingml/2006/main" noGrp="1"/>
+            <a:spLocks noGrp="1"/>
           </p:cNvSpPr>
           <p:nvPr>
             <p:ph type="sldNum" idx="5"/>
@@ -658,21 +571,23 @@
         </p:nvSpPr>
         <p:spPr/>
         <p:txBody>
-          <a:bodyPr xmlns:a="http://schemas.openxmlformats.org/drawingml/2006/main"/>
-          <a:lstStyle xmlns:a="http://schemas.openxmlformats.org/drawingml/2006/main"/>
-          <a:p xmlns:a="http://schemas.openxmlformats.org/drawingml/2006/main"/>
+          <a:bodyPr/>
+          <a:lstStyle/>
+          <a:p>
+            <a:endParaRPr/>
+          </a:p>
         </p:txBody>
       </p:sp>
     </p:spTree>
   </p:cSld>
   <p:clrMapOvr>
-    <a:masterClrMapping xmlns:a="http://schemas.openxmlformats.org/drawingml/2006/main"/>
+    <a:masterClrMapping/>
   </p:clrMapOvr>
 </p:notes>
 </file>
 
 <file path=ppt/notesSlides/notesSlide5.xml><?xml version="1.0" encoding="utf-8"?>
-<p:notes xmlns:p="http://schemas.openxmlformats.org/presentationml/2006/main">
+<p:notes xmlns:a="http://schemas.openxmlformats.org/drawingml/2006/main" xmlns:r="http://schemas.openxmlformats.org/officeDocument/2006/relationships" xmlns:p="http://schemas.openxmlformats.org/presentationml/2006/main">
   <p:cSld>
     <p:spTree>
       <p:nvGrpSpPr>
@@ -681,16 +596,21 @@
         <p:nvPr/>
       </p:nvGrpSpPr>
       <p:grpSpPr>
-        <a:xfrm xmlns:a="http://schemas.openxmlformats.org/drawingml/2006/main"/>
+        <a:xfrm>
+          <a:off x="0" y="0"/>
+          <a:ext cx="0" cy="0"/>
+          <a:chOff x="0" y="0"/>
+          <a:chExt cx="0" cy="0"/>
+        </a:xfrm>
       </p:grpSpPr>
       <p:sp>
         <p:nvSpPr>
           <p:cNvPr id="2" name="Slide Image Placeholder 1"/>
           <p:cNvSpPr>
-            <a:spLocks xmlns:a="http://schemas.openxmlformats.org/drawingml/2006/main" noGrp="1"/>
+            <a:spLocks noGrp="1" noRot="1" noChangeAspect="1"/>
           </p:cNvSpPr>
           <p:nvPr>
-            <p:ph type="sldImg" idx="0"/>
+            <p:ph type="sldImg"/>
           </p:nvPr>
         </p:nvSpPr>
         <p:spPr/>
@@ -699,7 +619,7 @@
         <p:nvSpPr>
           <p:cNvPr id="3" name="Notes Placeholder 2"/>
           <p:cNvSpPr>
-            <a:spLocks xmlns:a="http://schemas.openxmlformats.org/drawingml/2006/main" noGrp="1"/>
+            <a:spLocks noGrp="1"/>
           </p:cNvSpPr>
           <p:nvPr>
             <p:ph type="body" idx="1"/>
@@ -707,16 +627,18 @@
         </p:nvSpPr>
         <p:spPr/>
         <p:txBody>
-          <a:bodyPr xmlns:a="http://schemas.openxmlformats.org/drawingml/2006/main"/>
-          <a:lstStyle xmlns:a="http://schemas.openxmlformats.org/drawingml/2006/main"/>
-          <a:p xmlns:a="http://schemas.openxmlformats.org/drawingml/2006/main"/>
+          <a:bodyPr/>
+          <a:lstStyle/>
+          <a:p>
+            <a:endParaRPr/>
+          </a:p>
         </p:txBody>
       </p:sp>
       <p:sp>
         <p:nvSpPr>
           <p:cNvPr id="4" name="Slide Number Placeholder 3"/>
           <p:cNvSpPr>
-            <a:spLocks xmlns:a="http://schemas.openxmlformats.org/drawingml/2006/main" noGrp="1"/>
+            <a:spLocks noGrp="1"/>
           </p:cNvSpPr>
           <p:nvPr>
             <p:ph type="sldNum" idx="5"/>
@@ -724,21 +646,23 @@
         </p:nvSpPr>
         <p:spPr/>
         <p:txBody>
-          <a:bodyPr xmlns:a="http://schemas.openxmlformats.org/drawingml/2006/main"/>
-          <a:lstStyle xmlns:a="http://schemas.openxmlformats.org/drawingml/2006/main"/>
-          <a:p xmlns:a="http://schemas.openxmlformats.org/drawingml/2006/main"/>
+          <a:bodyPr/>
+          <a:lstStyle/>
+          <a:p>
+            <a:endParaRPr/>
+          </a:p>
         </p:txBody>
       </p:sp>
     </p:spTree>
   </p:cSld>
   <p:clrMapOvr>
-    <a:masterClrMapping xmlns:a="http://schemas.openxmlformats.org/drawingml/2006/main"/>
+    <a:masterClrMapping/>
   </p:clrMapOvr>
 </p:notes>
 </file>
 
 <file path=ppt/notesSlides/notesSlide6.xml><?xml version="1.0" encoding="utf-8"?>
-<p:notes xmlns:p="http://schemas.openxmlformats.org/presentationml/2006/main">
+<p:notes xmlns:a="http://schemas.openxmlformats.org/drawingml/2006/main" xmlns:r="http://schemas.openxmlformats.org/officeDocument/2006/relationships" xmlns:p="http://schemas.openxmlformats.org/presentationml/2006/main">
   <p:cSld>
     <p:spTree>
       <p:nvGrpSpPr>
@@ -747,16 +671,21 @@
         <p:nvPr/>
       </p:nvGrpSpPr>
       <p:grpSpPr>
-        <a:xfrm xmlns:a="http://schemas.openxmlformats.org/drawingml/2006/main"/>
+        <a:xfrm>
+          <a:off x="0" y="0"/>
+          <a:ext cx="0" cy="0"/>
+          <a:chOff x="0" y="0"/>
+          <a:chExt cx="0" cy="0"/>
+        </a:xfrm>
       </p:grpSpPr>
       <p:sp>
         <p:nvSpPr>
           <p:cNvPr id="2" name="Slide Image Placeholder 1"/>
           <p:cNvSpPr>
-            <a:spLocks xmlns:a="http://schemas.openxmlformats.org/drawingml/2006/main" noGrp="1"/>
+            <a:spLocks noGrp="1" noRot="1" noChangeAspect="1"/>
           </p:cNvSpPr>
           <p:nvPr>
-            <p:ph type="sldImg" idx="0"/>
+            <p:ph type="sldImg"/>
           </p:nvPr>
         </p:nvSpPr>
         <p:spPr/>
@@ -765,7 +694,7 @@
         <p:nvSpPr>
           <p:cNvPr id="3" name="Notes Placeholder 2"/>
           <p:cNvSpPr>
-            <a:spLocks xmlns:a="http://schemas.openxmlformats.org/drawingml/2006/main" noGrp="1"/>
+            <a:spLocks noGrp="1"/>
           </p:cNvSpPr>
           <p:nvPr>
             <p:ph type="body" idx="1"/>
@@ -773,16 +702,18 @@
         </p:nvSpPr>
         <p:spPr/>
         <p:txBody>
-          <a:bodyPr xmlns:a="http://schemas.openxmlformats.org/drawingml/2006/main"/>
-          <a:lstStyle xmlns:a="http://schemas.openxmlformats.org/drawingml/2006/main"/>
-          <a:p xmlns:a="http://schemas.openxmlformats.org/drawingml/2006/main"/>
+          <a:bodyPr/>
+          <a:lstStyle/>
+          <a:p>
+            <a:endParaRPr/>
+          </a:p>
         </p:txBody>
       </p:sp>
       <p:sp>
         <p:nvSpPr>
           <p:cNvPr id="4" name="Slide Number Placeholder 3"/>
           <p:cNvSpPr>
-            <a:spLocks xmlns:a="http://schemas.openxmlformats.org/drawingml/2006/main" noGrp="1"/>
+            <a:spLocks noGrp="1"/>
           </p:cNvSpPr>
           <p:nvPr>
             <p:ph type="sldNum" idx="5"/>
@@ -790,21 +721,23 @@
         </p:nvSpPr>
         <p:spPr/>
         <p:txBody>
-          <a:bodyPr xmlns:a="http://schemas.openxmlformats.org/drawingml/2006/main"/>
-          <a:lstStyle xmlns:a="http://schemas.openxmlformats.org/drawingml/2006/main"/>
-          <a:p xmlns:a="http://schemas.openxmlformats.org/drawingml/2006/main"/>
+          <a:bodyPr/>
+          <a:lstStyle/>
+          <a:p>
+            <a:endParaRPr/>
+          </a:p>
         </p:txBody>
       </p:sp>
     </p:spTree>
   </p:cSld>
   <p:clrMapOvr>
-    <a:masterClrMapping xmlns:a="http://schemas.openxmlformats.org/drawingml/2006/main"/>
+    <a:masterClrMapping/>
   </p:clrMapOvr>
 </p:notes>
 </file>
 
 <file path=ppt/slideLayouts/slideLayout1.xml><?xml version="1.0" encoding="utf-8"?>
-<p:sldLayout xmlns:p="http://schemas.openxmlformats.org/presentationml/2006/main" type="title">
+<p:sldLayout xmlns:a="http://schemas.openxmlformats.org/drawingml/2006/main" xmlns:r="http://schemas.openxmlformats.org/officeDocument/2006/relationships" xmlns:p="http://schemas.openxmlformats.org/presentationml/2006/main" type="title">
   <p:cSld name="Title Slide">
     <p:spTree>
       <p:nvGrpSpPr>
@@ -813,19 +746,27 @@
         <p:nvPr/>
       </p:nvGrpSpPr>
       <p:grpSpPr>
-        <a:xfrm xmlns:a="http://schemas.openxmlformats.org/drawingml/2006/main"/>
+        <a:xfrm>
+          <a:off x="0" y="0"/>
+          <a:ext cx="0" cy="0"/>
+          <a:chOff x="0" y="0"/>
+          <a:chExt cx="0" cy="0"/>
+        </a:xfrm>
       </p:grpSpPr>
     </p:spTree>
   </p:cSld>
+  <p:clrMapOvr>
+    <a:masterClrMapping/>
+  </p:clrMapOvr>
 </p:sldLayout>
 </file>
 
 <file path=ppt/slideMasters/slideMaster1.xml><?xml version="1.0" encoding="utf-8"?>
-<p:sldMaster xmlns:p="http://schemas.openxmlformats.org/presentationml/2006/main">
+<p:sldMaster xmlns:a="http://schemas.openxmlformats.org/drawingml/2006/main" xmlns:r="http://schemas.openxmlformats.org/officeDocument/2006/relationships" xmlns:p="http://schemas.openxmlformats.org/presentationml/2006/main">
   <p:cSld name="Master">
     <p:bg>
       <p:bgRef idx="1001">
-        <a:schemeClr xmlns:a="http://schemas.openxmlformats.org/drawingml/2006/main" val="bg1"/>
+        <a:schemeClr val="bg1"/>
       </p:bgRef>
     </p:bg>
     <p:spTree>
@@ -835,17 +776,22 @@
         <p:nvPr/>
       </p:nvGrpSpPr>
       <p:grpSpPr>
-        <a:xfrm xmlns:a="http://schemas.openxmlformats.org/drawingml/2006/main"/>
+        <a:xfrm>
+          <a:off x="0" y="0"/>
+          <a:ext cx="0" cy="0"/>
+          <a:chOff x="0" y="0"/>
+          <a:chExt cx="0" cy="0"/>
+        </a:xfrm>
       </p:grpSpPr>
     </p:spTree>
   </p:cSld>
   <p:clrMap bg1="lt1" tx1="dk1" bg2="lt2" tx2="dk2" accent1="accent1" accent2="accent2" accent3="accent3" accent4="accent4" accent5="accent5" accent6="accent6" hlink="hlink" folHlink="folHlink"/>
   <p:sldLayoutIdLst>
-    <p:sldLayoutId xmlns:r="http://schemas.openxmlformats.org/officeDocument/2006/relationships" id="2147483649" r:id="Ra30b234652204ea6"/>
+    <p:sldLayoutId id="2147483649" r:id="rId1"/>
   </p:sldLayoutIdLst>
   <p:txStyles>
     <p:titleStyle>
-      <a:lvl1pPr xmlns:a="http://schemas.openxmlformats.org/drawingml/2006/main" algn="l">
+      <a:lvl1pPr algn="l">
         <a:lnSpc>
           <a:spcPct val="90000"/>
         </a:lnSpc>
@@ -864,7 +810,7 @@
       </a:lvl1pPr>
     </p:titleStyle>
     <p:bodyStyle>
-      <a:lvl1pPr xmlns:a="http://schemas.openxmlformats.org/drawingml/2006/main" marL="228600" indent="-228600" algn="l">
+      <a:lvl1pPr marL="228600" indent="-228600" algn="l">
         <a:lnSpc>
           <a:spcPct val="90000"/>
         </a:lnSpc>
@@ -881,7 +827,7 @@
           <a:cs typeface="+mn-lt"/>
         </a:defRPr>
       </a:lvl1pPr>
-      <a:lvl2pPr xmlns:a="http://schemas.openxmlformats.org/drawingml/2006/main" marL="685800" indent="-228600" algn="l">
+      <a:lvl2pPr marL="685800" indent="-228600" algn="l">
         <a:lnSpc>
           <a:spcPct val="90000"/>
         </a:lnSpc>
@@ -898,7 +844,7 @@
           <a:cs typeface="+mn-lt"/>
         </a:defRPr>
       </a:lvl2pPr>
-      <a:lvl3pPr xmlns:a="http://schemas.openxmlformats.org/drawingml/2006/main" marL="1143000" indent="-228600" algn="l">
+      <a:lvl3pPr marL="1143000" indent="-228600" algn="l">
         <a:lnSpc>
           <a:spcPct val="90000"/>
         </a:lnSpc>
@@ -915,7 +861,7 @@
           <a:cs typeface="+mn-lt"/>
         </a:defRPr>
       </a:lvl3pPr>
-      <a:lvl4pPr xmlns:a="http://schemas.openxmlformats.org/drawingml/2006/main" marL="1600200" indent="-228600" algn="l">
+      <a:lvl4pPr marL="1600200" indent="-228600" algn="l">
         <a:lnSpc>
           <a:spcPct val="90000"/>
         </a:lnSpc>
@@ -932,7 +878,7 @@
           <a:cs typeface="+mn-lt"/>
         </a:defRPr>
       </a:lvl4pPr>
-      <a:lvl5pPr xmlns:a="http://schemas.openxmlformats.org/drawingml/2006/main" marL="2057400" indent="-228600" algn="l">
+      <a:lvl5pPr marL="2057400" indent="-228600" algn="l">
         <a:lnSpc>
           <a:spcPct val="90000"/>
         </a:lnSpc>
@@ -949,7 +895,7 @@
           <a:cs typeface="+mn-lt"/>
         </a:defRPr>
       </a:lvl5pPr>
-      <a:lvl6pPr xmlns:a="http://schemas.openxmlformats.org/drawingml/2006/main" marL="2514600" indent="-228600" algn="l">
+      <a:lvl6pPr marL="2514600" indent="-228600" algn="l">
         <a:lnSpc>
           <a:spcPct val="90000"/>
         </a:lnSpc>
@@ -966,7 +912,7 @@
           <a:cs typeface="+mn-lt"/>
         </a:defRPr>
       </a:lvl6pPr>
-      <a:lvl7pPr xmlns:a="http://schemas.openxmlformats.org/drawingml/2006/main" marL="2971800" indent="-228600" algn="l">
+      <a:lvl7pPr marL="2971800" indent="-228600" algn="l">
         <a:lnSpc>
           <a:spcPct val="90000"/>
         </a:lnSpc>
@@ -983,7 +929,7 @@
           <a:cs typeface="+mn-lt"/>
         </a:defRPr>
       </a:lvl7pPr>
-      <a:lvl8pPr xmlns:a="http://schemas.openxmlformats.org/drawingml/2006/main" marL="3429000" indent="-228600" algn="l">
+      <a:lvl8pPr marL="3429000" indent="-228600" algn="l">
         <a:lnSpc>
           <a:spcPct val="90000"/>
         </a:lnSpc>
@@ -1000,7 +946,7 @@
           <a:cs typeface="+mn-lt"/>
         </a:defRPr>
       </a:lvl8pPr>
-      <a:lvl9pPr xmlns:a="http://schemas.openxmlformats.org/drawingml/2006/main" marL="3886200" indent="-228600" algn="l">
+      <a:lvl9pPr marL="3886200" indent="-228600" algn="l">
         <a:lnSpc>
           <a:spcPct val="90000"/>
         </a:lnSpc>
@@ -1019,7 +965,7 @@
       </a:lvl9pPr>
     </p:bodyStyle>
     <p:otherStyle>
-      <a:lvl1pPr xmlns:a="http://schemas.openxmlformats.org/drawingml/2006/main" marL="0" algn="l">
+      <a:lvl1pPr marL="0" algn="l">
         <a:buNone/>
         <a:defRPr sz="1800">
           <a:solidFill>
@@ -1030,7 +976,7 @@
           <a:cs typeface="+mn-lt"/>
         </a:defRPr>
       </a:lvl1pPr>
-      <a:lvl2pPr xmlns:a="http://schemas.openxmlformats.org/drawingml/2006/main" marL="457200" algn="l">
+      <a:lvl2pPr marL="457200" algn="l">
         <a:buNone/>
         <a:defRPr sz="1800">
           <a:solidFill>
@@ -1041,7 +987,7 @@
           <a:cs typeface="+mn-lt"/>
         </a:defRPr>
       </a:lvl2pPr>
-      <a:lvl3pPr xmlns:a="http://schemas.openxmlformats.org/drawingml/2006/main" marL="914400" algn="l">
+      <a:lvl3pPr marL="914400" algn="l">
         <a:buNone/>
         <a:defRPr sz="1800">
           <a:solidFill>
@@ -1052,7 +998,7 @@
           <a:cs typeface="+mn-lt"/>
         </a:defRPr>
       </a:lvl3pPr>
-      <a:lvl4pPr xmlns:a="http://schemas.openxmlformats.org/drawingml/2006/main" marL="1371600" algn="l">
+      <a:lvl4pPr marL="1371600" algn="l">
         <a:buNone/>
         <a:defRPr sz="1800">
           <a:solidFill>
@@ -1063,7 +1009,7 @@
           <a:cs typeface="+mn-lt"/>
         </a:defRPr>
       </a:lvl4pPr>
-      <a:lvl5pPr xmlns:a="http://schemas.openxmlformats.org/drawingml/2006/main" marL="1828800" algn="l">
+      <a:lvl5pPr marL="1828800" algn="l">
         <a:buNone/>
         <a:defRPr sz="1800">
           <a:solidFill>
@@ -1074,7 +1020,7 @@
           <a:cs typeface="+mn-lt"/>
         </a:defRPr>
       </a:lvl5pPr>
-      <a:lvl6pPr xmlns:a="http://schemas.openxmlformats.org/drawingml/2006/main" marL="2286000" algn="l">
+      <a:lvl6pPr marL="2286000" algn="l">
         <a:buNone/>
         <a:defRPr sz="1800">
           <a:solidFill>
@@ -1085,7 +1031,7 @@
           <a:cs typeface="+mn-lt"/>
         </a:defRPr>
       </a:lvl6pPr>
-      <a:lvl7pPr xmlns:a="http://schemas.openxmlformats.org/drawingml/2006/main" marL="2743200" algn="l">
+      <a:lvl7pPr marL="2743200" algn="l">
         <a:buNone/>
         <a:defRPr sz="1800">
           <a:solidFill>
@@ -1096,7 +1042,7 @@
           <a:cs typeface="+mn-lt"/>
         </a:defRPr>
       </a:lvl7pPr>
-      <a:lvl8pPr xmlns:a="http://schemas.openxmlformats.org/drawingml/2006/main" marL="3200400" algn="l">
+      <a:lvl8pPr marL="3200400" algn="l">
         <a:buNone/>
         <a:defRPr sz="1800">
           <a:solidFill>
@@ -1107,7 +1053,7 @@
           <a:cs typeface="+mn-lt"/>
         </a:defRPr>
       </a:lvl8pPr>
-      <a:lvl9pPr xmlns:a="http://schemas.openxmlformats.org/drawingml/2006/main" marL="3657600" algn="l">
+      <a:lvl9pPr marL="3657600" algn="l">
         <a:buNone/>
         <a:defRPr sz="1800">
           <a:solidFill>
@@ -1123,259 +1069,15 @@
 </p:sldMaster>
 </file>
 
-<file path=ppt/slideMasters/theme/theme2.xml><?xml version="1.0" encoding="utf-8"?>
-<a:theme xmlns:a="http://schemas.openxmlformats.org/drawingml/2006/main" name="ChatGPT">
-  <a:themeElements>
-    <a:clrScheme name="ChatGPT">
-      <a:dk1>
-        <a:srgbClr val="000000"/>
-      </a:dk1>
-      <a:lt1>
-        <a:srgbClr val="FFFFFF"/>
-      </a:lt1>
-      <a:dk2>
-        <a:srgbClr val="0E2841"/>
-      </a:dk2>
-      <a:lt2>
-        <a:srgbClr val="E8E8E8"/>
-      </a:lt2>
-      <a:accent1>
-        <a:srgbClr val="156082"/>
-      </a:accent1>
-      <a:accent2>
-        <a:srgbClr val="E97132"/>
-      </a:accent2>
-      <a:accent3>
-        <a:srgbClr val="196B24"/>
-      </a:accent3>
-      <a:accent4>
-        <a:srgbClr val="0F9ED5"/>
-      </a:accent4>
-      <a:accent5>
-        <a:srgbClr val="A02B93"/>
-      </a:accent5>
-      <a:accent6>
-        <a:srgbClr val="4EA72E"/>
-      </a:accent6>
-      <a:hlink>
-        <a:srgbClr val="467886"/>
-      </a:hlink>
-      <a:folHlink>
-        <a:srgbClr val="96607D"/>
-      </a:folHlink>
-    </a:clrScheme>
-    <a:fontScheme name="Office">
-      <a:majorFont>
-        <a:latin typeface="Calibri Light"/>
-        <a:ea typeface="Calibri Light"/>
-        <a:cs typeface="Calibri Light"/>
-      </a:majorFont>
-      <a:minorFont>
-        <a:latin typeface="Calibri"/>
-        <a:ea typeface="Calibri"/>
-        <a:cs typeface="Calibri"/>
-      </a:minorFont>
-    </a:fontScheme>
-    <a:fmtScheme name="ChatGPT">
-      <a:fillStyleLst>
-        <a:solidFill>
-          <a:schemeClr val="phClr"/>
-        </a:solidFill>
-        <a:gradFill>
-          <a:gsLst>
-            <a:gs pos="0">
-              <a:schemeClr val="phClr">
-                <a:tint val="67000"/>
-                <a:lumMod val="110000"/>
-                <a:satMod val="105000"/>
-              </a:schemeClr>
-            </a:gs>
-            <a:gs pos="50000">
-              <a:schemeClr val="phClr">
-                <a:tint val="73000"/>
-                <a:lumMod val="105000"/>
-                <a:satMod val="103000"/>
-              </a:schemeClr>
-            </a:gs>
-            <a:gs pos="100000">
-              <a:schemeClr val="phClr">
-                <a:tint val="81000"/>
-                <a:lumMod val="105000"/>
-                <a:satMod val="109000"/>
-              </a:schemeClr>
-            </a:gs>
-          </a:gsLst>
-          <a:lin ang="5400000" scaled="0"/>
-        </a:gradFill>
-        <a:gradFill>
-          <a:gsLst>
-            <a:gs pos="0">
-              <a:schemeClr val="phClr">
-                <a:tint val="94000"/>
-                <a:lumMod val="102000"/>
-                <a:satMod val="103000"/>
-              </a:schemeClr>
-            </a:gs>
-            <a:gs pos="50000">
-              <a:schemeClr val="phClr">
-                <a:shade val="100000"/>
-                <a:lumMod val="100000"/>
-                <a:satMod val="110000"/>
-              </a:schemeClr>
-            </a:gs>
-            <a:gs pos="100000">
-              <a:schemeClr val="phClr">
-                <a:shade val="78000"/>
-                <a:lumMod val="99000"/>
-                <a:satMod val="120000"/>
-              </a:schemeClr>
-            </a:gs>
-          </a:gsLst>
-          <a:lin ang="5400000" scaled="0"/>
-        </a:gradFill>
-      </a:fillStyleLst>
-      <a:lnStyleLst>
-        <a:ln w="12700">
-          <a:solidFill>
-            <a:schemeClr val="phClr"/>
-          </a:solidFill>
-          <a:prstDash val="solid"/>
-        </a:ln>
-        <a:ln w="19050">
-          <a:solidFill>
-            <a:schemeClr val="phClr"/>
-          </a:solidFill>
-          <a:prstDash val="solid"/>
-        </a:ln>
-        <a:ln w="25400">
-          <a:solidFill>
-            <a:schemeClr val="phClr"/>
-          </a:solidFill>
-          <a:prstDash val="solid"/>
-        </a:ln>
-      </a:lnStyleLst>
-      <a:effectStyleLst>
-        <a:effectStyle>
-          <a:effectLst/>
-        </a:effectStyle>
-        <a:effectStyle>
-          <a:effectLst/>
-        </a:effectStyle>
-        <a:effectStyle>
-          <a:effectLst>
-            <a:outerShdw blurRad="57150" dist="19050" dir="5400000">
-              <a:srgbClr val="000000">
-                <a:alpha val="16000"/>
-              </a:srgbClr>
-            </a:outerShdw>
-          </a:effectLst>
-        </a:effectStyle>
-        <a:effectStyle>
-          <a:effectLst>
-            <a:outerShdw blurRad="19050" dist="9525" dir="5400000">
-              <a:srgbClr val="000000">
-                <a:alpha val="6000"/>
-              </a:srgbClr>
-            </a:outerShdw>
-          </a:effectLst>
-        </a:effectStyle>
-        <a:effectStyle>
-          <a:effectLst>
-            <a:outerShdw blurRad="28575" dist="9525" dir="5400000">
-              <a:srgbClr val="000000">
-                <a:alpha val="8000"/>
-              </a:srgbClr>
-            </a:outerShdw>
-          </a:effectLst>
-        </a:effectStyle>
-        <a:effectStyle>
-          <a:effectLst>
-            <a:outerShdw blurRad="57150" dist="19050" dir="5400000">
-              <a:srgbClr val="000000">
-                <a:alpha val="10000"/>
-              </a:srgbClr>
-            </a:outerShdw>
-          </a:effectLst>
-        </a:effectStyle>
-        <a:effectStyle>
-          <a:effectLst>
-            <a:outerShdw blurRad="114300" dist="38100" dir="5400000">
-              <a:srgbClr val="000000">
-                <a:alpha val="12000"/>
-              </a:srgbClr>
-            </a:outerShdw>
-          </a:effectLst>
-        </a:effectStyle>
-        <a:effectStyle>
-          <a:effectLst>
-            <a:outerShdw blurRad="171450" dist="57150" dir="5400000">
-              <a:srgbClr val="000000">
-                <a:alpha val="16000"/>
-              </a:srgbClr>
-            </a:outerShdw>
-          </a:effectLst>
-        </a:effectStyle>
-        <a:effectStyle>
-          <a:effectLst>
-            <a:outerShdw blurRad="266700" dist="95250" dir="5400000">
-              <a:srgbClr val="000000">
-                <a:alpha val="24000"/>
-              </a:srgbClr>
-            </a:outerShdw>
-          </a:effectLst>
-        </a:effectStyle>
-      </a:effectStyleLst>
-      <a:bgFillStyleLst>
-        <a:solidFill>
-          <a:schemeClr val="phClr"/>
-        </a:solidFill>
-        <a:solidFill>
-          <a:schemeClr val="phClr">
-            <a:tint val="95000"/>
-            <a:satMod val="170000"/>
-          </a:schemeClr>
-        </a:solidFill>
-        <a:gradFill>
-          <a:gsLst>
-            <a:gs pos="0">
-              <a:schemeClr val="phClr">
-                <a:tint val="93000"/>
-                <a:shade val="98000"/>
-                <a:lumMod val="102000"/>
-                <a:satMod val="150000"/>
-              </a:schemeClr>
-            </a:gs>
-            <a:gs pos="50000">
-              <a:schemeClr val="phClr">
-                <a:tint val="98000"/>
-                <a:shade val="90000"/>
-                <a:lumMod val="103000"/>
-                <a:satMod val="130000"/>
-              </a:schemeClr>
-            </a:gs>
-            <a:gs pos="100000">
-              <a:schemeClr val="phClr">
-                <a:shade val="63000"/>
-                <a:satMod val="120000"/>
-              </a:schemeClr>
-            </a:gs>
-          </a:gsLst>
-          <a:lin ang="5400000" scaled="0"/>
-        </a:gradFill>
-      </a:bgFillStyleLst>
-    </a:fmtScheme>
-  </a:themeElements>
-</a:theme>
-</file>
-
 <file path=ppt/slides/slide1.xml><?xml version="1.0" encoding="utf-8"?>
-<p:sld xmlns:p="http://schemas.openxmlformats.org/presentationml/2006/main">
+<p:sld xmlns:a="http://schemas.openxmlformats.org/drawingml/2006/main" xmlns:r="http://schemas.openxmlformats.org/officeDocument/2006/relationships" xmlns:p="http://schemas.openxmlformats.org/presentationml/2006/main">
   <p:cSld>
     <p:bg>
       <p:bgPr>
-        <a:solidFill xmlns:a="http://schemas.openxmlformats.org/drawingml/2006/main">
+        <a:solidFill>
           <a:srgbClr val="FFFFFF"/>
         </a:solidFill>
+        <a:effectLst/>
       </p:bgPr>
     </p:bg>
     <p:spTree>
@@ -1385,42 +1087,47 @@
         <p:nvPr/>
       </p:nvGrpSpPr>
       <p:grpSpPr>
-        <a:xfrm xmlns:a="http://schemas.openxmlformats.org/drawingml/2006/main"/>
+        <a:xfrm>
+          <a:off x="0" y="0"/>
+          <a:ext cx="0" cy="0"/>
+          <a:chOff x="0" y="0"/>
+          <a:chExt cx="0" cy="0"/>
+        </a:xfrm>
       </p:grpSpPr>
       <p:sp>
         <p:nvSpPr>
-          <p:cNvPr id="9" name="">
-            <a:extLst xmlns:a="http://schemas.openxmlformats.org/drawingml/2006/main">
+          <p:cNvPr id="9" name="Rectangle 8">
+            <a:extLst>
               <a:ext uri="{FF2B5EF4-FFF2-40B4-BE49-F238E27FC236}">
                 <a16:creationId xmlns:a16="http://schemas.microsoft.com/office/drawing/2014/main" id="{9848BF72-16C8-4D39-8C96-4395E785972B}"/>
               </a:ext>
             </a:extLst>
           </p:cNvPr>
           <p:cNvSpPr>
-            <a:spLocks xmlns:a="http://schemas.openxmlformats.org/drawingml/2006/main" noGrp="1"/>
-          </p:cNvSpPr>
-          <p:nvPr/>
-        </p:nvSpPr>
-        <p:spPr>
-          <a:xfrm xmlns:a="http://schemas.openxmlformats.org/drawingml/2006/main">
+            <a:spLocks noGrp="1"/>
+          </p:cNvSpPr>
+          <p:nvPr/>
+        </p:nvSpPr>
+        <p:spPr>
+          <a:xfrm>
             <a:off x="419100" y="381000"/>
             <a:ext cx="8858250" cy="323850"/>
           </a:xfrm>
-          <a:prstGeom xmlns:a="http://schemas.openxmlformats.org/drawingml/2006/main" prst="rect">
-            <a:avLst/>
-          </a:prstGeom>
-          <a:noFill xmlns:a="http://schemas.openxmlformats.org/drawingml/2006/main"/>
-          <a:ln xmlns:a="http://schemas.openxmlformats.org/drawingml/2006/main" w="0">
-            <a:noFill/>
-            <a:prstDash val="solid"/>
-          </a:ln>
-        </p:spPr>
-        <p:txBody>
-          <a:bodyPr xmlns:a="http://schemas.openxmlformats.org/drawingml/2006/main" anchor="t">
-            <a:normAutofit fontScale="100000"/>
+          <a:prstGeom prst="rect">
+            <a:avLst/>
+          </a:prstGeom>
+          <a:noFill/>
+          <a:ln w="0">
+            <a:noFill/>
+            <a:prstDash val="solid"/>
+          </a:ln>
+        </p:spPr>
+        <p:txBody>
+          <a:bodyPr anchor="t">
+            <a:normAutofit/>
           </a:bodyPr>
-          <a:lstStyle xmlns:a="http://schemas.openxmlformats.org/drawingml/2006/main"/>
-          <a:p xmlns:a="http://schemas.openxmlformats.org/drawingml/2006/main">
+          <a:lstStyle/>
+          <a:p>
             <a:pPr algn="l">
               <a:defRPr sz="1200" b="1">
                 <a:solidFill>
@@ -1447,38 +1154,38 @@
       </p:sp>
       <p:sp>
         <p:nvSpPr>
-          <p:cNvPr id="2" name="">
-            <a:extLst xmlns:a="http://schemas.openxmlformats.org/drawingml/2006/main">
+          <p:cNvPr id="2" name="Rectangle 1">
+            <a:extLst>
               <a:ext uri="{FF2B5EF4-FFF2-40B4-BE49-F238E27FC236}">
                 <a16:creationId xmlns:a16="http://schemas.microsoft.com/office/drawing/2014/main" id="{48D34120-7BA9-46AD-A59E-12F222BC471D}"/>
               </a:ext>
             </a:extLst>
           </p:cNvPr>
           <p:cNvSpPr>
-            <a:spLocks xmlns:a="http://schemas.openxmlformats.org/drawingml/2006/main" noGrp="1"/>
-          </p:cNvSpPr>
-          <p:nvPr/>
-        </p:nvSpPr>
-        <p:spPr>
-          <a:xfrm xmlns:a="http://schemas.openxmlformats.org/drawingml/2006/main">
+            <a:spLocks noGrp="1"/>
+          </p:cNvSpPr>
+          <p:nvPr/>
+        </p:nvSpPr>
+        <p:spPr>
+          <a:xfrm>
             <a:off x="419100" y="1790700"/>
             <a:ext cx="8096250" cy="1524000"/>
           </a:xfrm>
-          <a:prstGeom xmlns:a="http://schemas.openxmlformats.org/drawingml/2006/main" prst="rect">
-            <a:avLst/>
-          </a:prstGeom>
-          <a:noFill xmlns:a="http://schemas.openxmlformats.org/drawingml/2006/main"/>
-          <a:ln xmlns:a="http://schemas.openxmlformats.org/drawingml/2006/main" w="0">
-            <a:noFill/>
-            <a:prstDash val="solid"/>
-          </a:ln>
-        </p:spPr>
-        <p:txBody>
-          <a:bodyPr xmlns:a="http://schemas.openxmlformats.org/drawingml/2006/main" anchor="b">
+          <a:prstGeom prst="rect">
+            <a:avLst/>
+          </a:prstGeom>
+          <a:noFill/>
+          <a:ln w="0">
+            <a:noFill/>
+            <a:prstDash val="solid"/>
+          </a:ln>
+        </p:spPr>
+        <p:txBody>
+          <a:bodyPr anchor="b">
             <a:normAutofit fontScale="97917"/>
           </a:bodyPr>
-          <a:lstStyle xmlns:a="http://schemas.openxmlformats.org/drawingml/2006/main"/>
-          <a:p xmlns:a="http://schemas.openxmlformats.org/drawingml/2006/main">
+          <a:lstStyle/>
+          <a:p>
             <a:pPr algn="l">
               <a:defRPr sz="4800" b="1">
                 <a:solidFill>
@@ -1505,38 +1212,38 @@
       </p:sp>
       <p:sp>
         <p:nvSpPr>
-          <p:cNvPr id="3" name="">
-            <a:extLst xmlns:a="http://schemas.openxmlformats.org/drawingml/2006/main">
+          <p:cNvPr id="3" name="Rectangle 2">
+            <a:extLst>
               <a:ext uri="{FF2B5EF4-FFF2-40B4-BE49-F238E27FC236}">
                 <a16:creationId xmlns:a16="http://schemas.microsoft.com/office/drawing/2014/main" id="{15A3EF93-E0E4-4B5F-9D20-CA25824B1515}"/>
               </a:ext>
             </a:extLst>
           </p:cNvPr>
           <p:cNvSpPr>
-            <a:spLocks xmlns:a="http://schemas.openxmlformats.org/drawingml/2006/main" noGrp="1"/>
-          </p:cNvSpPr>
-          <p:nvPr/>
-        </p:nvSpPr>
-        <p:spPr>
-          <a:xfrm xmlns:a="http://schemas.openxmlformats.org/drawingml/2006/main">
+            <a:spLocks noGrp="1"/>
+          </p:cNvSpPr>
+          <p:nvPr/>
+        </p:nvSpPr>
+        <p:spPr>
+          <a:xfrm>
             <a:off x="419100" y="3638550"/>
             <a:ext cx="6667500" cy="857250"/>
           </a:xfrm>
-          <a:prstGeom xmlns:a="http://schemas.openxmlformats.org/drawingml/2006/main" prst="rect">
-            <a:avLst/>
-          </a:prstGeom>
-          <a:noFill xmlns:a="http://schemas.openxmlformats.org/drawingml/2006/main"/>
-          <a:ln xmlns:a="http://schemas.openxmlformats.org/drawingml/2006/main" w="0">
-            <a:noFill/>
-            <a:prstDash val="solid"/>
-          </a:ln>
-        </p:spPr>
-        <p:txBody>
-          <a:bodyPr xmlns:a="http://schemas.openxmlformats.org/drawingml/2006/main" anchor="t">
-            <a:normAutofit fontScale="100000"/>
+          <a:prstGeom prst="rect">
+            <a:avLst/>
+          </a:prstGeom>
+          <a:noFill/>
+          <a:ln w="0">
+            <a:noFill/>
+            <a:prstDash val="solid"/>
+          </a:ln>
+        </p:spPr>
+        <p:txBody>
+          <a:bodyPr anchor="t">
+            <a:normAutofit/>
           </a:bodyPr>
-          <a:lstStyle xmlns:a="http://schemas.openxmlformats.org/drawingml/2006/main"/>
-          <a:p xmlns:a="http://schemas.openxmlformats.org/drawingml/2006/main">
+          <a:lstStyle/>
+          <a:p>
             <a:pPr algn="l">
               <a:defRPr sz="1950" b="0">
                 <a:solidFill>
@@ -1548,7 +1255,7 @@
               </a:defRPr>
             </a:pPr>
             <a:r>
-              <a:rPr sz="1950" b="0">
+              <a:rPr sz="1950" b="0" dirty="0" err="1">
                 <a:solidFill>
                   <a:srgbClr val="667085"/>
                 </a:solidFill>
@@ -1556,109 +1263,205 @@
                 <a:ea typeface="Arial"/>
                 <a:cs typeface="Arial"/>
               </a:rPr>
-              <a:t>Upraviteľná šablóna pre pravidelné tímové reportovanie</a:t>
-            </a:r>
-          </a:p>
-        </p:txBody>
-      </p:sp>
-      <p:sp>
-        <p:nvSpPr>
-          <p:cNvPr id="4" name="">
-            <a:extLst xmlns:a="http://schemas.openxmlformats.org/drawingml/2006/main">
+              <a:t>Upraviteľná</a:t>
+            </a:r>
+            <a:r>
+              <a:rPr sz="1950" b="0" dirty="0">
+                <a:solidFill>
+                  <a:srgbClr val="667085"/>
+                </a:solidFill>
+                <a:latin typeface="Arial"/>
+                <a:ea typeface="Arial"/>
+                <a:cs typeface="Arial"/>
+              </a:rPr>
+              <a:t> </a:t>
+            </a:r>
+            <a:r>
+              <a:rPr sz="1950" b="0" dirty="0" err="1">
+                <a:solidFill>
+                  <a:srgbClr val="667085"/>
+                </a:solidFill>
+                <a:latin typeface="Arial"/>
+                <a:ea typeface="Arial"/>
+                <a:cs typeface="Arial"/>
+              </a:rPr>
+              <a:t>šablóna</a:t>
+            </a:r>
+            <a:r>
+              <a:rPr sz="1950" b="0" dirty="0">
+                <a:solidFill>
+                  <a:srgbClr val="667085"/>
+                </a:solidFill>
+                <a:latin typeface="Arial"/>
+                <a:ea typeface="Arial"/>
+                <a:cs typeface="Arial"/>
+              </a:rPr>
+              <a:t> pre </a:t>
+            </a:r>
+            <a:r>
+              <a:rPr sz="1950" b="0" dirty="0" err="1">
+                <a:solidFill>
+                  <a:srgbClr val="667085"/>
+                </a:solidFill>
+                <a:latin typeface="Arial"/>
+                <a:ea typeface="Arial"/>
+                <a:cs typeface="Arial"/>
+              </a:rPr>
+              <a:t>pravidelné</a:t>
+            </a:r>
+            <a:r>
+              <a:rPr sz="1950" b="0" dirty="0">
+                <a:solidFill>
+                  <a:srgbClr val="667085"/>
+                </a:solidFill>
+                <a:latin typeface="Arial"/>
+                <a:ea typeface="Arial"/>
+                <a:cs typeface="Arial"/>
+              </a:rPr>
+              <a:t> </a:t>
+            </a:r>
+            <a:r>
+              <a:rPr sz="1950" b="0" dirty="0" err="1">
+                <a:solidFill>
+                  <a:srgbClr val="667085"/>
+                </a:solidFill>
+                <a:latin typeface="Arial"/>
+                <a:ea typeface="Arial"/>
+                <a:cs typeface="Arial"/>
+              </a:rPr>
+              <a:t>tímové</a:t>
+            </a:r>
+            <a:r>
+              <a:rPr sz="1950" b="0" dirty="0">
+                <a:solidFill>
+                  <a:srgbClr val="667085"/>
+                </a:solidFill>
+                <a:latin typeface="Arial"/>
+                <a:ea typeface="Arial"/>
+                <a:cs typeface="Arial"/>
+              </a:rPr>
+              <a:t> </a:t>
+            </a:r>
+            <a:r>
+              <a:rPr sz="1950" b="0" dirty="0" err="1">
+                <a:solidFill>
+                  <a:srgbClr val="667085"/>
+                </a:solidFill>
+                <a:latin typeface="Arial"/>
+                <a:ea typeface="Arial"/>
+                <a:cs typeface="Arial"/>
+              </a:rPr>
+              <a:t>reportovanie</a:t>
+            </a:r>
+            <a:endParaRPr sz="1950" b="0" dirty="0">
+              <a:solidFill>
+                <a:srgbClr val="667085"/>
+              </a:solidFill>
+              <a:latin typeface="Arial"/>
+              <a:ea typeface="Arial"/>
+              <a:cs typeface="Arial"/>
+            </a:endParaRPr>
+          </a:p>
+        </p:txBody>
+      </p:sp>
+      <p:sp>
+        <p:nvSpPr>
+          <p:cNvPr id="4" name="Rectangle 3">
+            <a:extLst>
               <a:ext uri="{FF2B5EF4-FFF2-40B4-BE49-F238E27FC236}">
                 <a16:creationId xmlns:a16="http://schemas.microsoft.com/office/drawing/2014/main" id="{C669A7B7-0A48-42A9-B0A3-068800FEAC88}"/>
               </a:ext>
             </a:extLst>
           </p:cNvPr>
           <p:cNvSpPr>
-            <a:spLocks xmlns:a="http://schemas.openxmlformats.org/drawingml/2006/main" noGrp="1"/>
-          </p:cNvSpPr>
-          <p:nvPr/>
-        </p:nvSpPr>
-        <p:spPr>
-          <a:xfrm xmlns:a="http://schemas.openxmlformats.org/drawingml/2006/main">
+            <a:spLocks noGrp="1"/>
+          </p:cNvSpPr>
+          <p:nvPr/>
+        </p:nvSpPr>
+        <p:spPr>
+          <a:xfrm>
             <a:off x="8991600" y="381000"/>
             <a:ext cx="2781300" cy="5619750"/>
           </a:xfrm>
-          <a:prstGeom xmlns:a="http://schemas.openxmlformats.org/drawingml/2006/main" prst="rect">
-            <a:avLst/>
-          </a:prstGeom>
-          <a:solidFill xmlns:a="http://schemas.openxmlformats.org/drawingml/2006/main">
+          <a:prstGeom prst="rect">
+            <a:avLst/>
+          </a:prstGeom>
+          <a:solidFill>
             <a:srgbClr val="D9F0FB"/>
           </a:solidFill>
-          <a:ln xmlns:a="http://schemas.openxmlformats.org/drawingml/2006/main" w="0">
-            <a:noFill/>
-            <a:prstDash val="solid"/>
-          </a:ln>
-        </p:spPr>
-      </p:sp>
-      <p:sp>
-        <p:nvSpPr>
-          <p:cNvPr id="5" name="">
-            <a:extLst xmlns:a="http://schemas.openxmlformats.org/drawingml/2006/main">
+          <a:ln w="0">
+            <a:noFill/>
+            <a:prstDash val="solid"/>
+          </a:ln>
+        </p:spPr>
+      </p:sp>
+      <p:sp>
+        <p:nvSpPr>
+          <p:cNvPr id="5" name="Rounded Rectangle 4">
+            <a:extLst>
               <a:ext uri="{FF2B5EF4-FFF2-40B4-BE49-F238E27FC236}">
                 <a16:creationId xmlns:a16="http://schemas.microsoft.com/office/drawing/2014/main" id="{030751C7-63FF-4593-8C5A-7FDCA24F6CB5}"/>
               </a:ext>
             </a:extLst>
           </p:cNvPr>
           <p:cNvSpPr>
-            <a:spLocks xmlns:a="http://schemas.openxmlformats.org/drawingml/2006/main" noGrp="1"/>
-          </p:cNvSpPr>
-          <p:nvPr/>
-        </p:nvSpPr>
-        <p:spPr>
-          <a:xfrm xmlns:a="http://schemas.openxmlformats.org/drawingml/2006/main">
+            <a:spLocks noGrp="1"/>
+          </p:cNvSpPr>
+          <p:nvPr/>
+        </p:nvSpPr>
+        <p:spPr>
+          <a:xfrm>
             <a:off x="9525000" y="1504950"/>
             <a:ext cx="1714500" cy="1714500"/>
           </a:xfrm>
-          <a:prstGeom xmlns:a="http://schemas.openxmlformats.org/drawingml/2006/main" prst="roundRect">
+          <a:prstGeom prst="roundRect">
             <a:avLst>
               <a:gd name="adj" fmla="val 6667"/>
             </a:avLst>
           </a:prstGeom>
-          <a:solidFill xmlns:a="http://schemas.openxmlformats.org/drawingml/2006/main">
+          <a:solidFill>
             <a:srgbClr val="3D8DFF"/>
           </a:solidFill>
-          <a:ln xmlns:a="http://schemas.openxmlformats.org/drawingml/2006/main" w="0">
-            <a:noFill/>
-            <a:prstDash val="solid"/>
-          </a:ln>
-        </p:spPr>
-      </p:sp>
-      <p:sp>
-        <p:nvSpPr>
-          <p:cNvPr id="6" name="">
-            <a:extLst xmlns:a="http://schemas.openxmlformats.org/drawingml/2006/main">
+          <a:ln w="0">
+            <a:noFill/>
+            <a:prstDash val="solid"/>
+          </a:ln>
+        </p:spPr>
+      </p:sp>
+      <p:sp>
+        <p:nvSpPr>
+          <p:cNvPr id="6" name="Rectangle 5">
+            <a:extLst>
               <a:ext uri="{FF2B5EF4-FFF2-40B4-BE49-F238E27FC236}">
                 <a16:creationId xmlns:a16="http://schemas.microsoft.com/office/drawing/2014/main" id="{E84FEB13-F633-492A-B851-6DC0DACBA95B}"/>
               </a:ext>
             </a:extLst>
           </p:cNvPr>
           <p:cNvSpPr>
-            <a:spLocks xmlns:a="http://schemas.openxmlformats.org/drawingml/2006/main" noGrp="1"/>
-          </p:cNvSpPr>
-          <p:nvPr/>
-        </p:nvSpPr>
-        <p:spPr>
-          <a:xfrm xmlns:a="http://schemas.openxmlformats.org/drawingml/2006/main">
+            <a:spLocks noGrp="1"/>
+          </p:cNvSpPr>
+          <p:nvPr/>
+        </p:nvSpPr>
+        <p:spPr>
+          <a:xfrm>
             <a:off x="9734550" y="2114550"/>
             <a:ext cx="1295400" cy="514350"/>
           </a:xfrm>
-          <a:prstGeom xmlns:a="http://schemas.openxmlformats.org/drawingml/2006/main" prst="rect">
-            <a:avLst/>
-          </a:prstGeom>
-          <a:noFill xmlns:a="http://schemas.openxmlformats.org/drawingml/2006/main"/>
-          <a:ln xmlns:a="http://schemas.openxmlformats.org/drawingml/2006/main" w="0">
-            <a:noFill/>
-            <a:prstDash val="solid"/>
-          </a:ln>
-        </p:spPr>
-        <p:txBody>
-          <a:bodyPr xmlns:a="http://schemas.openxmlformats.org/drawingml/2006/main" anchor="ctr">
-            <a:normAutofit fontScale="100000"/>
+          <a:prstGeom prst="rect">
+            <a:avLst/>
+          </a:prstGeom>
+          <a:noFill/>
+          <a:ln w="0">
+            <a:noFill/>
+            <a:prstDash val="solid"/>
+          </a:ln>
+        </p:spPr>
+        <p:txBody>
+          <a:bodyPr anchor="ctr">
+            <a:normAutofit/>
           </a:bodyPr>
-          <a:lstStyle xmlns:a="http://schemas.openxmlformats.org/drawingml/2006/main"/>
-          <a:p xmlns:a="http://schemas.openxmlformats.org/drawingml/2006/main">
+          <a:lstStyle/>
+          <a:p>
             <a:pPr algn="ctr">
               <a:defRPr sz="1875" b="1">
                 <a:solidFill>
@@ -1685,38 +1488,38 @@
       </p:sp>
       <p:sp>
         <p:nvSpPr>
-          <p:cNvPr id="7" name="">
-            <a:extLst xmlns:a="http://schemas.openxmlformats.org/drawingml/2006/main">
+          <p:cNvPr id="7" name="Rectangle 6">
+            <a:extLst>
               <a:ext uri="{FF2B5EF4-FFF2-40B4-BE49-F238E27FC236}">
                 <a16:creationId xmlns:a16="http://schemas.microsoft.com/office/drawing/2014/main" id="{6D200FF2-C21F-487E-A65E-D14D25EF6D99}"/>
               </a:ext>
             </a:extLst>
           </p:cNvPr>
           <p:cNvSpPr>
-            <a:spLocks xmlns:a="http://schemas.openxmlformats.org/drawingml/2006/main" noGrp="1"/>
-          </p:cNvSpPr>
-          <p:nvPr/>
-        </p:nvSpPr>
-        <p:spPr>
-          <a:xfrm xmlns:a="http://schemas.openxmlformats.org/drawingml/2006/main">
+            <a:spLocks noGrp="1"/>
+          </p:cNvSpPr>
+          <p:nvPr/>
+        </p:nvSpPr>
+        <p:spPr>
+          <a:xfrm>
             <a:off x="419100" y="6419850"/>
             <a:ext cx="3429000" cy="209550"/>
           </a:xfrm>
-          <a:prstGeom xmlns:a="http://schemas.openxmlformats.org/drawingml/2006/main" prst="rect">
-            <a:avLst/>
-          </a:prstGeom>
-          <a:noFill xmlns:a="http://schemas.openxmlformats.org/drawingml/2006/main"/>
-          <a:ln xmlns:a="http://schemas.openxmlformats.org/drawingml/2006/main" w="0">
-            <a:noFill/>
-            <a:prstDash val="solid"/>
-          </a:ln>
-        </p:spPr>
-        <p:txBody>
-          <a:bodyPr xmlns:a="http://schemas.openxmlformats.org/drawingml/2006/main" anchor="t">
+          <a:prstGeom prst="rect">
+            <a:avLst/>
+          </a:prstGeom>
+          <a:noFill/>
+          <a:ln w="0">
+            <a:noFill/>
+            <a:prstDash val="solid"/>
+          </a:ln>
+        </p:spPr>
+        <p:txBody>
+          <a:bodyPr anchor="t">
             <a:normAutofit fontScale="86111"/>
           </a:bodyPr>
-          <a:lstStyle xmlns:a="http://schemas.openxmlformats.org/drawingml/2006/main"/>
-          <a:p xmlns:a="http://schemas.openxmlformats.org/drawingml/2006/main">
+          <a:lstStyle/>
+          <a:p>
             <a:pPr algn="l">
               <a:defRPr sz="900" b="0">
                 <a:solidFill>
@@ -1743,38 +1546,38 @@
       </p:sp>
       <p:sp>
         <p:nvSpPr>
-          <p:cNvPr id="8" name="">
-            <a:extLst xmlns:a="http://schemas.openxmlformats.org/drawingml/2006/main">
+          <p:cNvPr id="8" name="Rectangle 7">
+            <a:extLst>
               <a:ext uri="{FF2B5EF4-FFF2-40B4-BE49-F238E27FC236}">
                 <a16:creationId xmlns:a16="http://schemas.microsoft.com/office/drawing/2014/main" id="{B6ACBB4F-9CA3-416D-8D4F-D68A3B722546}"/>
               </a:ext>
             </a:extLst>
           </p:cNvPr>
           <p:cNvSpPr>
-            <a:spLocks xmlns:a="http://schemas.openxmlformats.org/drawingml/2006/main" noGrp="1"/>
-          </p:cNvSpPr>
-          <p:nvPr/>
-        </p:nvSpPr>
-        <p:spPr>
-          <a:xfrm xmlns:a="http://schemas.openxmlformats.org/drawingml/2006/main">
+            <a:spLocks noGrp="1"/>
+          </p:cNvSpPr>
+          <p:nvPr/>
+        </p:nvSpPr>
+        <p:spPr>
+          <a:xfrm>
             <a:off x="11239500" y="6419850"/>
             <a:ext cx="523875" cy="209550"/>
           </a:xfrm>
-          <a:prstGeom xmlns:a="http://schemas.openxmlformats.org/drawingml/2006/main" prst="rect">
-            <a:avLst/>
-          </a:prstGeom>
-          <a:noFill xmlns:a="http://schemas.openxmlformats.org/drawingml/2006/main"/>
-          <a:ln xmlns:a="http://schemas.openxmlformats.org/drawingml/2006/main" w="0">
-            <a:noFill/>
-            <a:prstDash val="solid"/>
-          </a:ln>
-        </p:spPr>
-        <p:txBody>
-          <a:bodyPr xmlns:a="http://schemas.openxmlformats.org/drawingml/2006/main" anchor="t">
+          <a:prstGeom prst="rect">
+            <a:avLst/>
+          </a:prstGeom>
+          <a:noFill/>
+          <a:ln w="0">
+            <a:noFill/>
+            <a:prstDash val="solid"/>
+          </a:ln>
+        </p:spPr>
+        <p:txBody>
+          <a:bodyPr anchor="t">
             <a:normAutofit fontScale="86111"/>
           </a:bodyPr>
-          <a:lstStyle xmlns:a="http://schemas.openxmlformats.org/drawingml/2006/main"/>
-          <a:p xmlns:a="http://schemas.openxmlformats.org/drawingml/2006/main">
+          <a:lstStyle/>
+          <a:p>
             <a:pPr algn="r">
               <a:defRPr sz="900" b="0">
                 <a:solidFill>
@@ -1806,17 +1609,21 @@
       </p:ext>
     </p:extLst>
   </p:cSld>
+  <p:clrMapOvr>
+    <a:masterClrMapping/>
+  </p:clrMapOvr>
 </p:sld>
 </file>
 
 <file path=ppt/slides/slide2.xml><?xml version="1.0" encoding="utf-8"?>
-<p:sld xmlns:p="http://schemas.openxmlformats.org/presentationml/2006/main">
+<p:sld xmlns:a="http://schemas.openxmlformats.org/drawingml/2006/main" xmlns:r="http://schemas.openxmlformats.org/officeDocument/2006/relationships" xmlns:p="http://schemas.openxmlformats.org/presentationml/2006/main">
   <p:cSld>
     <p:bg>
       <p:bgPr>
-        <a:solidFill xmlns:a="http://schemas.openxmlformats.org/drawingml/2006/main">
+        <a:solidFill>
           <a:srgbClr val="FFFFFF"/>
         </a:solidFill>
+        <a:effectLst/>
       </p:bgPr>
     </p:bg>
     <p:spTree>
@@ -1826,42 +1633,47 @@
         <p:nvPr/>
       </p:nvGrpSpPr>
       <p:grpSpPr>
-        <a:xfrm xmlns:a="http://schemas.openxmlformats.org/drawingml/2006/main"/>
+        <a:xfrm>
+          <a:off x="0" y="0"/>
+          <a:ext cx="0" cy="0"/>
+          <a:chOff x="0" y="0"/>
+          <a:chExt cx="0" cy="0"/>
+        </a:xfrm>
       </p:grpSpPr>
       <p:sp>
         <p:nvSpPr>
-          <p:cNvPr id="14" name="">
-            <a:extLst xmlns:a="http://schemas.openxmlformats.org/drawingml/2006/main">
+          <p:cNvPr id="14" name="Rectangle 13">
+            <a:extLst>
               <a:ext uri="{FF2B5EF4-FFF2-40B4-BE49-F238E27FC236}">
                 <a16:creationId xmlns:a16="http://schemas.microsoft.com/office/drawing/2014/main" id="{A612BCAE-ACEE-40C5-ADAD-6FFA33B090EE}"/>
               </a:ext>
             </a:extLst>
           </p:cNvPr>
           <p:cNvSpPr>
-            <a:spLocks xmlns:a="http://schemas.openxmlformats.org/drawingml/2006/main" noGrp="1"/>
-          </p:cNvSpPr>
-          <p:nvPr/>
-        </p:nvSpPr>
-        <p:spPr>
-          <a:xfrm xmlns:a="http://schemas.openxmlformats.org/drawingml/2006/main">
+            <a:spLocks noGrp="1"/>
+          </p:cNvSpPr>
+          <p:nvPr/>
+        </p:nvSpPr>
+        <p:spPr>
+          <a:xfrm>
             <a:off x="419100" y="361950"/>
             <a:ext cx="10477500" cy="723900"/>
           </a:xfrm>
-          <a:prstGeom xmlns:a="http://schemas.openxmlformats.org/drawingml/2006/main" prst="rect">
-            <a:avLst/>
-          </a:prstGeom>
-          <a:noFill xmlns:a="http://schemas.openxmlformats.org/drawingml/2006/main"/>
-          <a:ln xmlns:a="http://schemas.openxmlformats.org/drawingml/2006/main" w="0">
-            <a:noFill/>
-            <a:prstDash val="solid"/>
-          </a:ln>
-        </p:spPr>
-        <p:txBody>
-          <a:bodyPr xmlns:a="http://schemas.openxmlformats.org/drawingml/2006/main" anchor="t">
-            <a:normAutofit fontScale="100000"/>
+          <a:prstGeom prst="rect">
+            <a:avLst/>
+          </a:prstGeom>
+          <a:noFill/>
+          <a:ln w="0">
+            <a:noFill/>
+            <a:prstDash val="solid"/>
+          </a:ln>
+        </p:spPr>
+        <p:txBody>
+          <a:bodyPr anchor="t">
+            <a:normAutofit/>
           </a:bodyPr>
-          <a:lstStyle xmlns:a="http://schemas.openxmlformats.org/drawingml/2006/main"/>
-          <a:p xmlns:a="http://schemas.openxmlformats.org/drawingml/2006/main">
+          <a:lstStyle/>
+          <a:p>
             <a:pPr algn="l">
               <a:defRPr sz="3000" b="1">
                 <a:solidFill>
@@ -1888,71 +1700,71 @@
       </p:sp>
       <p:sp>
         <p:nvSpPr>
-          <p:cNvPr id="2" name="">
-            <a:extLst xmlns:a="http://schemas.openxmlformats.org/drawingml/2006/main">
+          <p:cNvPr id="2" name="Rounded Rectangle 1">
+            <a:extLst>
               <a:ext uri="{FF2B5EF4-FFF2-40B4-BE49-F238E27FC236}">
                 <a16:creationId xmlns:a16="http://schemas.microsoft.com/office/drawing/2014/main" id="{5A35521F-BF87-4EB0-8F67-AC35B999D082}"/>
               </a:ext>
             </a:extLst>
           </p:cNvPr>
           <p:cNvSpPr>
-            <a:spLocks xmlns:a="http://schemas.openxmlformats.org/drawingml/2006/main" noGrp="1"/>
-          </p:cNvSpPr>
-          <p:nvPr/>
-        </p:nvSpPr>
-        <p:spPr>
-          <a:xfrm xmlns:a="http://schemas.openxmlformats.org/drawingml/2006/main">
+            <a:spLocks noGrp="1"/>
+          </p:cNvSpPr>
+          <p:nvPr/>
+        </p:nvSpPr>
+        <p:spPr>
+          <a:xfrm>
             <a:off x="419100" y="1714500"/>
             <a:ext cx="3505200" cy="2647950"/>
           </a:xfrm>
-          <a:prstGeom xmlns:a="http://schemas.openxmlformats.org/drawingml/2006/main" prst="roundRect">
+          <a:prstGeom prst="roundRect">
             <a:avLst>
               <a:gd name="adj" fmla="val 4317"/>
             </a:avLst>
           </a:prstGeom>
-          <a:solidFill xmlns:a="http://schemas.openxmlformats.org/drawingml/2006/main">
+          <a:solidFill>
             <a:srgbClr val="DDF6E8"/>
           </a:solidFill>
-          <a:ln xmlns:a="http://schemas.openxmlformats.org/drawingml/2006/main" w="0">
-            <a:noFill/>
-            <a:prstDash val="solid"/>
-          </a:ln>
-        </p:spPr>
-      </p:sp>
-      <p:sp>
-        <p:nvSpPr>
-          <p:cNvPr id="3" name="">
-            <a:extLst xmlns:a="http://schemas.openxmlformats.org/drawingml/2006/main">
+          <a:ln w="0">
+            <a:noFill/>
+            <a:prstDash val="solid"/>
+          </a:ln>
+        </p:spPr>
+      </p:sp>
+      <p:sp>
+        <p:nvSpPr>
+          <p:cNvPr id="3" name="Rectangle 2">
+            <a:extLst>
               <a:ext uri="{FF2B5EF4-FFF2-40B4-BE49-F238E27FC236}">
                 <a16:creationId xmlns:a16="http://schemas.microsoft.com/office/drawing/2014/main" id="{C2C880D5-0DEA-4274-B5E6-1DECB2AD110D}"/>
               </a:ext>
             </a:extLst>
           </p:cNvPr>
           <p:cNvSpPr>
-            <a:spLocks xmlns:a="http://schemas.openxmlformats.org/drawingml/2006/main" noGrp="1"/>
-          </p:cNvSpPr>
-          <p:nvPr/>
-        </p:nvSpPr>
-        <p:spPr>
-          <a:xfrm xmlns:a="http://schemas.openxmlformats.org/drawingml/2006/main">
+            <a:spLocks noGrp="1"/>
+          </p:cNvSpPr>
+          <p:nvPr/>
+        </p:nvSpPr>
+        <p:spPr>
+          <a:xfrm>
             <a:off x="666750" y="2133600"/>
             <a:ext cx="2952750" cy="904875"/>
           </a:xfrm>
-          <a:prstGeom xmlns:a="http://schemas.openxmlformats.org/drawingml/2006/main" prst="rect">
-            <a:avLst/>
-          </a:prstGeom>
-          <a:noFill xmlns:a="http://schemas.openxmlformats.org/drawingml/2006/main"/>
-          <a:ln xmlns:a="http://schemas.openxmlformats.org/drawingml/2006/main" w="0">
-            <a:noFill/>
-            <a:prstDash val="solid"/>
-          </a:ln>
-        </p:spPr>
-        <p:txBody>
-          <a:bodyPr xmlns:a="http://schemas.openxmlformats.org/drawingml/2006/main" anchor="t">
-            <a:normAutofit fontScale="100000"/>
+          <a:prstGeom prst="rect">
+            <a:avLst/>
+          </a:prstGeom>
+          <a:noFill/>
+          <a:ln w="0">
+            <a:noFill/>
+            <a:prstDash val="solid"/>
+          </a:ln>
+        </p:spPr>
+        <p:txBody>
+          <a:bodyPr anchor="t">
+            <a:normAutofit/>
           </a:bodyPr>
-          <a:lstStyle xmlns:a="http://schemas.openxmlformats.org/drawingml/2006/main"/>
-          <a:p xmlns:a="http://schemas.openxmlformats.org/drawingml/2006/main">
+          <a:lstStyle/>
+          <a:p>
             <a:pPr algn="l">
               <a:defRPr sz="4650" b="1">
                 <a:solidFill>
@@ -1979,38 +1791,38 @@
       </p:sp>
       <p:sp>
         <p:nvSpPr>
-          <p:cNvPr id="4" name="">
-            <a:extLst xmlns:a="http://schemas.openxmlformats.org/drawingml/2006/main">
+          <p:cNvPr id="4" name="Rectangle 3">
+            <a:extLst>
               <a:ext uri="{FF2B5EF4-FFF2-40B4-BE49-F238E27FC236}">
                 <a16:creationId xmlns:a16="http://schemas.microsoft.com/office/drawing/2014/main" id="{EA87D82D-438D-46AF-BC1E-CA1D8C60A92F}"/>
               </a:ext>
             </a:extLst>
           </p:cNvPr>
           <p:cNvSpPr>
-            <a:spLocks xmlns:a="http://schemas.openxmlformats.org/drawingml/2006/main" noGrp="1"/>
-          </p:cNvSpPr>
-          <p:nvPr/>
-        </p:nvSpPr>
-        <p:spPr>
-          <a:xfrm xmlns:a="http://schemas.openxmlformats.org/drawingml/2006/main">
+            <a:spLocks noGrp="1"/>
+          </p:cNvSpPr>
+          <p:nvPr/>
+        </p:nvSpPr>
+        <p:spPr>
+          <a:xfrm>
             <a:off x="666750" y="3257550"/>
             <a:ext cx="2952750" cy="457200"/>
           </a:xfrm>
-          <a:prstGeom xmlns:a="http://schemas.openxmlformats.org/drawingml/2006/main" prst="rect">
-            <a:avLst/>
-          </a:prstGeom>
-          <a:noFill xmlns:a="http://schemas.openxmlformats.org/drawingml/2006/main"/>
-          <a:ln xmlns:a="http://schemas.openxmlformats.org/drawingml/2006/main" w="0">
-            <a:noFill/>
-            <a:prstDash val="solid"/>
-          </a:ln>
-        </p:spPr>
-        <p:txBody>
-          <a:bodyPr xmlns:a="http://schemas.openxmlformats.org/drawingml/2006/main" anchor="t">
-            <a:normAutofit fontScale="100000"/>
+          <a:prstGeom prst="rect">
+            <a:avLst/>
+          </a:prstGeom>
+          <a:noFill/>
+          <a:ln w="0">
+            <a:noFill/>
+            <a:prstDash val="solid"/>
+          </a:ln>
+        </p:spPr>
+        <p:txBody>
+          <a:bodyPr anchor="t">
+            <a:normAutofit/>
           </a:bodyPr>
-          <a:lstStyle xmlns:a="http://schemas.openxmlformats.org/drawingml/2006/main"/>
-          <a:p xmlns:a="http://schemas.openxmlformats.org/drawingml/2006/main">
+          <a:lstStyle/>
+          <a:p>
             <a:pPr algn="l">
               <a:defRPr sz="1800" b="1">
                 <a:solidFill>
@@ -2037,71 +1849,71 @@
       </p:sp>
       <p:sp>
         <p:nvSpPr>
-          <p:cNvPr id="5" name="">
-            <a:extLst xmlns:a="http://schemas.openxmlformats.org/drawingml/2006/main">
+          <p:cNvPr id="5" name="Rounded Rectangle 4">
+            <a:extLst>
               <a:ext uri="{FF2B5EF4-FFF2-40B4-BE49-F238E27FC236}">
                 <a16:creationId xmlns:a16="http://schemas.microsoft.com/office/drawing/2014/main" id="{D649B227-11CF-4F97-B41D-5E8D8D035BBB}"/>
               </a:ext>
             </a:extLst>
           </p:cNvPr>
           <p:cNvSpPr>
-            <a:spLocks xmlns:a="http://schemas.openxmlformats.org/drawingml/2006/main" noGrp="1"/>
-          </p:cNvSpPr>
-          <p:nvPr/>
-        </p:nvSpPr>
-        <p:spPr>
-          <a:xfrm xmlns:a="http://schemas.openxmlformats.org/drawingml/2006/main">
+            <a:spLocks noGrp="1"/>
+          </p:cNvSpPr>
+          <p:nvPr/>
+        </p:nvSpPr>
+        <p:spPr>
+          <a:xfrm>
             <a:off x="4343400" y="1714500"/>
             <a:ext cx="3505200" cy="2647950"/>
           </a:xfrm>
-          <a:prstGeom xmlns:a="http://schemas.openxmlformats.org/drawingml/2006/main" prst="roundRect">
+          <a:prstGeom prst="roundRect">
             <a:avLst>
               <a:gd name="adj" fmla="val 4317"/>
             </a:avLst>
           </a:prstGeom>
-          <a:solidFill xmlns:a="http://schemas.openxmlformats.org/drawingml/2006/main">
+          <a:solidFill>
             <a:srgbClr val="D9F0FB"/>
           </a:solidFill>
-          <a:ln xmlns:a="http://schemas.openxmlformats.org/drawingml/2006/main" w="0">
-            <a:noFill/>
-            <a:prstDash val="solid"/>
-          </a:ln>
-        </p:spPr>
-      </p:sp>
-      <p:sp>
-        <p:nvSpPr>
-          <p:cNvPr id="6" name="">
-            <a:extLst xmlns:a="http://schemas.openxmlformats.org/drawingml/2006/main">
+          <a:ln w="0">
+            <a:noFill/>
+            <a:prstDash val="solid"/>
+          </a:ln>
+        </p:spPr>
+      </p:sp>
+      <p:sp>
+        <p:nvSpPr>
+          <p:cNvPr id="6" name="Rectangle 5">
+            <a:extLst>
               <a:ext uri="{FF2B5EF4-FFF2-40B4-BE49-F238E27FC236}">
                 <a16:creationId xmlns:a16="http://schemas.microsoft.com/office/drawing/2014/main" id="{12D0F145-2EA2-4A38-A27D-CFA263C6A78A}"/>
               </a:ext>
             </a:extLst>
           </p:cNvPr>
           <p:cNvSpPr>
-            <a:spLocks xmlns:a="http://schemas.openxmlformats.org/drawingml/2006/main" noGrp="1"/>
-          </p:cNvSpPr>
-          <p:nvPr/>
-        </p:nvSpPr>
-        <p:spPr>
-          <a:xfrm xmlns:a="http://schemas.openxmlformats.org/drawingml/2006/main">
+            <a:spLocks noGrp="1"/>
+          </p:cNvSpPr>
+          <p:nvPr/>
+        </p:nvSpPr>
+        <p:spPr>
+          <a:xfrm>
             <a:off x="4591050" y="2133600"/>
             <a:ext cx="2952750" cy="904875"/>
           </a:xfrm>
-          <a:prstGeom xmlns:a="http://schemas.openxmlformats.org/drawingml/2006/main" prst="rect">
-            <a:avLst/>
-          </a:prstGeom>
-          <a:noFill xmlns:a="http://schemas.openxmlformats.org/drawingml/2006/main"/>
-          <a:ln xmlns:a="http://schemas.openxmlformats.org/drawingml/2006/main" w="0">
-            <a:noFill/>
-            <a:prstDash val="solid"/>
-          </a:ln>
-        </p:spPr>
-        <p:txBody>
-          <a:bodyPr xmlns:a="http://schemas.openxmlformats.org/drawingml/2006/main" anchor="t">
-            <a:normAutofit fontScale="100000"/>
+          <a:prstGeom prst="rect">
+            <a:avLst/>
+          </a:prstGeom>
+          <a:noFill/>
+          <a:ln w="0">
+            <a:noFill/>
+            <a:prstDash val="solid"/>
+          </a:ln>
+        </p:spPr>
+        <p:txBody>
+          <a:bodyPr anchor="t">
+            <a:normAutofit/>
           </a:bodyPr>
-          <a:lstStyle xmlns:a="http://schemas.openxmlformats.org/drawingml/2006/main"/>
-          <a:p xmlns:a="http://schemas.openxmlformats.org/drawingml/2006/main">
+          <a:lstStyle/>
+          <a:p>
             <a:pPr algn="l">
               <a:defRPr sz="4650" b="1">
                 <a:solidFill>
@@ -2128,38 +1940,38 @@
       </p:sp>
       <p:sp>
         <p:nvSpPr>
-          <p:cNvPr id="7" name="">
-            <a:extLst xmlns:a="http://schemas.openxmlformats.org/drawingml/2006/main">
+          <p:cNvPr id="7" name="Rectangle 6">
+            <a:extLst>
               <a:ext uri="{FF2B5EF4-FFF2-40B4-BE49-F238E27FC236}">
                 <a16:creationId xmlns:a16="http://schemas.microsoft.com/office/drawing/2014/main" id="{E4F87D63-D4FB-4507-B8FE-45786B0E7357}"/>
               </a:ext>
             </a:extLst>
           </p:cNvPr>
           <p:cNvSpPr>
-            <a:spLocks xmlns:a="http://schemas.openxmlformats.org/drawingml/2006/main" noGrp="1"/>
-          </p:cNvSpPr>
-          <p:nvPr/>
-        </p:nvSpPr>
-        <p:spPr>
-          <a:xfrm xmlns:a="http://schemas.openxmlformats.org/drawingml/2006/main">
+            <a:spLocks noGrp="1"/>
+          </p:cNvSpPr>
+          <p:nvPr/>
+        </p:nvSpPr>
+        <p:spPr>
+          <a:xfrm>
             <a:off x="4591050" y="3257550"/>
             <a:ext cx="2952750" cy="457200"/>
           </a:xfrm>
-          <a:prstGeom xmlns:a="http://schemas.openxmlformats.org/drawingml/2006/main" prst="rect">
-            <a:avLst/>
-          </a:prstGeom>
-          <a:noFill xmlns:a="http://schemas.openxmlformats.org/drawingml/2006/main"/>
-          <a:ln xmlns:a="http://schemas.openxmlformats.org/drawingml/2006/main" w="0">
-            <a:noFill/>
-            <a:prstDash val="solid"/>
-          </a:ln>
-        </p:spPr>
-        <p:txBody>
-          <a:bodyPr xmlns:a="http://schemas.openxmlformats.org/drawingml/2006/main" anchor="t">
-            <a:normAutofit fontScale="100000"/>
+          <a:prstGeom prst="rect">
+            <a:avLst/>
+          </a:prstGeom>
+          <a:noFill/>
+          <a:ln w="0">
+            <a:noFill/>
+            <a:prstDash val="solid"/>
+          </a:ln>
+        </p:spPr>
+        <p:txBody>
+          <a:bodyPr anchor="t">
+            <a:normAutofit/>
           </a:bodyPr>
-          <a:lstStyle xmlns:a="http://schemas.openxmlformats.org/drawingml/2006/main"/>
-          <a:p xmlns:a="http://schemas.openxmlformats.org/drawingml/2006/main">
+          <a:lstStyle/>
+          <a:p>
             <a:pPr algn="l">
               <a:defRPr sz="1800" b="1">
                 <a:solidFill>
@@ -2186,71 +1998,71 @@
       </p:sp>
       <p:sp>
         <p:nvSpPr>
-          <p:cNvPr id="8" name="">
-            <a:extLst xmlns:a="http://schemas.openxmlformats.org/drawingml/2006/main">
+          <p:cNvPr id="8" name="Rounded Rectangle 7">
+            <a:extLst>
               <a:ext uri="{FF2B5EF4-FFF2-40B4-BE49-F238E27FC236}">
                 <a16:creationId xmlns:a16="http://schemas.microsoft.com/office/drawing/2014/main" id="{F5F9A39F-385C-456F-8679-890E87C56C93}"/>
               </a:ext>
             </a:extLst>
           </p:cNvPr>
           <p:cNvSpPr>
-            <a:spLocks xmlns:a="http://schemas.openxmlformats.org/drawingml/2006/main" noGrp="1"/>
-          </p:cNvSpPr>
-          <p:nvPr/>
-        </p:nvSpPr>
-        <p:spPr>
-          <a:xfrm xmlns:a="http://schemas.openxmlformats.org/drawingml/2006/main">
+            <a:spLocks noGrp="1"/>
+          </p:cNvSpPr>
+          <p:nvPr/>
+        </p:nvSpPr>
+        <p:spPr>
+          <a:xfrm>
             <a:off x="8267700" y="1714500"/>
             <a:ext cx="3505200" cy="2647950"/>
           </a:xfrm>
-          <a:prstGeom xmlns:a="http://schemas.openxmlformats.org/drawingml/2006/main" prst="roundRect">
+          <a:prstGeom prst="roundRect">
             <a:avLst>
               <a:gd name="adj" fmla="val 4317"/>
             </a:avLst>
           </a:prstGeom>
-          <a:solidFill xmlns:a="http://schemas.openxmlformats.org/drawingml/2006/main">
+          <a:solidFill>
             <a:srgbClr val="FDE2E2"/>
           </a:solidFill>
-          <a:ln xmlns:a="http://schemas.openxmlformats.org/drawingml/2006/main" w="0">
-            <a:noFill/>
-            <a:prstDash val="solid"/>
-          </a:ln>
-        </p:spPr>
-      </p:sp>
-      <p:sp>
-        <p:nvSpPr>
-          <p:cNvPr id="9" name="">
-            <a:extLst xmlns:a="http://schemas.openxmlformats.org/drawingml/2006/main">
+          <a:ln w="0">
+            <a:noFill/>
+            <a:prstDash val="solid"/>
+          </a:ln>
+        </p:spPr>
+      </p:sp>
+      <p:sp>
+        <p:nvSpPr>
+          <p:cNvPr id="9" name="Rectangle 8">
+            <a:extLst>
               <a:ext uri="{FF2B5EF4-FFF2-40B4-BE49-F238E27FC236}">
                 <a16:creationId xmlns:a16="http://schemas.microsoft.com/office/drawing/2014/main" id="{85BD0F62-A147-40D5-B886-405E06BD4D60}"/>
               </a:ext>
             </a:extLst>
           </p:cNvPr>
           <p:cNvSpPr>
-            <a:spLocks xmlns:a="http://schemas.openxmlformats.org/drawingml/2006/main" noGrp="1"/>
-          </p:cNvSpPr>
-          <p:nvPr/>
-        </p:nvSpPr>
-        <p:spPr>
-          <a:xfrm xmlns:a="http://schemas.openxmlformats.org/drawingml/2006/main">
+            <a:spLocks noGrp="1"/>
+          </p:cNvSpPr>
+          <p:nvPr/>
+        </p:nvSpPr>
+        <p:spPr>
+          <a:xfrm>
             <a:off x="8515350" y="2133600"/>
             <a:ext cx="2952750" cy="904875"/>
           </a:xfrm>
-          <a:prstGeom xmlns:a="http://schemas.openxmlformats.org/drawingml/2006/main" prst="rect">
-            <a:avLst/>
-          </a:prstGeom>
-          <a:noFill xmlns:a="http://schemas.openxmlformats.org/drawingml/2006/main"/>
-          <a:ln xmlns:a="http://schemas.openxmlformats.org/drawingml/2006/main" w="0">
-            <a:noFill/>
-            <a:prstDash val="solid"/>
-          </a:ln>
-        </p:spPr>
-        <p:txBody>
-          <a:bodyPr xmlns:a="http://schemas.openxmlformats.org/drawingml/2006/main" anchor="t">
-            <a:normAutofit fontScale="100000"/>
+          <a:prstGeom prst="rect">
+            <a:avLst/>
+          </a:prstGeom>
+          <a:noFill/>
+          <a:ln w="0">
+            <a:noFill/>
+            <a:prstDash val="solid"/>
+          </a:ln>
+        </p:spPr>
+        <p:txBody>
+          <a:bodyPr anchor="t">
+            <a:normAutofit/>
           </a:bodyPr>
-          <a:lstStyle xmlns:a="http://schemas.openxmlformats.org/drawingml/2006/main"/>
-          <a:p xmlns:a="http://schemas.openxmlformats.org/drawingml/2006/main">
+          <a:lstStyle/>
+          <a:p>
             <a:pPr algn="l">
               <a:defRPr sz="4650" b="1">
                 <a:solidFill>
@@ -2277,38 +2089,38 @@
       </p:sp>
       <p:sp>
         <p:nvSpPr>
-          <p:cNvPr id="10" name="">
-            <a:extLst xmlns:a="http://schemas.openxmlformats.org/drawingml/2006/main">
+          <p:cNvPr id="10" name="Rectangle 9">
+            <a:extLst>
               <a:ext uri="{FF2B5EF4-FFF2-40B4-BE49-F238E27FC236}">
                 <a16:creationId xmlns:a16="http://schemas.microsoft.com/office/drawing/2014/main" id="{AA7204EA-A2B4-4638-8BD4-92E78D3D2778}"/>
               </a:ext>
             </a:extLst>
           </p:cNvPr>
           <p:cNvSpPr>
-            <a:spLocks xmlns:a="http://schemas.openxmlformats.org/drawingml/2006/main" noGrp="1"/>
-          </p:cNvSpPr>
-          <p:nvPr/>
-        </p:nvSpPr>
-        <p:spPr>
-          <a:xfrm xmlns:a="http://schemas.openxmlformats.org/drawingml/2006/main">
+            <a:spLocks noGrp="1"/>
+          </p:cNvSpPr>
+          <p:nvPr/>
+        </p:nvSpPr>
+        <p:spPr>
+          <a:xfrm>
             <a:off x="8515350" y="3257550"/>
             <a:ext cx="2952750" cy="457200"/>
           </a:xfrm>
-          <a:prstGeom xmlns:a="http://schemas.openxmlformats.org/drawingml/2006/main" prst="rect">
-            <a:avLst/>
-          </a:prstGeom>
-          <a:noFill xmlns:a="http://schemas.openxmlformats.org/drawingml/2006/main"/>
-          <a:ln xmlns:a="http://schemas.openxmlformats.org/drawingml/2006/main" w="0">
-            <a:noFill/>
-            <a:prstDash val="solid"/>
-          </a:ln>
-        </p:spPr>
-        <p:txBody>
-          <a:bodyPr xmlns:a="http://schemas.openxmlformats.org/drawingml/2006/main" anchor="t">
-            <a:normAutofit fontScale="100000"/>
+          <a:prstGeom prst="rect">
+            <a:avLst/>
+          </a:prstGeom>
+          <a:noFill/>
+          <a:ln w="0">
+            <a:noFill/>
+            <a:prstDash val="solid"/>
+          </a:ln>
+        </p:spPr>
+        <p:txBody>
+          <a:bodyPr anchor="t">
+            <a:normAutofit/>
           </a:bodyPr>
-          <a:lstStyle xmlns:a="http://schemas.openxmlformats.org/drawingml/2006/main"/>
-          <a:p xmlns:a="http://schemas.openxmlformats.org/drawingml/2006/main">
+          <a:lstStyle/>
+          <a:p>
             <a:pPr algn="l">
               <a:defRPr sz="1800" b="1">
                 <a:solidFill>
@@ -2335,38 +2147,38 @@
       </p:sp>
       <p:sp>
         <p:nvSpPr>
-          <p:cNvPr id="11" name="">
-            <a:extLst xmlns:a="http://schemas.openxmlformats.org/drawingml/2006/main">
+          <p:cNvPr id="11" name="Rectangle 10">
+            <a:extLst>
               <a:ext uri="{FF2B5EF4-FFF2-40B4-BE49-F238E27FC236}">
                 <a16:creationId xmlns:a16="http://schemas.microsoft.com/office/drawing/2014/main" id="{3787E373-1666-48EB-8D71-7F6A49C4CB4B}"/>
               </a:ext>
             </a:extLst>
           </p:cNvPr>
           <p:cNvSpPr>
-            <a:spLocks xmlns:a="http://schemas.openxmlformats.org/drawingml/2006/main" noGrp="1"/>
-          </p:cNvSpPr>
-          <p:nvPr/>
-        </p:nvSpPr>
-        <p:spPr>
-          <a:xfrm xmlns:a="http://schemas.openxmlformats.org/drawingml/2006/main">
+            <a:spLocks noGrp="1"/>
+          </p:cNvSpPr>
+          <p:nvPr/>
+        </p:nvSpPr>
+        <p:spPr>
+          <a:xfrm>
             <a:off x="419100" y="4857750"/>
             <a:ext cx="10668000" cy="895350"/>
           </a:xfrm>
-          <a:prstGeom xmlns:a="http://schemas.openxmlformats.org/drawingml/2006/main" prst="rect">
-            <a:avLst/>
-          </a:prstGeom>
-          <a:noFill xmlns:a="http://schemas.openxmlformats.org/drawingml/2006/main"/>
-          <a:ln xmlns:a="http://schemas.openxmlformats.org/drawingml/2006/main" w="0">
-            <a:noFill/>
-            <a:prstDash val="solid"/>
-          </a:ln>
-        </p:spPr>
-        <p:txBody>
-          <a:bodyPr xmlns:a="http://schemas.openxmlformats.org/drawingml/2006/main" anchor="t">
-            <a:normAutofit fontScale="100000"/>
+          <a:prstGeom prst="rect">
+            <a:avLst/>
+          </a:prstGeom>
+          <a:noFill/>
+          <a:ln w="0">
+            <a:noFill/>
+            <a:prstDash val="solid"/>
+          </a:ln>
+        </p:spPr>
+        <p:txBody>
+          <a:bodyPr anchor="t">
+            <a:normAutofit/>
           </a:bodyPr>
-          <a:lstStyle xmlns:a="http://schemas.openxmlformats.org/drawingml/2006/main"/>
-          <a:p xmlns:a="http://schemas.openxmlformats.org/drawingml/2006/main">
+          <a:lstStyle/>
+          <a:p>
             <a:pPr algn="l">
               <a:defRPr sz="1575" b="0">
                 <a:solidFill>
@@ -2393,38 +2205,38 @@
       </p:sp>
       <p:sp>
         <p:nvSpPr>
-          <p:cNvPr id="12" name="">
-            <a:extLst xmlns:a="http://schemas.openxmlformats.org/drawingml/2006/main">
+          <p:cNvPr id="12" name="Rectangle 11">
+            <a:extLst>
               <a:ext uri="{FF2B5EF4-FFF2-40B4-BE49-F238E27FC236}">
                 <a16:creationId xmlns:a16="http://schemas.microsoft.com/office/drawing/2014/main" id="{404BD9ED-DE65-4B13-9542-C2352CE44C01}"/>
               </a:ext>
             </a:extLst>
           </p:cNvPr>
           <p:cNvSpPr>
-            <a:spLocks xmlns:a="http://schemas.openxmlformats.org/drawingml/2006/main" noGrp="1"/>
-          </p:cNvSpPr>
-          <p:nvPr/>
-        </p:nvSpPr>
-        <p:spPr>
-          <a:xfrm xmlns:a="http://schemas.openxmlformats.org/drawingml/2006/main">
+            <a:spLocks noGrp="1"/>
+          </p:cNvSpPr>
+          <p:nvPr/>
+        </p:nvSpPr>
+        <p:spPr>
+          <a:xfrm>
             <a:off x="419100" y="6419850"/>
             <a:ext cx="3429000" cy="209550"/>
           </a:xfrm>
-          <a:prstGeom xmlns:a="http://schemas.openxmlformats.org/drawingml/2006/main" prst="rect">
-            <a:avLst/>
-          </a:prstGeom>
-          <a:noFill xmlns:a="http://schemas.openxmlformats.org/drawingml/2006/main"/>
-          <a:ln xmlns:a="http://schemas.openxmlformats.org/drawingml/2006/main" w="0">
-            <a:noFill/>
-            <a:prstDash val="solid"/>
-          </a:ln>
-        </p:spPr>
-        <p:txBody>
-          <a:bodyPr xmlns:a="http://schemas.openxmlformats.org/drawingml/2006/main" anchor="t">
+          <a:prstGeom prst="rect">
+            <a:avLst/>
+          </a:prstGeom>
+          <a:noFill/>
+          <a:ln w="0">
+            <a:noFill/>
+            <a:prstDash val="solid"/>
+          </a:ln>
+        </p:spPr>
+        <p:txBody>
+          <a:bodyPr anchor="t">
             <a:normAutofit fontScale="86111"/>
           </a:bodyPr>
-          <a:lstStyle xmlns:a="http://schemas.openxmlformats.org/drawingml/2006/main"/>
-          <a:p xmlns:a="http://schemas.openxmlformats.org/drawingml/2006/main">
+          <a:lstStyle/>
+          <a:p>
             <a:pPr algn="l">
               <a:defRPr sz="900" b="0">
                 <a:solidFill>
@@ -2451,38 +2263,38 @@
       </p:sp>
       <p:sp>
         <p:nvSpPr>
-          <p:cNvPr id="13" name="">
-            <a:extLst xmlns:a="http://schemas.openxmlformats.org/drawingml/2006/main">
+          <p:cNvPr id="13" name="Rectangle 12">
+            <a:extLst>
               <a:ext uri="{FF2B5EF4-FFF2-40B4-BE49-F238E27FC236}">
                 <a16:creationId xmlns:a16="http://schemas.microsoft.com/office/drawing/2014/main" id="{7C90E120-B330-4221-8A18-5CE124606295}"/>
               </a:ext>
             </a:extLst>
           </p:cNvPr>
           <p:cNvSpPr>
-            <a:spLocks xmlns:a="http://schemas.openxmlformats.org/drawingml/2006/main" noGrp="1"/>
-          </p:cNvSpPr>
-          <p:nvPr/>
-        </p:nvSpPr>
-        <p:spPr>
-          <a:xfrm xmlns:a="http://schemas.openxmlformats.org/drawingml/2006/main">
+            <a:spLocks noGrp="1"/>
+          </p:cNvSpPr>
+          <p:nvPr/>
+        </p:nvSpPr>
+        <p:spPr>
+          <a:xfrm>
             <a:off x="11239500" y="6419850"/>
             <a:ext cx="523875" cy="209550"/>
           </a:xfrm>
-          <a:prstGeom xmlns:a="http://schemas.openxmlformats.org/drawingml/2006/main" prst="rect">
-            <a:avLst/>
-          </a:prstGeom>
-          <a:noFill xmlns:a="http://schemas.openxmlformats.org/drawingml/2006/main"/>
-          <a:ln xmlns:a="http://schemas.openxmlformats.org/drawingml/2006/main" w="0">
-            <a:noFill/>
-            <a:prstDash val="solid"/>
-          </a:ln>
-        </p:spPr>
-        <p:txBody>
-          <a:bodyPr xmlns:a="http://schemas.openxmlformats.org/drawingml/2006/main" anchor="t">
+          <a:prstGeom prst="rect">
+            <a:avLst/>
+          </a:prstGeom>
+          <a:noFill/>
+          <a:ln w="0">
+            <a:noFill/>
+            <a:prstDash val="solid"/>
+          </a:ln>
+        </p:spPr>
+        <p:txBody>
+          <a:bodyPr anchor="t">
             <a:normAutofit fontScale="86111"/>
           </a:bodyPr>
-          <a:lstStyle xmlns:a="http://schemas.openxmlformats.org/drawingml/2006/main"/>
-          <a:p xmlns:a="http://schemas.openxmlformats.org/drawingml/2006/main">
+          <a:lstStyle/>
+          <a:p>
             <a:pPr algn="r">
               <a:defRPr sz="900" b="0">
                 <a:solidFill>
@@ -2514,17 +2326,21 @@
       </p:ext>
     </p:extLst>
   </p:cSld>
+  <p:clrMapOvr>
+    <a:masterClrMapping/>
+  </p:clrMapOvr>
 </p:sld>
 </file>
 
 <file path=ppt/slides/slide3.xml><?xml version="1.0" encoding="utf-8"?>
-<p:sld xmlns:p="http://schemas.openxmlformats.org/presentationml/2006/main">
+<p:sld xmlns:a="http://schemas.openxmlformats.org/drawingml/2006/main" xmlns:r="http://schemas.openxmlformats.org/officeDocument/2006/relationships" xmlns:p="http://schemas.openxmlformats.org/presentationml/2006/main">
   <p:cSld>
     <p:bg>
       <p:bgPr>
-        <a:solidFill xmlns:a="http://schemas.openxmlformats.org/drawingml/2006/main">
+        <a:solidFill>
           <a:srgbClr val="FFFFFF"/>
         </a:solidFill>
+        <a:effectLst/>
       </p:bgPr>
     </p:bg>
     <p:spTree>
@@ -2534,42 +2350,47 @@
         <p:nvPr/>
       </p:nvGrpSpPr>
       <p:grpSpPr>
-        <a:xfrm xmlns:a="http://schemas.openxmlformats.org/drawingml/2006/main"/>
+        <a:xfrm>
+          <a:off x="0" y="0"/>
+          <a:ext cx="0" cy="0"/>
+          <a:chOff x="0" y="0"/>
+          <a:chExt cx="0" cy="0"/>
+        </a:xfrm>
       </p:grpSpPr>
       <p:sp>
         <p:nvSpPr>
-          <p:cNvPr id="16" name="">
-            <a:extLst xmlns:a="http://schemas.openxmlformats.org/drawingml/2006/main">
+          <p:cNvPr id="16" name="Rectangle 15">
+            <a:extLst>
               <a:ext uri="{FF2B5EF4-FFF2-40B4-BE49-F238E27FC236}">
                 <a16:creationId xmlns:a16="http://schemas.microsoft.com/office/drawing/2014/main" id="{A303A6E6-DB2C-47BE-9CF2-59F7135636B0}"/>
               </a:ext>
             </a:extLst>
           </p:cNvPr>
           <p:cNvSpPr>
-            <a:spLocks xmlns:a="http://schemas.openxmlformats.org/drawingml/2006/main" noGrp="1"/>
-          </p:cNvSpPr>
-          <p:nvPr/>
-        </p:nvSpPr>
-        <p:spPr>
-          <a:xfrm xmlns:a="http://schemas.openxmlformats.org/drawingml/2006/main">
+            <a:spLocks noGrp="1"/>
+          </p:cNvSpPr>
+          <p:nvPr/>
+        </p:nvSpPr>
+        <p:spPr>
+          <a:xfrm>
             <a:off x="419100" y="361950"/>
             <a:ext cx="10477500" cy="723900"/>
           </a:xfrm>
-          <a:prstGeom xmlns:a="http://schemas.openxmlformats.org/drawingml/2006/main" prst="rect">
-            <a:avLst/>
-          </a:prstGeom>
-          <a:noFill xmlns:a="http://schemas.openxmlformats.org/drawingml/2006/main"/>
-          <a:ln xmlns:a="http://schemas.openxmlformats.org/drawingml/2006/main" w="0">
-            <a:noFill/>
-            <a:prstDash val="solid"/>
-          </a:ln>
-        </p:spPr>
-        <p:txBody>
-          <a:bodyPr xmlns:a="http://schemas.openxmlformats.org/drawingml/2006/main" anchor="t">
-            <a:normAutofit fontScale="100000"/>
+          <a:prstGeom prst="rect">
+            <a:avLst/>
+          </a:prstGeom>
+          <a:noFill/>
+          <a:ln w="0">
+            <a:noFill/>
+            <a:prstDash val="solid"/>
+          </a:ln>
+        </p:spPr>
+        <p:txBody>
+          <a:bodyPr anchor="t">
+            <a:normAutofit/>
           </a:bodyPr>
-          <a:lstStyle xmlns:a="http://schemas.openxmlformats.org/drawingml/2006/main"/>
-          <a:p xmlns:a="http://schemas.openxmlformats.org/drawingml/2006/main">
+          <a:lstStyle/>
+          <a:p>
             <a:pPr algn="l">
               <a:defRPr sz="3000" b="1">
                 <a:solidFill>
@@ -2596,38 +2417,38 @@
       </p:sp>
       <p:sp>
         <p:nvSpPr>
-          <p:cNvPr id="2" name="">
-            <a:extLst xmlns:a="http://schemas.openxmlformats.org/drawingml/2006/main">
+          <p:cNvPr id="2" name="Rectangle 1">
+            <a:extLst>
               <a:ext uri="{FF2B5EF4-FFF2-40B4-BE49-F238E27FC236}">
                 <a16:creationId xmlns:a16="http://schemas.microsoft.com/office/drawing/2014/main" id="{20A74C7C-1CDA-41D2-86F4-A45905B0AAAE}"/>
               </a:ext>
             </a:extLst>
           </p:cNvPr>
           <p:cNvSpPr>
-            <a:spLocks xmlns:a="http://schemas.openxmlformats.org/drawingml/2006/main" noGrp="1"/>
-          </p:cNvSpPr>
-          <p:nvPr/>
-        </p:nvSpPr>
-        <p:spPr>
-          <a:xfrm xmlns:a="http://schemas.openxmlformats.org/drawingml/2006/main">
+            <a:spLocks noGrp="1"/>
+          </p:cNvSpPr>
+          <p:nvPr/>
+        </p:nvSpPr>
+        <p:spPr>
+          <a:xfrm>
             <a:off x="419100" y="1638300"/>
             <a:ext cx="952500" cy="419100"/>
           </a:xfrm>
-          <a:prstGeom xmlns:a="http://schemas.openxmlformats.org/drawingml/2006/main" prst="rect">
-            <a:avLst/>
-          </a:prstGeom>
-          <a:noFill xmlns:a="http://schemas.openxmlformats.org/drawingml/2006/main"/>
-          <a:ln xmlns:a="http://schemas.openxmlformats.org/drawingml/2006/main" w="0">
-            <a:noFill/>
-            <a:prstDash val="solid"/>
-          </a:ln>
-        </p:spPr>
-        <p:txBody>
-          <a:bodyPr xmlns:a="http://schemas.openxmlformats.org/drawingml/2006/main" anchor="t">
-            <a:normAutofit fontScale="100000"/>
+          <a:prstGeom prst="rect">
+            <a:avLst/>
+          </a:prstGeom>
+          <a:noFill/>
+          <a:ln w="0">
+            <a:noFill/>
+            <a:prstDash val="solid"/>
+          </a:ln>
+        </p:spPr>
+        <p:txBody>
+          <a:bodyPr anchor="t">
+            <a:normAutofit/>
           </a:bodyPr>
-          <a:lstStyle xmlns:a="http://schemas.openxmlformats.org/drawingml/2006/main"/>
-          <a:p xmlns:a="http://schemas.openxmlformats.org/drawingml/2006/main">
+          <a:lstStyle/>
+          <a:p>
             <a:pPr algn="l">
               <a:defRPr sz="1500" b="1">
                 <a:solidFill>
@@ -2654,38 +2475,38 @@
       </p:sp>
       <p:sp>
         <p:nvSpPr>
-          <p:cNvPr id="3" name="">
-            <a:extLst xmlns:a="http://schemas.openxmlformats.org/drawingml/2006/main">
+          <p:cNvPr id="3" name="Rectangle 2">
+            <a:extLst>
               <a:ext uri="{FF2B5EF4-FFF2-40B4-BE49-F238E27FC236}">
                 <a16:creationId xmlns:a16="http://schemas.microsoft.com/office/drawing/2014/main" id="{FEB13FAB-8277-4F6C-BB07-3F381DC1F38D}"/>
               </a:ext>
             </a:extLst>
           </p:cNvPr>
           <p:cNvSpPr>
-            <a:spLocks xmlns:a="http://schemas.openxmlformats.org/drawingml/2006/main" noGrp="1"/>
-          </p:cNvSpPr>
-          <p:nvPr/>
-        </p:nvSpPr>
-        <p:spPr>
-          <a:xfrm xmlns:a="http://schemas.openxmlformats.org/drawingml/2006/main">
+            <a:spLocks noGrp="1"/>
+          </p:cNvSpPr>
+          <p:nvPr/>
+        </p:nvSpPr>
+        <p:spPr>
+          <a:xfrm>
             <a:off x="419100" y="2171700"/>
             <a:ext cx="3238500" cy="495300"/>
           </a:xfrm>
-          <a:prstGeom xmlns:a="http://schemas.openxmlformats.org/drawingml/2006/main" prst="rect">
-            <a:avLst/>
-          </a:prstGeom>
-          <a:noFill xmlns:a="http://schemas.openxmlformats.org/drawingml/2006/main"/>
-          <a:ln xmlns:a="http://schemas.openxmlformats.org/drawingml/2006/main" w="0">
-            <a:noFill/>
-            <a:prstDash val="solid"/>
-          </a:ln>
-        </p:spPr>
-        <p:txBody>
-          <a:bodyPr xmlns:a="http://schemas.openxmlformats.org/drawingml/2006/main" anchor="t">
-            <a:normAutofit fontScale="100000"/>
+          <a:prstGeom prst="rect">
+            <a:avLst/>
+          </a:prstGeom>
+          <a:noFill/>
+          <a:ln w="0">
+            <a:noFill/>
+            <a:prstDash val="solid"/>
+          </a:ln>
+        </p:spPr>
+        <p:txBody>
+          <a:bodyPr anchor="t">
+            <a:normAutofit/>
           </a:bodyPr>
-          <a:lstStyle xmlns:a="http://schemas.openxmlformats.org/drawingml/2006/main"/>
-          <a:p xmlns:a="http://schemas.openxmlformats.org/drawingml/2006/main">
+          <a:lstStyle/>
+          <a:p>
             <a:pPr algn="l">
               <a:defRPr sz="2100" b="1">
                 <a:solidFill>
@@ -2712,38 +2533,38 @@
       </p:sp>
       <p:sp>
         <p:nvSpPr>
-          <p:cNvPr id="4" name="">
-            <a:extLst xmlns:a="http://schemas.openxmlformats.org/drawingml/2006/main">
+          <p:cNvPr id="4" name="Rectangle 3">
+            <a:extLst>
               <a:ext uri="{FF2B5EF4-FFF2-40B4-BE49-F238E27FC236}">
                 <a16:creationId xmlns:a16="http://schemas.microsoft.com/office/drawing/2014/main" id="{275B24FF-318C-429C-BEFF-0A98CCB9D743}"/>
               </a:ext>
             </a:extLst>
           </p:cNvPr>
           <p:cNvSpPr>
-            <a:spLocks xmlns:a="http://schemas.openxmlformats.org/drawingml/2006/main" noGrp="1"/>
-          </p:cNvSpPr>
-          <p:nvPr/>
-        </p:nvSpPr>
-        <p:spPr>
-          <a:xfrm xmlns:a="http://schemas.openxmlformats.org/drawingml/2006/main">
+            <a:spLocks noGrp="1"/>
+          </p:cNvSpPr>
+          <p:nvPr/>
+        </p:nvSpPr>
+        <p:spPr>
+          <a:xfrm>
             <a:off x="419100" y="2952750"/>
             <a:ext cx="3143250" cy="1619250"/>
           </a:xfrm>
-          <a:prstGeom xmlns:a="http://schemas.openxmlformats.org/drawingml/2006/main" prst="rect">
-            <a:avLst/>
-          </a:prstGeom>
-          <a:noFill xmlns:a="http://schemas.openxmlformats.org/drawingml/2006/main"/>
-          <a:ln xmlns:a="http://schemas.openxmlformats.org/drawingml/2006/main" w="0">
-            <a:noFill/>
-            <a:prstDash val="solid"/>
-          </a:ln>
-        </p:spPr>
-        <p:txBody>
-          <a:bodyPr xmlns:a="http://schemas.openxmlformats.org/drawingml/2006/main" anchor="t">
-            <a:normAutofit fontScale="100000"/>
+          <a:prstGeom prst="rect">
+            <a:avLst/>
+          </a:prstGeom>
+          <a:noFill/>
+          <a:ln w="0">
+            <a:noFill/>
+            <a:prstDash val="solid"/>
+          </a:ln>
+        </p:spPr>
+        <p:txBody>
+          <a:bodyPr anchor="t">
+            <a:normAutofit/>
           </a:bodyPr>
-          <a:lstStyle xmlns:a="http://schemas.openxmlformats.org/drawingml/2006/main"/>
-          <a:p xmlns:a="http://schemas.openxmlformats.org/drawingml/2006/main">
+          <a:lstStyle/>
+          <a:p>
             <a:pPr algn="l">
               <a:defRPr sz="1575" b="0">
                 <a:solidFill>
@@ -2770,69 +2591,69 @@
       </p:sp>
       <p:sp>
         <p:nvSpPr>
-          <p:cNvPr id="5" name="">
-            <a:extLst xmlns:a="http://schemas.openxmlformats.org/drawingml/2006/main">
+          <p:cNvPr id="5" name="Rectangle 4">
+            <a:extLst>
               <a:ext uri="{FF2B5EF4-FFF2-40B4-BE49-F238E27FC236}">
                 <a16:creationId xmlns:a16="http://schemas.microsoft.com/office/drawing/2014/main" id="{A3D6AAB5-274F-436A-9785-82D6C0864EEC}"/>
               </a:ext>
             </a:extLst>
           </p:cNvPr>
           <p:cNvSpPr>
-            <a:spLocks xmlns:a="http://schemas.openxmlformats.org/drawingml/2006/main" noGrp="1"/>
-          </p:cNvSpPr>
-          <p:nvPr/>
-        </p:nvSpPr>
-        <p:spPr>
-          <a:xfrm xmlns:a="http://schemas.openxmlformats.org/drawingml/2006/main">
+            <a:spLocks noGrp="1"/>
+          </p:cNvSpPr>
+          <p:nvPr/>
+        </p:nvSpPr>
+        <p:spPr>
+          <a:xfrm>
             <a:off x="419100" y="4819650"/>
             <a:ext cx="3143250" cy="76200"/>
           </a:xfrm>
-          <a:prstGeom xmlns:a="http://schemas.openxmlformats.org/drawingml/2006/main" prst="rect">
-            <a:avLst/>
-          </a:prstGeom>
-          <a:solidFill xmlns:a="http://schemas.openxmlformats.org/drawingml/2006/main">
+          <a:prstGeom prst="rect">
+            <a:avLst/>
+          </a:prstGeom>
+          <a:solidFill>
             <a:srgbClr val="3D8DFF"/>
           </a:solidFill>
-          <a:ln xmlns:a="http://schemas.openxmlformats.org/drawingml/2006/main" w="0">
-            <a:noFill/>
-            <a:prstDash val="solid"/>
-          </a:ln>
-        </p:spPr>
-      </p:sp>
-      <p:sp>
-        <p:nvSpPr>
-          <p:cNvPr id="6" name="">
-            <a:extLst xmlns:a="http://schemas.openxmlformats.org/drawingml/2006/main">
+          <a:ln w="0">
+            <a:noFill/>
+            <a:prstDash val="solid"/>
+          </a:ln>
+        </p:spPr>
+      </p:sp>
+      <p:sp>
+        <p:nvSpPr>
+          <p:cNvPr id="6" name="Rectangle 5">
+            <a:extLst>
               <a:ext uri="{FF2B5EF4-FFF2-40B4-BE49-F238E27FC236}">
                 <a16:creationId xmlns:a16="http://schemas.microsoft.com/office/drawing/2014/main" id="{4CA484A8-7E68-4645-A7B9-FB2832DA169D}"/>
               </a:ext>
             </a:extLst>
           </p:cNvPr>
           <p:cNvSpPr>
-            <a:spLocks xmlns:a="http://schemas.openxmlformats.org/drawingml/2006/main" noGrp="1"/>
-          </p:cNvSpPr>
-          <p:nvPr/>
-        </p:nvSpPr>
-        <p:spPr>
-          <a:xfrm xmlns:a="http://schemas.openxmlformats.org/drawingml/2006/main">
+            <a:spLocks noGrp="1"/>
+          </p:cNvSpPr>
+          <p:nvPr/>
+        </p:nvSpPr>
+        <p:spPr>
+          <a:xfrm>
             <a:off x="4343400" y="1638300"/>
             <a:ext cx="952500" cy="419100"/>
           </a:xfrm>
-          <a:prstGeom xmlns:a="http://schemas.openxmlformats.org/drawingml/2006/main" prst="rect">
-            <a:avLst/>
-          </a:prstGeom>
-          <a:noFill xmlns:a="http://schemas.openxmlformats.org/drawingml/2006/main"/>
-          <a:ln xmlns:a="http://schemas.openxmlformats.org/drawingml/2006/main" w="0">
-            <a:noFill/>
-            <a:prstDash val="solid"/>
-          </a:ln>
-        </p:spPr>
-        <p:txBody>
-          <a:bodyPr xmlns:a="http://schemas.openxmlformats.org/drawingml/2006/main" anchor="t">
-            <a:normAutofit fontScale="100000"/>
+          <a:prstGeom prst="rect">
+            <a:avLst/>
+          </a:prstGeom>
+          <a:noFill/>
+          <a:ln w="0">
+            <a:noFill/>
+            <a:prstDash val="solid"/>
+          </a:ln>
+        </p:spPr>
+        <p:txBody>
+          <a:bodyPr anchor="t">
+            <a:normAutofit/>
           </a:bodyPr>
-          <a:lstStyle xmlns:a="http://schemas.openxmlformats.org/drawingml/2006/main"/>
-          <a:p xmlns:a="http://schemas.openxmlformats.org/drawingml/2006/main">
+          <a:lstStyle/>
+          <a:p>
             <a:pPr algn="l">
               <a:defRPr sz="1500" b="1">
                 <a:solidFill>
@@ -2859,38 +2680,38 @@
       </p:sp>
       <p:sp>
         <p:nvSpPr>
-          <p:cNvPr id="7" name="">
-            <a:extLst xmlns:a="http://schemas.openxmlformats.org/drawingml/2006/main">
+          <p:cNvPr id="7" name="Rectangle 6">
+            <a:extLst>
               <a:ext uri="{FF2B5EF4-FFF2-40B4-BE49-F238E27FC236}">
                 <a16:creationId xmlns:a16="http://schemas.microsoft.com/office/drawing/2014/main" id="{0C8FD200-99D2-4B7F-BCF8-49E1EE666FF3}"/>
               </a:ext>
             </a:extLst>
           </p:cNvPr>
           <p:cNvSpPr>
-            <a:spLocks xmlns:a="http://schemas.openxmlformats.org/drawingml/2006/main" noGrp="1"/>
-          </p:cNvSpPr>
-          <p:nvPr/>
-        </p:nvSpPr>
-        <p:spPr>
-          <a:xfrm xmlns:a="http://schemas.openxmlformats.org/drawingml/2006/main">
+            <a:spLocks noGrp="1"/>
+          </p:cNvSpPr>
+          <p:nvPr/>
+        </p:nvSpPr>
+        <p:spPr>
+          <a:xfrm>
             <a:off x="4343400" y="2171700"/>
             <a:ext cx="3238500" cy="495300"/>
           </a:xfrm>
-          <a:prstGeom xmlns:a="http://schemas.openxmlformats.org/drawingml/2006/main" prst="rect">
-            <a:avLst/>
-          </a:prstGeom>
-          <a:noFill xmlns:a="http://schemas.openxmlformats.org/drawingml/2006/main"/>
-          <a:ln xmlns:a="http://schemas.openxmlformats.org/drawingml/2006/main" w="0">
-            <a:noFill/>
-            <a:prstDash val="solid"/>
-          </a:ln>
-        </p:spPr>
-        <p:txBody>
-          <a:bodyPr xmlns:a="http://schemas.openxmlformats.org/drawingml/2006/main" anchor="t">
-            <a:normAutofit fontScale="100000"/>
+          <a:prstGeom prst="rect">
+            <a:avLst/>
+          </a:prstGeom>
+          <a:noFill/>
+          <a:ln w="0">
+            <a:noFill/>
+            <a:prstDash val="solid"/>
+          </a:ln>
+        </p:spPr>
+        <p:txBody>
+          <a:bodyPr anchor="t">
+            <a:normAutofit/>
           </a:bodyPr>
-          <a:lstStyle xmlns:a="http://schemas.openxmlformats.org/drawingml/2006/main"/>
-          <a:p xmlns:a="http://schemas.openxmlformats.org/drawingml/2006/main">
+          <a:lstStyle/>
+          <a:p>
             <a:pPr algn="l">
               <a:defRPr sz="2100" b="1">
                 <a:solidFill>
@@ -2917,38 +2738,38 @@
       </p:sp>
       <p:sp>
         <p:nvSpPr>
-          <p:cNvPr id="8" name="">
-            <a:extLst xmlns:a="http://schemas.openxmlformats.org/drawingml/2006/main">
+          <p:cNvPr id="8" name="Rectangle 7">
+            <a:extLst>
               <a:ext uri="{FF2B5EF4-FFF2-40B4-BE49-F238E27FC236}">
                 <a16:creationId xmlns:a16="http://schemas.microsoft.com/office/drawing/2014/main" id="{A5C580D0-0C01-4C48-A058-74C0EBA77B28}"/>
               </a:ext>
             </a:extLst>
           </p:cNvPr>
           <p:cNvSpPr>
-            <a:spLocks xmlns:a="http://schemas.openxmlformats.org/drawingml/2006/main" noGrp="1"/>
-          </p:cNvSpPr>
-          <p:nvPr/>
-        </p:nvSpPr>
-        <p:spPr>
-          <a:xfrm xmlns:a="http://schemas.openxmlformats.org/drawingml/2006/main">
+            <a:spLocks noGrp="1"/>
+          </p:cNvSpPr>
+          <p:nvPr/>
+        </p:nvSpPr>
+        <p:spPr>
+          <a:xfrm>
             <a:off x="4343400" y="2952750"/>
             <a:ext cx="3143250" cy="1619250"/>
           </a:xfrm>
-          <a:prstGeom xmlns:a="http://schemas.openxmlformats.org/drawingml/2006/main" prst="rect">
-            <a:avLst/>
-          </a:prstGeom>
-          <a:noFill xmlns:a="http://schemas.openxmlformats.org/drawingml/2006/main"/>
-          <a:ln xmlns:a="http://schemas.openxmlformats.org/drawingml/2006/main" w="0">
-            <a:noFill/>
-            <a:prstDash val="solid"/>
-          </a:ln>
-        </p:spPr>
-        <p:txBody>
-          <a:bodyPr xmlns:a="http://schemas.openxmlformats.org/drawingml/2006/main" anchor="t">
-            <a:normAutofit fontScale="100000"/>
+          <a:prstGeom prst="rect">
+            <a:avLst/>
+          </a:prstGeom>
+          <a:noFill/>
+          <a:ln w="0">
+            <a:noFill/>
+            <a:prstDash val="solid"/>
+          </a:ln>
+        </p:spPr>
+        <p:txBody>
+          <a:bodyPr anchor="t">
+            <a:normAutofit/>
           </a:bodyPr>
-          <a:lstStyle xmlns:a="http://schemas.openxmlformats.org/drawingml/2006/main"/>
-          <a:p xmlns:a="http://schemas.openxmlformats.org/drawingml/2006/main">
+          <a:lstStyle/>
+          <a:p>
             <a:pPr algn="l">
               <a:defRPr sz="1575" b="0">
                 <a:solidFill>
@@ -2975,69 +2796,69 @@
       </p:sp>
       <p:sp>
         <p:nvSpPr>
-          <p:cNvPr id="9" name="">
-            <a:extLst xmlns:a="http://schemas.openxmlformats.org/drawingml/2006/main">
+          <p:cNvPr id="9" name="Rectangle 8">
+            <a:extLst>
               <a:ext uri="{FF2B5EF4-FFF2-40B4-BE49-F238E27FC236}">
                 <a16:creationId xmlns:a16="http://schemas.microsoft.com/office/drawing/2014/main" id="{68B2D112-2993-4A03-8E8C-A66099E25670}"/>
               </a:ext>
             </a:extLst>
           </p:cNvPr>
           <p:cNvSpPr>
-            <a:spLocks xmlns:a="http://schemas.openxmlformats.org/drawingml/2006/main" noGrp="1"/>
-          </p:cNvSpPr>
-          <p:nvPr/>
-        </p:nvSpPr>
-        <p:spPr>
-          <a:xfrm xmlns:a="http://schemas.openxmlformats.org/drawingml/2006/main">
+            <a:spLocks noGrp="1"/>
+          </p:cNvSpPr>
+          <p:nvPr/>
+        </p:nvSpPr>
+        <p:spPr>
+          <a:xfrm>
             <a:off x="4343400" y="4819650"/>
             <a:ext cx="3143250" cy="76200"/>
           </a:xfrm>
-          <a:prstGeom xmlns:a="http://schemas.openxmlformats.org/drawingml/2006/main" prst="rect">
-            <a:avLst/>
-          </a:prstGeom>
-          <a:solidFill xmlns:a="http://schemas.openxmlformats.org/drawingml/2006/main">
+          <a:prstGeom prst="rect">
+            <a:avLst/>
+          </a:prstGeom>
+          <a:solidFill>
             <a:srgbClr val="3D8DFF"/>
           </a:solidFill>
-          <a:ln xmlns:a="http://schemas.openxmlformats.org/drawingml/2006/main" w="0">
-            <a:noFill/>
-            <a:prstDash val="solid"/>
-          </a:ln>
-        </p:spPr>
-      </p:sp>
-      <p:sp>
-        <p:nvSpPr>
-          <p:cNvPr id="10" name="">
-            <a:extLst xmlns:a="http://schemas.openxmlformats.org/drawingml/2006/main">
+          <a:ln w="0">
+            <a:noFill/>
+            <a:prstDash val="solid"/>
+          </a:ln>
+        </p:spPr>
+      </p:sp>
+      <p:sp>
+        <p:nvSpPr>
+          <p:cNvPr id="10" name="Rectangle 9">
+            <a:extLst>
               <a:ext uri="{FF2B5EF4-FFF2-40B4-BE49-F238E27FC236}">
                 <a16:creationId xmlns:a16="http://schemas.microsoft.com/office/drawing/2014/main" id="{66378C7B-2B2D-43D8-9B8A-43E39604452F}"/>
               </a:ext>
             </a:extLst>
           </p:cNvPr>
           <p:cNvSpPr>
-            <a:spLocks xmlns:a="http://schemas.openxmlformats.org/drawingml/2006/main" noGrp="1"/>
-          </p:cNvSpPr>
-          <p:nvPr/>
-        </p:nvSpPr>
-        <p:spPr>
-          <a:xfrm xmlns:a="http://schemas.openxmlformats.org/drawingml/2006/main">
+            <a:spLocks noGrp="1"/>
+          </p:cNvSpPr>
+          <p:nvPr/>
+        </p:nvSpPr>
+        <p:spPr>
+          <a:xfrm>
             <a:off x="8267700" y="1638300"/>
             <a:ext cx="952500" cy="419100"/>
           </a:xfrm>
-          <a:prstGeom xmlns:a="http://schemas.openxmlformats.org/drawingml/2006/main" prst="rect">
-            <a:avLst/>
-          </a:prstGeom>
-          <a:noFill xmlns:a="http://schemas.openxmlformats.org/drawingml/2006/main"/>
-          <a:ln xmlns:a="http://schemas.openxmlformats.org/drawingml/2006/main" w="0">
-            <a:noFill/>
-            <a:prstDash val="solid"/>
-          </a:ln>
-        </p:spPr>
-        <p:txBody>
-          <a:bodyPr xmlns:a="http://schemas.openxmlformats.org/drawingml/2006/main" anchor="t">
-            <a:normAutofit fontScale="100000"/>
+          <a:prstGeom prst="rect">
+            <a:avLst/>
+          </a:prstGeom>
+          <a:noFill/>
+          <a:ln w="0">
+            <a:noFill/>
+            <a:prstDash val="solid"/>
+          </a:ln>
+        </p:spPr>
+        <p:txBody>
+          <a:bodyPr anchor="t">
+            <a:normAutofit/>
           </a:bodyPr>
-          <a:lstStyle xmlns:a="http://schemas.openxmlformats.org/drawingml/2006/main"/>
-          <a:p xmlns:a="http://schemas.openxmlformats.org/drawingml/2006/main">
+          <a:lstStyle/>
+          <a:p>
             <a:pPr algn="l">
               <a:defRPr sz="1500" b="1">
                 <a:solidFill>
@@ -3064,38 +2885,38 @@
       </p:sp>
       <p:sp>
         <p:nvSpPr>
-          <p:cNvPr id="11" name="">
-            <a:extLst xmlns:a="http://schemas.openxmlformats.org/drawingml/2006/main">
+          <p:cNvPr id="11" name="Rectangle 10">
+            <a:extLst>
               <a:ext uri="{FF2B5EF4-FFF2-40B4-BE49-F238E27FC236}">
                 <a16:creationId xmlns:a16="http://schemas.microsoft.com/office/drawing/2014/main" id="{D5FA7CAC-2137-43A5-AF17-88BECBAC9B4B}"/>
               </a:ext>
             </a:extLst>
           </p:cNvPr>
           <p:cNvSpPr>
-            <a:spLocks xmlns:a="http://schemas.openxmlformats.org/drawingml/2006/main" noGrp="1"/>
-          </p:cNvSpPr>
-          <p:nvPr/>
-        </p:nvSpPr>
-        <p:spPr>
-          <a:xfrm xmlns:a="http://schemas.openxmlformats.org/drawingml/2006/main">
+            <a:spLocks noGrp="1"/>
+          </p:cNvSpPr>
+          <p:nvPr/>
+        </p:nvSpPr>
+        <p:spPr>
+          <a:xfrm>
             <a:off x="8267700" y="2171700"/>
             <a:ext cx="3238500" cy="495300"/>
           </a:xfrm>
-          <a:prstGeom xmlns:a="http://schemas.openxmlformats.org/drawingml/2006/main" prst="rect">
-            <a:avLst/>
-          </a:prstGeom>
-          <a:noFill xmlns:a="http://schemas.openxmlformats.org/drawingml/2006/main"/>
-          <a:ln xmlns:a="http://schemas.openxmlformats.org/drawingml/2006/main" w="0">
-            <a:noFill/>
-            <a:prstDash val="solid"/>
-          </a:ln>
-        </p:spPr>
-        <p:txBody>
-          <a:bodyPr xmlns:a="http://schemas.openxmlformats.org/drawingml/2006/main" anchor="t">
-            <a:normAutofit fontScale="100000"/>
+          <a:prstGeom prst="rect">
+            <a:avLst/>
+          </a:prstGeom>
+          <a:noFill/>
+          <a:ln w="0">
+            <a:noFill/>
+            <a:prstDash val="solid"/>
+          </a:ln>
+        </p:spPr>
+        <p:txBody>
+          <a:bodyPr anchor="t">
+            <a:normAutofit/>
           </a:bodyPr>
-          <a:lstStyle xmlns:a="http://schemas.openxmlformats.org/drawingml/2006/main"/>
-          <a:p xmlns:a="http://schemas.openxmlformats.org/drawingml/2006/main">
+          <a:lstStyle/>
+          <a:p>
             <a:pPr algn="l">
               <a:defRPr sz="2100" b="1">
                 <a:solidFill>
@@ -3122,38 +2943,38 @@
       </p:sp>
       <p:sp>
         <p:nvSpPr>
-          <p:cNvPr id="12" name="">
-            <a:extLst xmlns:a="http://schemas.openxmlformats.org/drawingml/2006/main">
+          <p:cNvPr id="12" name="Rectangle 11">
+            <a:extLst>
               <a:ext uri="{FF2B5EF4-FFF2-40B4-BE49-F238E27FC236}">
                 <a16:creationId xmlns:a16="http://schemas.microsoft.com/office/drawing/2014/main" id="{97EEE9C3-6360-4E59-B5DB-A52681A9FABA}"/>
               </a:ext>
             </a:extLst>
           </p:cNvPr>
           <p:cNvSpPr>
-            <a:spLocks xmlns:a="http://schemas.openxmlformats.org/drawingml/2006/main" noGrp="1"/>
-          </p:cNvSpPr>
-          <p:nvPr/>
-        </p:nvSpPr>
-        <p:spPr>
-          <a:xfrm xmlns:a="http://schemas.openxmlformats.org/drawingml/2006/main">
+            <a:spLocks noGrp="1"/>
+          </p:cNvSpPr>
+          <p:nvPr/>
+        </p:nvSpPr>
+        <p:spPr>
+          <a:xfrm>
             <a:off x="8267700" y="2952750"/>
             <a:ext cx="3143250" cy="1619250"/>
           </a:xfrm>
-          <a:prstGeom xmlns:a="http://schemas.openxmlformats.org/drawingml/2006/main" prst="rect">
-            <a:avLst/>
-          </a:prstGeom>
-          <a:noFill xmlns:a="http://schemas.openxmlformats.org/drawingml/2006/main"/>
-          <a:ln xmlns:a="http://schemas.openxmlformats.org/drawingml/2006/main" w="0">
-            <a:noFill/>
-            <a:prstDash val="solid"/>
-          </a:ln>
-        </p:spPr>
-        <p:txBody>
-          <a:bodyPr xmlns:a="http://schemas.openxmlformats.org/drawingml/2006/main" anchor="t">
-            <a:normAutofit fontScale="100000"/>
+          <a:prstGeom prst="rect">
+            <a:avLst/>
+          </a:prstGeom>
+          <a:noFill/>
+          <a:ln w="0">
+            <a:noFill/>
+            <a:prstDash val="solid"/>
+          </a:ln>
+        </p:spPr>
+        <p:txBody>
+          <a:bodyPr anchor="t">
+            <a:normAutofit/>
           </a:bodyPr>
-          <a:lstStyle xmlns:a="http://schemas.openxmlformats.org/drawingml/2006/main"/>
-          <a:p xmlns:a="http://schemas.openxmlformats.org/drawingml/2006/main">
+          <a:lstStyle/>
+          <a:p>
             <a:pPr algn="l">
               <a:defRPr sz="1575" b="0">
                 <a:solidFill>
@@ -3180,69 +3001,69 @@
       </p:sp>
       <p:sp>
         <p:nvSpPr>
-          <p:cNvPr id="13" name="">
-            <a:extLst xmlns:a="http://schemas.openxmlformats.org/drawingml/2006/main">
+          <p:cNvPr id="13" name="Rectangle 12">
+            <a:extLst>
               <a:ext uri="{FF2B5EF4-FFF2-40B4-BE49-F238E27FC236}">
                 <a16:creationId xmlns:a16="http://schemas.microsoft.com/office/drawing/2014/main" id="{1DC14FF4-AA06-4BE0-A6EF-77B7E62F0DFB}"/>
               </a:ext>
             </a:extLst>
           </p:cNvPr>
           <p:cNvSpPr>
-            <a:spLocks xmlns:a="http://schemas.openxmlformats.org/drawingml/2006/main" noGrp="1"/>
-          </p:cNvSpPr>
-          <p:nvPr/>
-        </p:nvSpPr>
-        <p:spPr>
-          <a:xfrm xmlns:a="http://schemas.openxmlformats.org/drawingml/2006/main">
+            <a:spLocks noGrp="1"/>
+          </p:cNvSpPr>
+          <p:nvPr/>
+        </p:nvSpPr>
+        <p:spPr>
+          <a:xfrm>
             <a:off x="8267700" y="4819650"/>
             <a:ext cx="3143250" cy="76200"/>
           </a:xfrm>
-          <a:prstGeom xmlns:a="http://schemas.openxmlformats.org/drawingml/2006/main" prst="rect">
-            <a:avLst/>
-          </a:prstGeom>
-          <a:solidFill xmlns:a="http://schemas.openxmlformats.org/drawingml/2006/main">
+          <a:prstGeom prst="rect">
+            <a:avLst/>
+          </a:prstGeom>
+          <a:solidFill>
             <a:srgbClr val="3D8DFF"/>
           </a:solidFill>
-          <a:ln xmlns:a="http://schemas.openxmlformats.org/drawingml/2006/main" w="0">
-            <a:noFill/>
-            <a:prstDash val="solid"/>
-          </a:ln>
-        </p:spPr>
-      </p:sp>
-      <p:sp>
-        <p:nvSpPr>
-          <p:cNvPr id="14" name="">
-            <a:extLst xmlns:a="http://schemas.openxmlformats.org/drawingml/2006/main">
+          <a:ln w="0">
+            <a:noFill/>
+            <a:prstDash val="solid"/>
+          </a:ln>
+        </p:spPr>
+      </p:sp>
+      <p:sp>
+        <p:nvSpPr>
+          <p:cNvPr id="14" name="Rectangle 13">
+            <a:extLst>
               <a:ext uri="{FF2B5EF4-FFF2-40B4-BE49-F238E27FC236}">
                 <a16:creationId xmlns:a16="http://schemas.microsoft.com/office/drawing/2014/main" id="{A2C88A8A-5CDA-4B6D-AE8E-28BAECC93366}"/>
               </a:ext>
             </a:extLst>
           </p:cNvPr>
           <p:cNvSpPr>
-            <a:spLocks xmlns:a="http://schemas.openxmlformats.org/drawingml/2006/main" noGrp="1"/>
-          </p:cNvSpPr>
-          <p:nvPr/>
-        </p:nvSpPr>
-        <p:spPr>
-          <a:xfrm xmlns:a="http://schemas.openxmlformats.org/drawingml/2006/main">
+            <a:spLocks noGrp="1"/>
+          </p:cNvSpPr>
+          <p:nvPr/>
+        </p:nvSpPr>
+        <p:spPr>
+          <a:xfrm>
             <a:off x="419100" y="6419850"/>
             <a:ext cx="3429000" cy="209550"/>
           </a:xfrm>
-          <a:prstGeom xmlns:a="http://schemas.openxmlformats.org/drawingml/2006/main" prst="rect">
-            <a:avLst/>
-          </a:prstGeom>
-          <a:noFill xmlns:a="http://schemas.openxmlformats.org/drawingml/2006/main"/>
-          <a:ln xmlns:a="http://schemas.openxmlformats.org/drawingml/2006/main" w="0">
-            <a:noFill/>
-            <a:prstDash val="solid"/>
-          </a:ln>
-        </p:spPr>
-        <p:txBody>
-          <a:bodyPr xmlns:a="http://schemas.openxmlformats.org/drawingml/2006/main" anchor="t">
+          <a:prstGeom prst="rect">
+            <a:avLst/>
+          </a:prstGeom>
+          <a:noFill/>
+          <a:ln w="0">
+            <a:noFill/>
+            <a:prstDash val="solid"/>
+          </a:ln>
+        </p:spPr>
+        <p:txBody>
+          <a:bodyPr anchor="t">
             <a:normAutofit fontScale="86111"/>
           </a:bodyPr>
-          <a:lstStyle xmlns:a="http://schemas.openxmlformats.org/drawingml/2006/main"/>
-          <a:p xmlns:a="http://schemas.openxmlformats.org/drawingml/2006/main">
+          <a:lstStyle/>
+          <a:p>
             <a:pPr algn="l">
               <a:defRPr sz="900" b="0">
                 <a:solidFill>
@@ -3269,38 +3090,38 @@
       </p:sp>
       <p:sp>
         <p:nvSpPr>
-          <p:cNvPr id="15" name="">
-            <a:extLst xmlns:a="http://schemas.openxmlformats.org/drawingml/2006/main">
+          <p:cNvPr id="15" name="Rectangle 14">
+            <a:extLst>
               <a:ext uri="{FF2B5EF4-FFF2-40B4-BE49-F238E27FC236}">
                 <a16:creationId xmlns:a16="http://schemas.microsoft.com/office/drawing/2014/main" id="{33418081-B9C4-417C-97C7-AA42E6A5E3C7}"/>
               </a:ext>
             </a:extLst>
           </p:cNvPr>
           <p:cNvSpPr>
-            <a:spLocks xmlns:a="http://schemas.openxmlformats.org/drawingml/2006/main" noGrp="1"/>
-          </p:cNvSpPr>
-          <p:nvPr/>
-        </p:nvSpPr>
-        <p:spPr>
-          <a:xfrm xmlns:a="http://schemas.openxmlformats.org/drawingml/2006/main">
+            <a:spLocks noGrp="1"/>
+          </p:cNvSpPr>
+          <p:nvPr/>
+        </p:nvSpPr>
+        <p:spPr>
+          <a:xfrm>
             <a:off x="11239500" y="6419850"/>
             <a:ext cx="523875" cy="209550"/>
           </a:xfrm>
-          <a:prstGeom xmlns:a="http://schemas.openxmlformats.org/drawingml/2006/main" prst="rect">
-            <a:avLst/>
-          </a:prstGeom>
-          <a:noFill xmlns:a="http://schemas.openxmlformats.org/drawingml/2006/main"/>
-          <a:ln xmlns:a="http://schemas.openxmlformats.org/drawingml/2006/main" w="0">
-            <a:noFill/>
-            <a:prstDash val="solid"/>
-          </a:ln>
-        </p:spPr>
-        <p:txBody>
-          <a:bodyPr xmlns:a="http://schemas.openxmlformats.org/drawingml/2006/main" anchor="t">
+          <a:prstGeom prst="rect">
+            <a:avLst/>
+          </a:prstGeom>
+          <a:noFill/>
+          <a:ln w="0">
+            <a:noFill/>
+            <a:prstDash val="solid"/>
+          </a:ln>
+        </p:spPr>
+        <p:txBody>
+          <a:bodyPr anchor="t">
             <a:normAutofit fontScale="86111"/>
           </a:bodyPr>
-          <a:lstStyle xmlns:a="http://schemas.openxmlformats.org/drawingml/2006/main"/>
-          <a:p xmlns:a="http://schemas.openxmlformats.org/drawingml/2006/main">
+          <a:lstStyle/>
+          <a:p>
             <a:pPr algn="r">
               <a:defRPr sz="900" b="0">
                 <a:solidFill>
@@ -3332,17 +3153,21 @@
       </p:ext>
     </p:extLst>
   </p:cSld>
+  <p:clrMapOvr>
+    <a:masterClrMapping/>
+  </p:clrMapOvr>
 </p:sld>
 </file>
 
 <file path=ppt/slides/slide4.xml><?xml version="1.0" encoding="utf-8"?>
-<p:sld xmlns:p="http://schemas.openxmlformats.org/presentationml/2006/main">
+<p:sld xmlns:a="http://schemas.openxmlformats.org/drawingml/2006/main" xmlns:r="http://schemas.openxmlformats.org/officeDocument/2006/relationships" xmlns:p="http://schemas.openxmlformats.org/presentationml/2006/main">
   <p:cSld>
     <p:bg>
       <p:bgPr>
-        <a:solidFill xmlns:a="http://schemas.openxmlformats.org/drawingml/2006/main">
+        <a:solidFill>
           <a:srgbClr val="FFFFFF"/>
         </a:solidFill>
+        <a:effectLst/>
       </p:bgPr>
     </p:bg>
     <p:spTree>
@@ -3352,42 +3177,47 @@
         <p:nvPr/>
       </p:nvGrpSpPr>
       <p:grpSpPr>
-        <a:xfrm xmlns:a="http://schemas.openxmlformats.org/drawingml/2006/main"/>
+        <a:xfrm>
+          <a:off x="0" y="0"/>
+          <a:ext cx="0" cy="0"/>
+          <a:chOff x="0" y="0"/>
+          <a:chExt cx="0" cy="0"/>
+        </a:xfrm>
       </p:grpSpPr>
       <p:sp>
         <p:nvSpPr>
-          <p:cNvPr id="17" name="">
-            <a:extLst xmlns:a="http://schemas.openxmlformats.org/drawingml/2006/main">
+          <p:cNvPr id="17" name="Rectangle 16">
+            <a:extLst>
               <a:ext uri="{FF2B5EF4-FFF2-40B4-BE49-F238E27FC236}">
                 <a16:creationId xmlns:a16="http://schemas.microsoft.com/office/drawing/2014/main" id="{0F08FC93-2A0B-40F5-811D-D0D138D42B0B}"/>
               </a:ext>
             </a:extLst>
           </p:cNvPr>
           <p:cNvSpPr>
-            <a:spLocks xmlns:a="http://schemas.openxmlformats.org/drawingml/2006/main" noGrp="1"/>
-          </p:cNvSpPr>
-          <p:nvPr/>
-        </p:nvSpPr>
-        <p:spPr>
-          <a:xfrm xmlns:a="http://schemas.openxmlformats.org/drawingml/2006/main">
+            <a:spLocks noGrp="1"/>
+          </p:cNvSpPr>
+          <p:nvPr/>
+        </p:nvSpPr>
+        <p:spPr>
+          <a:xfrm>
             <a:off x="419100" y="361950"/>
             <a:ext cx="10477500" cy="723900"/>
           </a:xfrm>
-          <a:prstGeom xmlns:a="http://schemas.openxmlformats.org/drawingml/2006/main" prst="rect">
-            <a:avLst/>
-          </a:prstGeom>
-          <a:noFill xmlns:a="http://schemas.openxmlformats.org/drawingml/2006/main"/>
-          <a:ln xmlns:a="http://schemas.openxmlformats.org/drawingml/2006/main" w="0">
-            <a:noFill/>
-            <a:prstDash val="solid"/>
-          </a:ln>
-        </p:spPr>
-        <p:txBody>
-          <a:bodyPr xmlns:a="http://schemas.openxmlformats.org/drawingml/2006/main" anchor="t">
-            <a:normAutofit fontScale="100000"/>
+          <a:prstGeom prst="rect">
+            <a:avLst/>
+          </a:prstGeom>
+          <a:noFill/>
+          <a:ln w="0">
+            <a:noFill/>
+            <a:prstDash val="solid"/>
+          </a:ln>
+        </p:spPr>
+        <p:txBody>
+          <a:bodyPr anchor="t">
+            <a:normAutofit/>
           </a:bodyPr>
-          <a:lstStyle xmlns:a="http://schemas.openxmlformats.org/drawingml/2006/main"/>
-          <a:p xmlns:a="http://schemas.openxmlformats.org/drawingml/2006/main">
+          <a:lstStyle/>
+          <a:p>
             <a:pPr algn="l">
               <a:defRPr sz="3000" b="1">
                 <a:solidFill>
@@ -3414,102 +3244,102 @@
       </p:sp>
       <p:sp>
         <p:nvSpPr>
-          <p:cNvPr id="2" name="">
-            <a:extLst xmlns:a="http://schemas.openxmlformats.org/drawingml/2006/main">
+          <p:cNvPr id="2" name="Rectangle 1">
+            <a:extLst>
               <a:ext uri="{FF2B5EF4-FFF2-40B4-BE49-F238E27FC236}">
                 <a16:creationId xmlns:a16="http://schemas.microsoft.com/office/drawing/2014/main" id="{ADDBF974-964A-4EDB-B1C6-277BD12D18C8}"/>
               </a:ext>
             </a:extLst>
           </p:cNvPr>
           <p:cNvSpPr>
-            <a:spLocks xmlns:a="http://schemas.openxmlformats.org/drawingml/2006/main" noGrp="1"/>
-          </p:cNvSpPr>
-          <p:nvPr/>
-        </p:nvSpPr>
-        <p:spPr>
-          <a:xfrm xmlns:a="http://schemas.openxmlformats.org/drawingml/2006/main">
+            <a:spLocks noGrp="1"/>
+          </p:cNvSpPr>
+          <p:nvPr/>
+        </p:nvSpPr>
+        <p:spPr>
+          <a:xfrm>
             <a:off x="819150" y="2952750"/>
             <a:ext cx="10382250" cy="19050"/>
           </a:xfrm>
-          <a:prstGeom xmlns:a="http://schemas.openxmlformats.org/drawingml/2006/main" prst="rect">
-            <a:avLst/>
-          </a:prstGeom>
-          <a:solidFill xmlns:a="http://schemas.openxmlformats.org/drawingml/2006/main">
+          <a:prstGeom prst="rect">
+            <a:avLst/>
+          </a:prstGeom>
+          <a:solidFill>
             <a:srgbClr val="B8BCC4"/>
           </a:solidFill>
-          <a:ln xmlns:a="http://schemas.openxmlformats.org/drawingml/2006/main" w="0">
-            <a:noFill/>
-            <a:prstDash val="solid"/>
-          </a:ln>
-        </p:spPr>
-      </p:sp>
-      <p:sp>
-        <p:nvSpPr>
-          <p:cNvPr id="3" name="">
-            <a:extLst xmlns:a="http://schemas.openxmlformats.org/drawingml/2006/main">
+          <a:ln w="0">
+            <a:noFill/>
+            <a:prstDash val="solid"/>
+          </a:ln>
+        </p:spPr>
+      </p:sp>
+      <p:sp>
+        <p:nvSpPr>
+          <p:cNvPr id="3" name="Rounded Rectangle 2">
+            <a:extLst>
               <a:ext uri="{FF2B5EF4-FFF2-40B4-BE49-F238E27FC236}">
                 <a16:creationId xmlns:a16="http://schemas.microsoft.com/office/drawing/2014/main" id="{6310313B-80E7-4425-B2CE-C3EA43111FFC}"/>
               </a:ext>
             </a:extLst>
           </p:cNvPr>
           <p:cNvSpPr>
-            <a:spLocks xmlns:a="http://schemas.openxmlformats.org/drawingml/2006/main" noGrp="1"/>
-          </p:cNvSpPr>
-          <p:nvPr/>
-        </p:nvSpPr>
-        <p:spPr>
-          <a:xfrm xmlns:a="http://schemas.openxmlformats.org/drawingml/2006/main">
+            <a:spLocks noGrp="1"/>
+          </p:cNvSpPr>
+          <p:nvPr/>
+        </p:nvSpPr>
+        <p:spPr>
+          <a:xfrm>
             <a:off x="1047750" y="2819400"/>
             <a:ext cx="266700" cy="266700"/>
           </a:xfrm>
-          <a:prstGeom xmlns:a="http://schemas.openxmlformats.org/drawingml/2006/main" prst="roundRect">
+          <a:prstGeom prst="roundRect">
             <a:avLst>
               <a:gd name="adj" fmla="val 42857"/>
             </a:avLst>
           </a:prstGeom>
-          <a:solidFill xmlns:a="http://schemas.openxmlformats.org/drawingml/2006/main">
+          <a:solidFill>
             <a:srgbClr val="3D8DFF"/>
           </a:solidFill>
-          <a:ln xmlns:a="http://schemas.openxmlformats.org/drawingml/2006/main" w="0">
-            <a:noFill/>
-            <a:prstDash val="solid"/>
-          </a:ln>
-        </p:spPr>
-      </p:sp>
-      <p:sp>
-        <p:nvSpPr>
-          <p:cNvPr id="4" name="">
-            <a:extLst xmlns:a="http://schemas.openxmlformats.org/drawingml/2006/main">
+          <a:ln w="0">
+            <a:noFill/>
+            <a:prstDash val="solid"/>
+          </a:ln>
+        </p:spPr>
+      </p:sp>
+      <p:sp>
+        <p:nvSpPr>
+          <p:cNvPr id="4" name="Rectangle 3">
+            <a:extLst>
               <a:ext uri="{FF2B5EF4-FFF2-40B4-BE49-F238E27FC236}">
                 <a16:creationId xmlns:a16="http://schemas.microsoft.com/office/drawing/2014/main" id="{1B395A80-87F9-4872-B1EE-C932D4E105DC}"/>
               </a:ext>
             </a:extLst>
           </p:cNvPr>
           <p:cNvSpPr>
-            <a:spLocks xmlns:a="http://schemas.openxmlformats.org/drawingml/2006/main" noGrp="1"/>
-          </p:cNvSpPr>
-          <p:nvPr/>
-        </p:nvSpPr>
-        <p:spPr>
-          <a:xfrm xmlns:a="http://schemas.openxmlformats.org/drawingml/2006/main">
+            <a:spLocks noGrp="1"/>
+          </p:cNvSpPr>
+          <p:nvPr/>
+        </p:nvSpPr>
+        <p:spPr>
+          <a:xfrm>
             <a:off x="857250" y="2095500"/>
             <a:ext cx="2095500" cy="400050"/>
           </a:xfrm>
-          <a:prstGeom xmlns:a="http://schemas.openxmlformats.org/drawingml/2006/main" prst="rect">
-            <a:avLst/>
-          </a:prstGeom>
-          <a:noFill xmlns:a="http://schemas.openxmlformats.org/drawingml/2006/main"/>
-          <a:ln xmlns:a="http://schemas.openxmlformats.org/drawingml/2006/main" w="0">
-            <a:noFill/>
-            <a:prstDash val="solid"/>
-          </a:ln>
-        </p:spPr>
-        <p:txBody>
-          <a:bodyPr xmlns:a="http://schemas.openxmlformats.org/drawingml/2006/main" anchor="t">
-            <a:normAutofit fontScale="100000"/>
+          <a:prstGeom prst="rect">
+            <a:avLst/>
+          </a:prstGeom>
+          <a:noFill/>
+          <a:ln w="0">
+            <a:noFill/>
+            <a:prstDash val="solid"/>
+          </a:ln>
+        </p:spPr>
+        <p:txBody>
+          <a:bodyPr anchor="t">
+            <a:normAutofit/>
           </a:bodyPr>
-          <a:lstStyle xmlns:a="http://schemas.openxmlformats.org/drawingml/2006/main"/>
-          <a:p xmlns:a="http://schemas.openxmlformats.org/drawingml/2006/main">
+          <a:lstStyle/>
+          <a:p>
             <a:pPr algn="l">
               <a:defRPr sz="1350" b="1">
                 <a:solidFill>
@@ -3536,38 +3366,38 @@
       </p:sp>
       <p:sp>
         <p:nvSpPr>
-          <p:cNvPr id="5" name="">
-            <a:extLst xmlns:a="http://schemas.openxmlformats.org/drawingml/2006/main">
+          <p:cNvPr id="5" name="Rectangle 4">
+            <a:extLst>
               <a:ext uri="{FF2B5EF4-FFF2-40B4-BE49-F238E27FC236}">
                 <a16:creationId xmlns:a16="http://schemas.microsoft.com/office/drawing/2014/main" id="{466EB9C2-C204-4F28-A484-4D6530900003}"/>
               </a:ext>
             </a:extLst>
           </p:cNvPr>
           <p:cNvSpPr>
-            <a:spLocks xmlns:a="http://schemas.openxmlformats.org/drawingml/2006/main" noGrp="1"/>
-          </p:cNvSpPr>
-          <p:nvPr/>
-        </p:nvSpPr>
-        <p:spPr>
-          <a:xfrm xmlns:a="http://schemas.openxmlformats.org/drawingml/2006/main">
+            <a:spLocks noGrp="1"/>
+          </p:cNvSpPr>
+          <p:nvPr/>
+        </p:nvSpPr>
+        <p:spPr>
+          <a:xfrm>
             <a:off x="857250" y="3390900"/>
             <a:ext cx="2190750" cy="838200"/>
           </a:xfrm>
-          <a:prstGeom xmlns:a="http://schemas.openxmlformats.org/drawingml/2006/main" prst="rect">
-            <a:avLst/>
-          </a:prstGeom>
-          <a:noFill xmlns:a="http://schemas.openxmlformats.org/drawingml/2006/main"/>
-          <a:ln xmlns:a="http://schemas.openxmlformats.org/drawingml/2006/main" w="0">
-            <a:noFill/>
-            <a:prstDash val="solid"/>
-          </a:ln>
-        </p:spPr>
-        <p:txBody>
-          <a:bodyPr xmlns:a="http://schemas.openxmlformats.org/drawingml/2006/main" anchor="t">
-            <a:normAutofit fontScale="100000"/>
+          <a:prstGeom prst="rect">
+            <a:avLst/>
+          </a:prstGeom>
+          <a:noFill/>
+          <a:ln w="0">
+            <a:noFill/>
+            <a:prstDash val="solid"/>
+          </a:ln>
+        </p:spPr>
+        <p:txBody>
+          <a:bodyPr anchor="t">
+            <a:normAutofit/>
           </a:bodyPr>
-          <a:lstStyle xmlns:a="http://schemas.openxmlformats.org/drawingml/2006/main"/>
-          <a:p xmlns:a="http://schemas.openxmlformats.org/drawingml/2006/main">
+          <a:lstStyle/>
+          <a:p>
             <a:pPr algn="l">
               <a:defRPr sz="1650" b="0">
                 <a:solidFill>
@@ -3594,71 +3424,71 @@
       </p:sp>
       <p:sp>
         <p:nvSpPr>
-          <p:cNvPr id="6" name="">
-            <a:extLst xmlns:a="http://schemas.openxmlformats.org/drawingml/2006/main">
+          <p:cNvPr id="6" name="Rounded Rectangle 5">
+            <a:extLst>
               <a:ext uri="{FF2B5EF4-FFF2-40B4-BE49-F238E27FC236}">
                 <a16:creationId xmlns:a16="http://schemas.microsoft.com/office/drawing/2014/main" id="{02FA0EC3-2B32-4B7B-B9D2-82CE4519717E}"/>
               </a:ext>
             </a:extLst>
           </p:cNvPr>
           <p:cNvSpPr>
-            <a:spLocks xmlns:a="http://schemas.openxmlformats.org/drawingml/2006/main" noGrp="1"/>
-          </p:cNvSpPr>
-          <p:nvPr/>
-        </p:nvSpPr>
-        <p:spPr>
-          <a:xfrm xmlns:a="http://schemas.openxmlformats.org/drawingml/2006/main">
+            <a:spLocks noGrp="1"/>
+          </p:cNvSpPr>
+          <p:nvPr/>
+        </p:nvSpPr>
+        <p:spPr>
+          <a:xfrm>
             <a:off x="3762375" y="2819400"/>
             <a:ext cx="266700" cy="266700"/>
           </a:xfrm>
-          <a:prstGeom xmlns:a="http://schemas.openxmlformats.org/drawingml/2006/main" prst="roundRect">
+          <a:prstGeom prst="roundRect">
             <a:avLst>
               <a:gd name="adj" fmla="val 42857"/>
             </a:avLst>
           </a:prstGeom>
-          <a:solidFill xmlns:a="http://schemas.openxmlformats.org/drawingml/2006/main">
+          <a:solidFill>
             <a:srgbClr val="3D8DFF"/>
           </a:solidFill>
-          <a:ln xmlns:a="http://schemas.openxmlformats.org/drawingml/2006/main" w="0">
-            <a:noFill/>
-            <a:prstDash val="solid"/>
-          </a:ln>
-        </p:spPr>
-      </p:sp>
-      <p:sp>
-        <p:nvSpPr>
-          <p:cNvPr id="7" name="">
-            <a:extLst xmlns:a="http://schemas.openxmlformats.org/drawingml/2006/main">
+          <a:ln w="0">
+            <a:noFill/>
+            <a:prstDash val="solid"/>
+          </a:ln>
+        </p:spPr>
+      </p:sp>
+      <p:sp>
+        <p:nvSpPr>
+          <p:cNvPr id="7" name="Rectangle 6">
+            <a:extLst>
               <a:ext uri="{FF2B5EF4-FFF2-40B4-BE49-F238E27FC236}">
                 <a16:creationId xmlns:a16="http://schemas.microsoft.com/office/drawing/2014/main" id="{612CD1A9-5B1B-4F06-BFDF-0225A3710A86}"/>
               </a:ext>
             </a:extLst>
           </p:cNvPr>
           <p:cNvSpPr>
-            <a:spLocks xmlns:a="http://schemas.openxmlformats.org/drawingml/2006/main" noGrp="1"/>
-          </p:cNvSpPr>
-          <p:nvPr/>
-        </p:nvSpPr>
-        <p:spPr>
-          <a:xfrm xmlns:a="http://schemas.openxmlformats.org/drawingml/2006/main">
+            <a:spLocks noGrp="1"/>
+          </p:cNvSpPr>
+          <p:nvPr/>
+        </p:nvSpPr>
+        <p:spPr>
+          <a:xfrm>
             <a:off x="3571875" y="2095500"/>
             <a:ext cx="2095500" cy="400050"/>
           </a:xfrm>
-          <a:prstGeom xmlns:a="http://schemas.openxmlformats.org/drawingml/2006/main" prst="rect">
-            <a:avLst/>
-          </a:prstGeom>
-          <a:noFill xmlns:a="http://schemas.openxmlformats.org/drawingml/2006/main"/>
-          <a:ln xmlns:a="http://schemas.openxmlformats.org/drawingml/2006/main" w="0">
-            <a:noFill/>
-            <a:prstDash val="solid"/>
-          </a:ln>
-        </p:spPr>
-        <p:txBody>
-          <a:bodyPr xmlns:a="http://schemas.openxmlformats.org/drawingml/2006/main" anchor="t">
-            <a:normAutofit fontScale="100000"/>
+          <a:prstGeom prst="rect">
+            <a:avLst/>
+          </a:prstGeom>
+          <a:noFill/>
+          <a:ln w="0">
+            <a:noFill/>
+            <a:prstDash val="solid"/>
+          </a:ln>
+        </p:spPr>
+        <p:txBody>
+          <a:bodyPr anchor="t">
+            <a:normAutofit/>
           </a:bodyPr>
-          <a:lstStyle xmlns:a="http://schemas.openxmlformats.org/drawingml/2006/main"/>
-          <a:p xmlns:a="http://schemas.openxmlformats.org/drawingml/2006/main">
+          <a:lstStyle/>
+          <a:p>
             <a:pPr algn="l">
               <a:defRPr sz="1350" b="1">
                 <a:solidFill>
@@ -3685,38 +3515,38 @@
       </p:sp>
       <p:sp>
         <p:nvSpPr>
-          <p:cNvPr id="8" name="">
-            <a:extLst xmlns:a="http://schemas.openxmlformats.org/drawingml/2006/main">
+          <p:cNvPr id="8" name="Rectangle 7">
+            <a:extLst>
               <a:ext uri="{FF2B5EF4-FFF2-40B4-BE49-F238E27FC236}">
                 <a16:creationId xmlns:a16="http://schemas.microsoft.com/office/drawing/2014/main" id="{F493DB8A-9C8A-4C48-B545-0C727EEB015D}"/>
               </a:ext>
             </a:extLst>
           </p:cNvPr>
           <p:cNvSpPr>
-            <a:spLocks xmlns:a="http://schemas.openxmlformats.org/drawingml/2006/main" noGrp="1"/>
-          </p:cNvSpPr>
-          <p:nvPr/>
-        </p:nvSpPr>
-        <p:spPr>
-          <a:xfrm xmlns:a="http://schemas.openxmlformats.org/drawingml/2006/main">
+            <a:spLocks noGrp="1"/>
+          </p:cNvSpPr>
+          <p:nvPr/>
+        </p:nvSpPr>
+        <p:spPr>
+          <a:xfrm>
             <a:off x="3571875" y="3390900"/>
             <a:ext cx="2190750" cy="838200"/>
           </a:xfrm>
-          <a:prstGeom xmlns:a="http://schemas.openxmlformats.org/drawingml/2006/main" prst="rect">
-            <a:avLst/>
-          </a:prstGeom>
-          <a:noFill xmlns:a="http://schemas.openxmlformats.org/drawingml/2006/main"/>
-          <a:ln xmlns:a="http://schemas.openxmlformats.org/drawingml/2006/main" w="0">
-            <a:noFill/>
-            <a:prstDash val="solid"/>
-          </a:ln>
-        </p:spPr>
-        <p:txBody>
-          <a:bodyPr xmlns:a="http://schemas.openxmlformats.org/drawingml/2006/main" anchor="t">
-            <a:normAutofit fontScale="100000"/>
+          <a:prstGeom prst="rect">
+            <a:avLst/>
+          </a:prstGeom>
+          <a:noFill/>
+          <a:ln w="0">
+            <a:noFill/>
+            <a:prstDash val="solid"/>
+          </a:ln>
+        </p:spPr>
+        <p:txBody>
+          <a:bodyPr anchor="t">
+            <a:normAutofit/>
           </a:bodyPr>
-          <a:lstStyle xmlns:a="http://schemas.openxmlformats.org/drawingml/2006/main"/>
-          <a:p xmlns:a="http://schemas.openxmlformats.org/drawingml/2006/main">
+          <a:lstStyle/>
+          <a:p>
             <a:pPr algn="l">
               <a:defRPr sz="1650" b="0">
                 <a:solidFill>
@@ -3743,71 +3573,71 @@
       </p:sp>
       <p:sp>
         <p:nvSpPr>
-          <p:cNvPr id="9" name="">
-            <a:extLst xmlns:a="http://schemas.openxmlformats.org/drawingml/2006/main">
+          <p:cNvPr id="9" name="Rounded Rectangle 8">
+            <a:extLst>
               <a:ext uri="{FF2B5EF4-FFF2-40B4-BE49-F238E27FC236}">
                 <a16:creationId xmlns:a16="http://schemas.microsoft.com/office/drawing/2014/main" id="{319C5E27-B489-4B92-8F40-B36896E96F9B}"/>
               </a:ext>
             </a:extLst>
           </p:cNvPr>
           <p:cNvSpPr>
-            <a:spLocks xmlns:a="http://schemas.openxmlformats.org/drawingml/2006/main" noGrp="1"/>
-          </p:cNvSpPr>
-          <p:nvPr/>
-        </p:nvSpPr>
-        <p:spPr>
-          <a:xfrm xmlns:a="http://schemas.openxmlformats.org/drawingml/2006/main">
+            <a:spLocks noGrp="1"/>
+          </p:cNvSpPr>
+          <p:nvPr/>
+        </p:nvSpPr>
+        <p:spPr>
+          <a:xfrm>
             <a:off x="6477000" y="2819400"/>
             <a:ext cx="266700" cy="266700"/>
           </a:xfrm>
-          <a:prstGeom xmlns:a="http://schemas.openxmlformats.org/drawingml/2006/main" prst="roundRect">
+          <a:prstGeom prst="roundRect">
             <a:avLst>
               <a:gd name="adj" fmla="val 42857"/>
             </a:avLst>
           </a:prstGeom>
-          <a:solidFill xmlns:a="http://schemas.openxmlformats.org/drawingml/2006/main">
+          <a:solidFill>
             <a:srgbClr val="3D8DFF"/>
           </a:solidFill>
-          <a:ln xmlns:a="http://schemas.openxmlformats.org/drawingml/2006/main" w="0">
-            <a:noFill/>
-            <a:prstDash val="solid"/>
-          </a:ln>
-        </p:spPr>
-      </p:sp>
-      <p:sp>
-        <p:nvSpPr>
-          <p:cNvPr id="10" name="">
-            <a:extLst xmlns:a="http://schemas.openxmlformats.org/drawingml/2006/main">
+          <a:ln w="0">
+            <a:noFill/>
+            <a:prstDash val="solid"/>
+          </a:ln>
+        </p:spPr>
+      </p:sp>
+      <p:sp>
+        <p:nvSpPr>
+          <p:cNvPr id="10" name="Rectangle 9">
+            <a:extLst>
               <a:ext uri="{FF2B5EF4-FFF2-40B4-BE49-F238E27FC236}">
                 <a16:creationId xmlns:a16="http://schemas.microsoft.com/office/drawing/2014/main" id="{9C0CE31E-4584-4B29-A506-C64C82CB7E9C}"/>
               </a:ext>
             </a:extLst>
           </p:cNvPr>
           <p:cNvSpPr>
-            <a:spLocks xmlns:a="http://schemas.openxmlformats.org/drawingml/2006/main" noGrp="1"/>
-          </p:cNvSpPr>
-          <p:nvPr/>
-        </p:nvSpPr>
-        <p:spPr>
-          <a:xfrm xmlns:a="http://schemas.openxmlformats.org/drawingml/2006/main">
+            <a:spLocks noGrp="1"/>
+          </p:cNvSpPr>
+          <p:nvPr/>
+        </p:nvSpPr>
+        <p:spPr>
+          <a:xfrm>
             <a:off x="6286500" y="2095500"/>
             <a:ext cx="2095500" cy="400050"/>
           </a:xfrm>
-          <a:prstGeom xmlns:a="http://schemas.openxmlformats.org/drawingml/2006/main" prst="rect">
-            <a:avLst/>
-          </a:prstGeom>
-          <a:noFill xmlns:a="http://schemas.openxmlformats.org/drawingml/2006/main"/>
-          <a:ln xmlns:a="http://schemas.openxmlformats.org/drawingml/2006/main" w="0">
-            <a:noFill/>
-            <a:prstDash val="solid"/>
-          </a:ln>
-        </p:spPr>
-        <p:txBody>
-          <a:bodyPr xmlns:a="http://schemas.openxmlformats.org/drawingml/2006/main" anchor="t">
-            <a:normAutofit fontScale="100000"/>
+          <a:prstGeom prst="rect">
+            <a:avLst/>
+          </a:prstGeom>
+          <a:noFill/>
+          <a:ln w="0">
+            <a:noFill/>
+            <a:prstDash val="solid"/>
+          </a:ln>
+        </p:spPr>
+        <p:txBody>
+          <a:bodyPr anchor="t">
+            <a:normAutofit/>
           </a:bodyPr>
-          <a:lstStyle xmlns:a="http://schemas.openxmlformats.org/drawingml/2006/main"/>
-          <a:p xmlns:a="http://schemas.openxmlformats.org/drawingml/2006/main">
+          <a:lstStyle/>
+          <a:p>
             <a:pPr algn="l">
               <a:defRPr sz="1350" b="1">
                 <a:solidFill>
@@ -3834,38 +3664,38 @@
       </p:sp>
       <p:sp>
         <p:nvSpPr>
-          <p:cNvPr id="11" name="">
-            <a:extLst xmlns:a="http://schemas.openxmlformats.org/drawingml/2006/main">
+          <p:cNvPr id="11" name="Rectangle 10">
+            <a:extLst>
               <a:ext uri="{FF2B5EF4-FFF2-40B4-BE49-F238E27FC236}">
                 <a16:creationId xmlns:a16="http://schemas.microsoft.com/office/drawing/2014/main" id="{F2DA44AC-2B47-4974-AD81-351F6522516E}"/>
               </a:ext>
             </a:extLst>
           </p:cNvPr>
           <p:cNvSpPr>
-            <a:spLocks xmlns:a="http://schemas.openxmlformats.org/drawingml/2006/main" noGrp="1"/>
-          </p:cNvSpPr>
-          <p:nvPr/>
-        </p:nvSpPr>
-        <p:spPr>
-          <a:xfrm xmlns:a="http://schemas.openxmlformats.org/drawingml/2006/main">
+            <a:spLocks noGrp="1"/>
+          </p:cNvSpPr>
+          <p:nvPr/>
+        </p:nvSpPr>
+        <p:spPr>
+          <a:xfrm>
             <a:off x="6286500" y="3390900"/>
             <a:ext cx="2190750" cy="838200"/>
           </a:xfrm>
-          <a:prstGeom xmlns:a="http://schemas.openxmlformats.org/drawingml/2006/main" prst="rect">
-            <a:avLst/>
-          </a:prstGeom>
-          <a:noFill xmlns:a="http://schemas.openxmlformats.org/drawingml/2006/main"/>
-          <a:ln xmlns:a="http://schemas.openxmlformats.org/drawingml/2006/main" w="0">
-            <a:noFill/>
-            <a:prstDash val="solid"/>
-          </a:ln>
-        </p:spPr>
-        <p:txBody>
-          <a:bodyPr xmlns:a="http://schemas.openxmlformats.org/drawingml/2006/main" anchor="t">
-            <a:normAutofit fontScale="100000"/>
+          <a:prstGeom prst="rect">
+            <a:avLst/>
+          </a:prstGeom>
+          <a:noFill/>
+          <a:ln w="0">
+            <a:noFill/>
+            <a:prstDash val="solid"/>
+          </a:ln>
+        </p:spPr>
+        <p:txBody>
+          <a:bodyPr anchor="t">
+            <a:normAutofit/>
           </a:bodyPr>
-          <a:lstStyle xmlns:a="http://schemas.openxmlformats.org/drawingml/2006/main"/>
-          <a:p xmlns:a="http://schemas.openxmlformats.org/drawingml/2006/main">
+          <a:lstStyle/>
+          <a:p>
             <a:pPr algn="l">
               <a:defRPr sz="1650" b="0">
                 <a:solidFill>
@@ -3892,71 +3722,71 @@
       </p:sp>
       <p:sp>
         <p:nvSpPr>
-          <p:cNvPr id="12" name="">
-            <a:extLst xmlns:a="http://schemas.openxmlformats.org/drawingml/2006/main">
+          <p:cNvPr id="12" name="Rounded Rectangle 11">
+            <a:extLst>
               <a:ext uri="{FF2B5EF4-FFF2-40B4-BE49-F238E27FC236}">
                 <a16:creationId xmlns:a16="http://schemas.microsoft.com/office/drawing/2014/main" id="{28982595-C2D1-4E76-8E9C-A69BD2364585}"/>
               </a:ext>
             </a:extLst>
           </p:cNvPr>
           <p:cNvSpPr>
-            <a:spLocks xmlns:a="http://schemas.openxmlformats.org/drawingml/2006/main" noGrp="1"/>
-          </p:cNvSpPr>
-          <p:nvPr/>
-        </p:nvSpPr>
-        <p:spPr>
-          <a:xfrm xmlns:a="http://schemas.openxmlformats.org/drawingml/2006/main">
+            <a:spLocks noGrp="1"/>
+          </p:cNvSpPr>
+          <p:nvPr/>
+        </p:nvSpPr>
+        <p:spPr>
+          <a:xfrm>
             <a:off x="9191625" y="2819400"/>
             <a:ext cx="266700" cy="266700"/>
           </a:xfrm>
-          <a:prstGeom xmlns:a="http://schemas.openxmlformats.org/drawingml/2006/main" prst="roundRect">
+          <a:prstGeom prst="roundRect">
             <a:avLst>
               <a:gd name="adj" fmla="val 42857"/>
             </a:avLst>
           </a:prstGeom>
-          <a:solidFill xmlns:a="http://schemas.openxmlformats.org/drawingml/2006/main">
+          <a:solidFill>
             <a:srgbClr val="3D8DFF"/>
           </a:solidFill>
-          <a:ln xmlns:a="http://schemas.openxmlformats.org/drawingml/2006/main" w="0">
-            <a:noFill/>
-            <a:prstDash val="solid"/>
-          </a:ln>
-        </p:spPr>
-      </p:sp>
-      <p:sp>
-        <p:nvSpPr>
-          <p:cNvPr id="13" name="">
-            <a:extLst xmlns:a="http://schemas.openxmlformats.org/drawingml/2006/main">
+          <a:ln w="0">
+            <a:noFill/>
+            <a:prstDash val="solid"/>
+          </a:ln>
+        </p:spPr>
+      </p:sp>
+      <p:sp>
+        <p:nvSpPr>
+          <p:cNvPr id="13" name="Rectangle 12">
+            <a:extLst>
               <a:ext uri="{FF2B5EF4-FFF2-40B4-BE49-F238E27FC236}">
                 <a16:creationId xmlns:a16="http://schemas.microsoft.com/office/drawing/2014/main" id="{F6821895-A643-410C-9547-526DE75EFE15}"/>
               </a:ext>
             </a:extLst>
           </p:cNvPr>
           <p:cNvSpPr>
-            <a:spLocks xmlns:a="http://schemas.openxmlformats.org/drawingml/2006/main" noGrp="1"/>
-          </p:cNvSpPr>
-          <p:nvPr/>
-        </p:nvSpPr>
-        <p:spPr>
-          <a:xfrm xmlns:a="http://schemas.openxmlformats.org/drawingml/2006/main">
+            <a:spLocks noGrp="1"/>
+          </p:cNvSpPr>
+          <p:nvPr/>
+        </p:nvSpPr>
+        <p:spPr>
+          <a:xfrm>
             <a:off x="9001125" y="2095500"/>
             <a:ext cx="2095500" cy="400050"/>
           </a:xfrm>
-          <a:prstGeom xmlns:a="http://schemas.openxmlformats.org/drawingml/2006/main" prst="rect">
-            <a:avLst/>
-          </a:prstGeom>
-          <a:noFill xmlns:a="http://schemas.openxmlformats.org/drawingml/2006/main"/>
-          <a:ln xmlns:a="http://schemas.openxmlformats.org/drawingml/2006/main" w="0">
-            <a:noFill/>
-            <a:prstDash val="solid"/>
-          </a:ln>
-        </p:spPr>
-        <p:txBody>
-          <a:bodyPr xmlns:a="http://schemas.openxmlformats.org/drawingml/2006/main" anchor="t">
-            <a:normAutofit fontScale="100000"/>
+          <a:prstGeom prst="rect">
+            <a:avLst/>
+          </a:prstGeom>
+          <a:noFill/>
+          <a:ln w="0">
+            <a:noFill/>
+            <a:prstDash val="solid"/>
+          </a:ln>
+        </p:spPr>
+        <p:txBody>
+          <a:bodyPr anchor="t">
+            <a:normAutofit/>
           </a:bodyPr>
-          <a:lstStyle xmlns:a="http://schemas.openxmlformats.org/drawingml/2006/main"/>
-          <a:p xmlns:a="http://schemas.openxmlformats.org/drawingml/2006/main">
+          <a:lstStyle/>
+          <a:p>
             <a:pPr algn="l">
               <a:defRPr sz="1350" b="1">
                 <a:solidFill>
@@ -3983,38 +3813,38 @@
       </p:sp>
       <p:sp>
         <p:nvSpPr>
-          <p:cNvPr id="14" name="">
-            <a:extLst xmlns:a="http://schemas.openxmlformats.org/drawingml/2006/main">
+          <p:cNvPr id="14" name="Rectangle 13">
+            <a:extLst>
               <a:ext uri="{FF2B5EF4-FFF2-40B4-BE49-F238E27FC236}">
                 <a16:creationId xmlns:a16="http://schemas.microsoft.com/office/drawing/2014/main" id="{31C1BD59-A683-45E2-B981-8F6A96B6F38D}"/>
               </a:ext>
             </a:extLst>
           </p:cNvPr>
           <p:cNvSpPr>
-            <a:spLocks xmlns:a="http://schemas.openxmlformats.org/drawingml/2006/main" noGrp="1"/>
-          </p:cNvSpPr>
-          <p:nvPr/>
-        </p:nvSpPr>
-        <p:spPr>
-          <a:xfrm xmlns:a="http://schemas.openxmlformats.org/drawingml/2006/main">
+            <a:spLocks noGrp="1"/>
+          </p:cNvSpPr>
+          <p:nvPr/>
+        </p:nvSpPr>
+        <p:spPr>
+          <a:xfrm>
             <a:off x="9001125" y="3390900"/>
             <a:ext cx="2190750" cy="838200"/>
           </a:xfrm>
-          <a:prstGeom xmlns:a="http://schemas.openxmlformats.org/drawingml/2006/main" prst="rect">
-            <a:avLst/>
-          </a:prstGeom>
-          <a:noFill xmlns:a="http://schemas.openxmlformats.org/drawingml/2006/main"/>
-          <a:ln xmlns:a="http://schemas.openxmlformats.org/drawingml/2006/main" w="0">
-            <a:noFill/>
-            <a:prstDash val="solid"/>
-          </a:ln>
-        </p:spPr>
-        <p:txBody>
-          <a:bodyPr xmlns:a="http://schemas.openxmlformats.org/drawingml/2006/main" anchor="t">
-            <a:normAutofit fontScale="100000"/>
+          <a:prstGeom prst="rect">
+            <a:avLst/>
+          </a:prstGeom>
+          <a:noFill/>
+          <a:ln w="0">
+            <a:noFill/>
+            <a:prstDash val="solid"/>
+          </a:ln>
+        </p:spPr>
+        <p:txBody>
+          <a:bodyPr anchor="t">
+            <a:normAutofit/>
           </a:bodyPr>
-          <a:lstStyle xmlns:a="http://schemas.openxmlformats.org/drawingml/2006/main"/>
-          <a:p xmlns:a="http://schemas.openxmlformats.org/drawingml/2006/main">
+          <a:lstStyle/>
+          <a:p>
             <a:pPr algn="l">
               <a:defRPr sz="1650" b="0">
                 <a:solidFill>
@@ -4041,38 +3871,38 @@
       </p:sp>
       <p:sp>
         <p:nvSpPr>
-          <p:cNvPr id="15" name="">
-            <a:extLst xmlns:a="http://schemas.openxmlformats.org/drawingml/2006/main">
+          <p:cNvPr id="15" name="Rectangle 14">
+            <a:extLst>
               <a:ext uri="{FF2B5EF4-FFF2-40B4-BE49-F238E27FC236}">
                 <a16:creationId xmlns:a16="http://schemas.microsoft.com/office/drawing/2014/main" id="{6849F11A-A127-449C-B23D-E535DBD1E13F}"/>
               </a:ext>
             </a:extLst>
           </p:cNvPr>
           <p:cNvSpPr>
-            <a:spLocks xmlns:a="http://schemas.openxmlformats.org/drawingml/2006/main" noGrp="1"/>
-          </p:cNvSpPr>
-          <p:nvPr/>
-        </p:nvSpPr>
-        <p:spPr>
-          <a:xfrm xmlns:a="http://schemas.openxmlformats.org/drawingml/2006/main">
+            <a:spLocks noGrp="1"/>
+          </p:cNvSpPr>
+          <p:nvPr/>
+        </p:nvSpPr>
+        <p:spPr>
+          <a:xfrm>
             <a:off x="419100" y="6419850"/>
             <a:ext cx="3429000" cy="209550"/>
           </a:xfrm>
-          <a:prstGeom xmlns:a="http://schemas.openxmlformats.org/drawingml/2006/main" prst="rect">
-            <a:avLst/>
-          </a:prstGeom>
-          <a:noFill xmlns:a="http://schemas.openxmlformats.org/drawingml/2006/main"/>
-          <a:ln xmlns:a="http://schemas.openxmlformats.org/drawingml/2006/main" w="0">
-            <a:noFill/>
-            <a:prstDash val="solid"/>
-          </a:ln>
-        </p:spPr>
-        <p:txBody>
-          <a:bodyPr xmlns:a="http://schemas.openxmlformats.org/drawingml/2006/main" anchor="t">
+          <a:prstGeom prst="rect">
+            <a:avLst/>
+          </a:prstGeom>
+          <a:noFill/>
+          <a:ln w="0">
+            <a:noFill/>
+            <a:prstDash val="solid"/>
+          </a:ln>
+        </p:spPr>
+        <p:txBody>
+          <a:bodyPr anchor="t">
             <a:normAutofit fontScale="86111"/>
           </a:bodyPr>
-          <a:lstStyle xmlns:a="http://schemas.openxmlformats.org/drawingml/2006/main"/>
-          <a:p xmlns:a="http://schemas.openxmlformats.org/drawingml/2006/main">
+          <a:lstStyle/>
+          <a:p>
             <a:pPr algn="l">
               <a:defRPr sz="900" b="0">
                 <a:solidFill>
@@ -4099,38 +3929,38 @@
       </p:sp>
       <p:sp>
         <p:nvSpPr>
-          <p:cNvPr id="16" name="">
-            <a:extLst xmlns:a="http://schemas.openxmlformats.org/drawingml/2006/main">
+          <p:cNvPr id="16" name="Rectangle 15">
+            <a:extLst>
               <a:ext uri="{FF2B5EF4-FFF2-40B4-BE49-F238E27FC236}">
                 <a16:creationId xmlns:a16="http://schemas.microsoft.com/office/drawing/2014/main" id="{AA0ED96E-9DF3-4B7E-B663-2501FE3F5B99}"/>
               </a:ext>
             </a:extLst>
           </p:cNvPr>
           <p:cNvSpPr>
-            <a:spLocks xmlns:a="http://schemas.openxmlformats.org/drawingml/2006/main" noGrp="1"/>
-          </p:cNvSpPr>
-          <p:nvPr/>
-        </p:nvSpPr>
-        <p:spPr>
-          <a:xfrm xmlns:a="http://schemas.openxmlformats.org/drawingml/2006/main">
+            <a:spLocks noGrp="1"/>
+          </p:cNvSpPr>
+          <p:nvPr/>
+        </p:nvSpPr>
+        <p:spPr>
+          <a:xfrm>
             <a:off x="11239500" y="6419850"/>
             <a:ext cx="523875" cy="209550"/>
           </a:xfrm>
-          <a:prstGeom xmlns:a="http://schemas.openxmlformats.org/drawingml/2006/main" prst="rect">
-            <a:avLst/>
-          </a:prstGeom>
-          <a:noFill xmlns:a="http://schemas.openxmlformats.org/drawingml/2006/main"/>
-          <a:ln xmlns:a="http://schemas.openxmlformats.org/drawingml/2006/main" w="0">
-            <a:noFill/>
-            <a:prstDash val="solid"/>
-          </a:ln>
-        </p:spPr>
-        <p:txBody>
-          <a:bodyPr xmlns:a="http://schemas.openxmlformats.org/drawingml/2006/main" anchor="t">
+          <a:prstGeom prst="rect">
+            <a:avLst/>
+          </a:prstGeom>
+          <a:noFill/>
+          <a:ln w="0">
+            <a:noFill/>
+            <a:prstDash val="solid"/>
+          </a:ln>
+        </p:spPr>
+        <p:txBody>
+          <a:bodyPr anchor="t">
             <a:normAutofit fontScale="86111"/>
           </a:bodyPr>
-          <a:lstStyle xmlns:a="http://schemas.openxmlformats.org/drawingml/2006/main"/>
-          <a:p xmlns:a="http://schemas.openxmlformats.org/drawingml/2006/main">
+          <a:lstStyle/>
+          <a:p>
             <a:pPr algn="r">
               <a:defRPr sz="900" b="0">
                 <a:solidFill>
@@ -4162,17 +3992,21 @@
       </p:ext>
     </p:extLst>
   </p:cSld>
+  <p:clrMapOvr>
+    <a:masterClrMapping/>
+  </p:clrMapOvr>
 </p:sld>
 </file>
 
 <file path=ppt/slides/slide5.xml><?xml version="1.0" encoding="utf-8"?>
-<p:sld xmlns:p="http://schemas.openxmlformats.org/presentationml/2006/main">
+<p:sld xmlns:a="http://schemas.openxmlformats.org/drawingml/2006/main" xmlns:r="http://schemas.openxmlformats.org/officeDocument/2006/relationships" xmlns:p="http://schemas.openxmlformats.org/presentationml/2006/main">
   <p:cSld>
     <p:bg>
       <p:bgPr>
-        <a:solidFill xmlns:a="http://schemas.openxmlformats.org/drawingml/2006/main">
+        <a:solidFill>
           <a:srgbClr val="FFFFFF"/>
         </a:solidFill>
+        <a:effectLst/>
       </p:bgPr>
     </p:bg>
     <p:spTree>
@@ -4182,42 +4016,47 @@
         <p:nvPr/>
       </p:nvGrpSpPr>
       <p:grpSpPr>
-        <a:xfrm xmlns:a="http://schemas.openxmlformats.org/drawingml/2006/main"/>
+        <a:xfrm>
+          <a:off x="0" y="0"/>
+          <a:ext cx="0" cy="0"/>
+          <a:chOff x="0" y="0"/>
+          <a:chExt cx="0" cy="0"/>
+        </a:xfrm>
       </p:grpSpPr>
       <p:sp>
         <p:nvSpPr>
-          <p:cNvPr id="36" name="">
-            <a:extLst xmlns:a="http://schemas.openxmlformats.org/drawingml/2006/main">
+          <p:cNvPr id="36" name="Rectangle 35">
+            <a:extLst>
               <a:ext uri="{FF2B5EF4-FFF2-40B4-BE49-F238E27FC236}">
                 <a16:creationId xmlns:a16="http://schemas.microsoft.com/office/drawing/2014/main" id="{525FDAB1-AF9A-417B-B938-8A52A5D50DC2}"/>
               </a:ext>
             </a:extLst>
           </p:cNvPr>
           <p:cNvSpPr>
-            <a:spLocks xmlns:a="http://schemas.openxmlformats.org/drawingml/2006/main" noGrp="1"/>
-          </p:cNvSpPr>
-          <p:nvPr/>
-        </p:nvSpPr>
-        <p:spPr>
-          <a:xfrm xmlns:a="http://schemas.openxmlformats.org/drawingml/2006/main">
+            <a:spLocks noGrp="1"/>
+          </p:cNvSpPr>
+          <p:nvPr/>
+        </p:nvSpPr>
+        <p:spPr>
+          <a:xfrm>
             <a:off x="419100" y="361950"/>
             <a:ext cx="10477500" cy="723900"/>
           </a:xfrm>
-          <a:prstGeom xmlns:a="http://schemas.openxmlformats.org/drawingml/2006/main" prst="rect">
-            <a:avLst/>
-          </a:prstGeom>
-          <a:noFill xmlns:a="http://schemas.openxmlformats.org/drawingml/2006/main"/>
-          <a:ln xmlns:a="http://schemas.openxmlformats.org/drawingml/2006/main" w="0">
-            <a:noFill/>
-            <a:prstDash val="solid"/>
-          </a:ln>
-        </p:spPr>
-        <p:txBody>
-          <a:bodyPr xmlns:a="http://schemas.openxmlformats.org/drawingml/2006/main" anchor="t">
-            <a:normAutofit fontScale="100000"/>
+          <a:prstGeom prst="rect">
+            <a:avLst/>
+          </a:prstGeom>
+          <a:noFill/>
+          <a:ln w="0">
+            <a:noFill/>
+            <a:prstDash val="solid"/>
+          </a:ln>
+        </p:spPr>
+        <p:txBody>
+          <a:bodyPr anchor="t">
+            <a:normAutofit/>
           </a:bodyPr>
-          <a:lstStyle xmlns:a="http://schemas.openxmlformats.org/drawingml/2006/main"/>
-          <a:p xmlns:a="http://schemas.openxmlformats.org/drawingml/2006/main">
+          <a:lstStyle/>
+          <a:p>
             <a:pPr algn="l">
               <a:defRPr sz="3000" b="1">
                 <a:solidFill>
@@ -4244,30 +4083,30 @@
       </p:sp>
       <p:sp>
         <p:nvSpPr>
-          <p:cNvPr id="2" name="">
-            <a:extLst xmlns:a="http://schemas.openxmlformats.org/drawingml/2006/main">
+          <p:cNvPr id="2" name="Rectangle 1">
+            <a:extLst>
               <a:ext uri="{FF2B5EF4-FFF2-40B4-BE49-F238E27FC236}">
                 <a16:creationId xmlns:a16="http://schemas.microsoft.com/office/drawing/2014/main" id="{B915EE57-506F-4799-ABB5-A1AA33394816}"/>
               </a:ext>
             </a:extLst>
           </p:cNvPr>
           <p:cNvSpPr>
-            <a:spLocks xmlns:a="http://schemas.openxmlformats.org/drawingml/2006/main" noGrp="1"/>
-          </p:cNvSpPr>
-          <p:nvPr/>
-        </p:nvSpPr>
-        <p:spPr>
-          <a:xfrm xmlns:a="http://schemas.openxmlformats.org/drawingml/2006/main">
+            <a:spLocks noGrp="1"/>
+          </p:cNvSpPr>
+          <p:nvPr/>
+        </p:nvSpPr>
+        <p:spPr>
+          <a:xfrm>
             <a:off x="419100" y="1619250"/>
             <a:ext cx="2857500" cy="781050"/>
           </a:xfrm>
-          <a:prstGeom xmlns:a="http://schemas.openxmlformats.org/drawingml/2006/main" prst="rect">
-            <a:avLst/>
-          </a:prstGeom>
-          <a:solidFill xmlns:a="http://schemas.openxmlformats.org/drawingml/2006/main">
+          <a:prstGeom prst="rect">
+            <a:avLst/>
+          </a:prstGeom>
+          <a:solidFill>
             <a:srgbClr val="111827"/>
           </a:solidFill>
-          <a:ln xmlns:a="http://schemas.openxmlformats.org/drawingml/2006/main" w="9525">
+          <a:ln w="9525">
             <a:solidFill>
               <a:srgbClr val="B8BCC4"/>
             </a:solidFill>
@@ -4277,38 +4116,38 @@
       </p:sp>
       <p:sp>
         <p:nvSpPr>
-          <p:cNvPr id="3" name="">
-            <a:extLst xmlns:a="http://schemas.openxmlformats.org/drawingml/2006/main">
+          <p:cNvPr id="3" name="Rectangle 2">
+            <a:extLst>
               <a:ext uri="{FF2B5EF4-FFF2-40B4-BE49-F238E27FC236}">
                 <a16:creationId xmlns:a16="http://schemas.microsoft.com/office/drawing/2014/main" id="{2832279F-188A-4B95-91D7-BBBFE0618221}"/>
               </a:ext>
             </a:extLst>
           </p:cNvPr>
           <p:cNvSpPr>
-            <a:spLocks xmlns:a="http://schemas.openxmlformats.org/drawingml/2006/main" noGrp="1"/>
-          </p:cNvSpPr>
-          <p:nvPr/>
-        </p:nvSpPr>
-        <p:spPr>
-          <a:xfrm xmlns:a="http://schemas.openxmlformats.org/drawingml/2006/main">
+            <a:spLocks noGrp="1"/>
+          </p:cNvSpPr>
+          <p:nvPr/>
+        </p:nvSpPr>
+        <p:spPr>
+          <a:xfrm>
             <a:off x="552450" y="1790700"/>
             <a:ext cx="2590800" cy="552450"/>
           </a:xfrm>
-          <a:prstGeom xmlns:a="http://schemas.openxmlformats.org/drawingml/2006/main" prst="rect">
-            <a:avLst/>
-          </a:prstGeom>
-          <a:noFill xmlns:a="http://schemas.openxmlformats.org/drawingml/2006/main"/>
-          <a:ln xmlns:a="http://schemas.openxmlformats.org/drawingml/2006/main" w="0">
-            <a:noFill/>
-            <a:prstDash val="solid"/>
-          </a:ln>
-        </p:spPr>
-        <p:txBody>
-          <a:bodyPr xmlns:a="http://schemas.openxmlformats.org/drawingml/2006/main" anchor="ctr">
-            <a:normAutofit fontScale="100000"/>
+          <a:prstGeom prst="rect">
+            <a:avLst/>
+          </a:prstGeom>
+          <a:noFill/>
+          <a:ln w="0">
+            <a:noFill/>
+            <a:prstDash val="solid"/>
+          </a:ln>
+        </p:spPr>
+        <p:txBody>
+          <a:bodyPr anchor="ctr">
+            <a:normAutofit/>
           </a:bodyPr>
-          <a:lstStyle xmlns:a="http://schemas.openxmlformats.org/drawingml/2006/main"/>
-          <a:p xmlns:a="http://schemas.openxmlformats.org/drawingml/2006/main">
+          <a:lstStyle/>
+          <a:p>
             <a:pPr algn="l">
               <a:defRPr sz="1350" b="1">
                 <a:solidFill>
@@ -4335,30 +4174,30 @@
       </p:sp>
       <p:sp>
         <p:nvSpPr>
-          <p:cNvPr id="4" name="">
-            <a:extLst xmlns:a="http://schemas.openxmlformats.org/drawingml/2006/main">
+          <p:cNvPr id="4" name="Rectangle 3">
+            <a:extLst>
               <a:ext uri="{FF2B5EF4-FFF2-40B4-BE49-F238E27FC236}">
                 <a16:creationId xmlns:a16="http://schemas.microsoft.com/office/drawing/2014/main" id="{1EBCABB3-B6D3-4B6E-9826-C9105AB9B827}"/>
               </a:ext>
             </a:extLst>
           </p:cNvPr>
           <p:cNvSpPr>
-            <a:spLocks xmlns:a="http://schemas.openxmlformats.org/drawingml/2006/main" noGrp="1"/>
-          </p:cNvSpPr>
-          <p:nvPr/>
-        </p:nvSpPr>
-        <p:spPr>
-          <a:xfrm xmlns:a="http://schemas.openxmlformats.org/drawingml/2006/main">
+            <a:spLocks noGrp="1"/>
+          </p:cNvSpPr>
+          <p:nvPr/>
+        </p:nvSpPr>
+        <p:spPr>
+          <a:xfrm>
             <a:off x="3276600" y="1619250"/>
             <a:ext cx="1619250" cy="781050"/>
           </a:xfrm>
-          <a:prstGeom xmlns:a="http://schemas.openxmlformats.org/drawingml/2006/main" prst="rect">
-            <a:avLst/>
-          </a:prstGeom>
-          <a:solidFill xmlns:a="http://schemas.openxmlformats.org/drawingml/2006/main">
+          <a:prstGeom prst="rect">
+            <a:avLst/>
+          </a:prstGeom>
+          <a:solidFill>
             <a:srgbClr val="111827"/>
           </a:solidFill>
-          <a:ln xmlns:a="http://schemas.openxmlformats.org/drawingml/2006/main" w="9525">
+          <a:ln w="9525">
             <a:solidFill>
               <a:srgbClr val="B8BCC4"/>
             </a:solidFill>
@@ -4368,38 +4207,38 @@
       </p:sp>
       <p:sp>
         <p:nvSpPr>
-          <p:cNvPr id="5" name="">
-            <a:extLst xmlns:a="http://schemas.openxmlformats.org/drawingml/2006/main">
+          <p:cNvPr id="5" name="Rectangle 4">
+            <a:extLst>
               <a:ext uri="{FF2B5EF4-FFF2-40B4-BE49-F238E27FC236}">
                 <a16:creationId xmlns:a16="http://schemas.microsoft.com/office/drawing/2014/main" id="{A14CE517-604B-4C2C-BA9F-F0F1F20E7258}"/>
               </a:ext>
             </a:extLst>
           </p:cNvPr>
           <p:cNvSpPr>
-            <a:spLocks xmlns:a="http://schemas.openxmlformats.org/drawingml/2006/main" noGrp="1"/>
-          </p:cNvSpPr>
-          <p:nvPr/>
-        </p:nvSpPr>
-        <p:spPr>
-          <a:xfrm xmlns:a="http://schemas.openxmlformats.org/drawingml/2006/main">
+            <a:spLocks noGrp="1"/>
+          </p:cNvSpPr>
+          <p:nvPr/>
+        </p:nvSpPr>
+        <p:spPr>
+          <a:xfrm>
             <a:off x="3409950" y="1790700"/>
             <a:ext cx="1352550" cy="552450"/>
           </a:xfrm>
-          <a:prstGeom xmlns:a="http://schemas.openxmlformats.org/drawingml/2006/main" prst="rect">
-            <a:avLst/>
-          </a:prstGeom>
-          <a:noFill xmlns:a="http://schemas.openxmlformats.org/drawingml/2006/main"/>
-          <a:ln xmlns:a="http://schemas.openxmlformats.org/drawingml/2006/main" w="0">
-            <a:noFill/>
-            <a:prstDash val="solid"/>
-          </a:ln>
-        </p:spPr>
-        <p:txBody>
-          <a:bodyPr xmlns:a="http://schemas.openxmlformats.org/drawingml/2006/main" anchor="ctr">
-            <a:normAutofit fontScale="100000"/>
+          <a:prstGeom prst="rect">
+            <a:avLst/>
+          </a:prstGeom>
+          <a:noFill/>
+          <a:ln w="0">
+            <a:noFill/>
+            <a:prstDash val="solid"/>
+          </a:ln>
+        </p:spPr>
+        <p:txBody>
+          <a:bodyPr anchor="ctr">
+            <a:normAutofit/>
           </a:bodyPr>
-          <a:lstStyle xmlns:a="http://schemas.openxmlformats.org/drawingml/2006/main"/>
-          <a:p xmlns:a="http://schemas.openxmlformats.org/drawingml/2006/main">
+          <a:lstStyle/>
+          <a:p>
             <a:pPr algn="l">
               <a:defRPr sz="1350" b="1">
                 <a:solidFill>
@@ -4426,30 +4265,30 @@
       </p:sp>
       <p:sp>
         <p:nvSpPr>
-          <p:cNvPr id="6" name="">
-            <a:extLst xmlns:a="http://schemas.openxmlformats.org/drawingml/2006/main">
+          <p:cNvPr id="6" name="Rectangle 5">
+            <a:extLst>
               <a:ext uri="{FF2B5EF4-FFF2-40B4-BE49-F238E27FC236}">
                 <a16:creationId xmlns:a16="http://schemas.microsoft.com/office/drawing/2014/main" id="{A24A027B-8219-45A2-90CC-5E0DCB18A25F}"/>
               </a:ext>
             </a:extLst>
           </p:cNvPr>
           <p:cNvSpPr>
-            <a:spLocks xmlns:a="http://schemas.openxmlformats.org/drawingml/2006/main" noGrp="1"/>
-          </p:cNvSpPr>
-          <p:nvPr/>
-        </p:nvSpPr>
-        <p:spPr>
-          <a:xfrm xmlns:a="http://schemas.openxmlformats.org/drawingml/2006/main">
+            <a:spLocks noGrp="1"/>
+          </p:cNvSpPr>
+          <p:nvPr/>
+        </p:nvSpPr>
+        <p:spPr>
+          <a:xfrm>
             <a:off x="4895850" y="1619250"/>
             <a:ext cx="2476500" cy="781050"/>
           </a:xfrm>
-          <a:prstGeom xmlns:a="http://schemas.openxmlformats.org/drawingml/2006/main" prst="rect">
-            <a:avLst/>
-          </a:prstGeom>
-          <a:solidFill xmlns:a="http://schemas.openxmlformats.org/drawingml/2006/main">
+          <a:prstGeom prst="rect">
+            <a:avLst/>
+          </a:prstGeom>
+          <a:solidFill>
             <a:srgbClr val="111827"/>
           </a:solidFill>
-          <a:ln xmlns:a="http://schemas.openxmlformats.org/drawingml/2006/main" w="9525">
+          <a:ln w="9525">
             <a:solidFill>
               <a:srgbClr val="B8BCC4"/>
             </a:solidFill>
@@ -4459,38 +4298,38 @@
       </p:sp>
       <p:sp>
         <p:nvSpPr>
-          <p:cNvPr id="7" name="">
-            <a:extLst xmlns:a="http://schemas.openxmlformats.org/drawingml/2006/main">
+          <p:cNvPr id="7" name="Rectangle 6">
+            <a:extLst>
               <a:ext uri="{FF2B5EF4-FFF2-40B4-BE49-F238E27FC236}">
                 <a16:creationId xmlns:a16="http://schemas.microsoft.com/office/drawing/2014/main" id="{7955ADF9-269A-46D0-8A0E-7457B09E499D}"/>
               </a:ext>
             </a:extLst>
           </p:cNvPr>
           <p:cNvSpPr>
-            <a:spLocks xmlns:a="http://schemas.openxmlformats.org/drawingml/2006/main" noGrp="1"/>
-          </p:cNvSpPr>
-          <p:nvPr/>
-        </p:nvSpPr>
-        <p:spPr>
-          <a:xfrm xmlns:a="http://schemas.openxmlformats.org/drawingml/2006/main">
+            <a:spLocks noGrp="1"/>
+          </p:cNvSpPr>
+          <p:nvPr/>
+        </p:nvSpPr>
+        <p:spPr>
+          <a:xfrm>
             <a:off x="5029200" y="1790700"/>
             <a:ext cx="2209800" cy="552450"/>
           </a:xfrm>
-          <a:prstGeom xmlns:a="http://schemas.openxmlformats.org/drawingml/2006/main" prst="rect">
-            <a:avLst/>
-          </a:prstGeom>
-          <a:noFill xmlns:a="http://schemas.openxmlformats.org/drawingml/2006/main"/>
-          <a:ln xmlns:a="http://schemas.openxmlformats.org/drawingml/2006/main" w="0">
-            <a:noFill/>
-            <a:prstDash val="solid"/>
-          </a:ln>
-        </p:spPr>
-        <p:txBody>
-          <a:bodyPr xmlns:a="http://schemas.openxmlformats.org/drawingml/2006/main" anchor="ctr">
-            <a:normAutofit fontScale="100000"/>
+          <a:prstGeom prst="rect">
+            <a:avLst/>
+          </a:prstGeom>
+          <a:noFill/>
+          <a:ln w="0">
+            <a:noFill/>
+            <a:prstDash val="solid"/>
+          </a:ln>
+        </p:spPr>
+        <p:txBody>
+          <a:bodyPr anchor="ctr">
+            <a:normAutofit/>
           </a:bodyPr>
-          <a:lstStyle xmlns:a="http://schemas.openxmlformats.org/drawingml/2006/main"/>
-          <a:p xmlns:a="http://schemas.openxmlformats.org/drawingml/2006/main">
+          <a:lstStyle/>
+          <a:p>
             <a:pPr algn="l">
               <a:defRPr sz="1350" b="1">
                 <a:solidFill>
@@ -4517,30 +4356,30 @@
       </p:sp>
       <p:sp>
         <p:nvSpPr>
-          <p:cNvPr id="8" name="">
-            <a:extLst xmlns:a="http://schemas.openxmlformats.org/drawingml/2006/main">
+          <p:cNvPr id="8" name="Rectangle 7">
+            <a:extLst>
               <a:ext uri="{FF2B5EF4-FFF2-40B4-BE49-F238E27FC236}">
                 <a16:creationId xmlns:a16="http://schemas.microsoft.com/office/drawing/2014/main" id="{B3209142-08D2-418B-83E1-72CE8C5DA6C2}"/>
               </a:ext>
             </a:extLst>
           </p:cNvPr>
           <p:cNvSpPr>
-            <a:spLocks xmlns:a="http://schemas.openxmlformats.org/drawingml/2006/main" noGrp="1"/>
-          </p:cNvSpPr>
-          <p:nvPr/>
-        </p:nvSpPr>
-        <p:spPr>
-          <a:xfrm xmlns:a="http://schemas.openxmlformats.org/drawingml/2006/main">
+            <a:spLocks noGrp="1"/>
+          </p:cNvSpPr>
+          <p:nvPr/>
+        </p:nvSpPr>
+        <p:spPr>
+          <a:xfrm>
             <a:off x="7372350" y="1619250"/>
             <a:ext cx="3981450" cy="781050"/>
           </a:xfrm>
-          <a:prstGeom xmlns:a="http://schemas.openxmlformats.org/drawingml/2006/main" prst="rect">
-            <a:avLst/>
-          </a:prstGeom>
-          <a:solidFill xmlns:a="http://schemas.openxmlformats.org/drawingml/2006/main">
+          <a:prstGeom prst="rect">
+            <a:avLst/>
+          </a:prstGeom>
+          <a:solidFill>
             <a:srgbClr val="111827"/>
           </a:solidFill>
-          <a:ln xmlns:a="http://schemas.openxmlformats.org/drawingml/2006/main" w="9525">
+          <a:ln w="9525">
             <a:solidFill>
               <a:srgbClr val="B8BCC4"/>
             </a:solidFill>
@@ -4550,38 +4389,38 @@
       </p:sp>
       <p:sp>
         <p:nvSpPr>
-          <p:cNvPr id="9" name="">
-            <a:extLst xmlns:a="http://schemas.openxmlformats.org/drawingml/2006/main">
+          <p:cNvPr id="9" name="Rectangle 8">
+            <a:extLst>
               <a:ext uri="{FF2B5EF4-FFF2-40B4-BE49-F238E27FC236}">
                 <a16:creationId xmlns:a16="http://schemas.microsoft.com/office/drawing/2014/main" id="{15756D7B-C53B-4DA4-B203-35D64C2746D8}"/>
               </a:ext>
             </a:extLst>
           </p:cNvPr>
           <p:cNvSpPr>
-            <a:spLocks xmlns:a="http://schemas.openxmlformats.org/drawingml/2006/main" noGrp="1"/>
-          </p:cNvSpPr>
-          <p:nvPr/>
-        </p:nvSpPr>
-        <p:spPr>
-          <a:xfrm xmlns:a="http://schemas.openxmlformats.org/drawingml/2006/main">
+            <a:spLocks noGrp="1"/>
+          </p:cNvSpPr>
+          <p:nvPr/>
+        </p:nvSpPr>
+        <p:spPr>
+          <a:xfrm>
             <a:off x="7505700" y="1790700"/>
             <a:ext cx="3714750" cy="552450"/>
           </a:xfrm>
-          <a:prstGeom xmlns:a="http://schemas.openxmlformats.org/drawingml/2006/main" prst="rect">
-            <a:avLst/>
-          </a:prstGeom>
-          <a:noFill xmlns:a="http://schemas.openxmlformats.org/drawingml/2006/main"/>
-          <a:ln xmlns:a="http://schemas.openxmlformats.org/drawingml/2006/main" w="0">
-            <a:noFill/>
-            <a:prstDash val="solid"/>
-          </a:ln>
-        </p:spPr>
-        <p:txBody>
-          <a:bodyPr xmlns:a="http://schemas.openxmlformats.org/drawingml/2006/main" anchor="ctr">
-            <a:normAutofit fontScale="100000"/>
+          <a:prstGeom prst="rect">
+            <a:avLst/>
+          </a:prstGeom>
+          <a:noFill/>
+          <a:ln w="0">
+            <a:noFill/>
+            <a:prstDash val="solid"/>
+          </a:ln>
+        </p:spPr>
+        <p:txBody>
+          <a:bodyPr anchor="ctr">
+            <a:normAutofit/>
           </a:bodyPr>
-          <a:lstStyle xmlns:a="http://schemas.openxmlformats.org/drawingml/2006/main"/>
-          <a:p xmlns:a="http://schemas.openxmlformats.org/drawingml/2006/main">
+          <a:lstStyle/>
+          <a:p>
             <a:pPr algn="l">
               <a:defRPr sz="1350" b="1">
                 <a:solidFill>
@@ -4608,30 +4447,30 @@
       </p:sp>
       <p:sp>
         <p:nvSpPr>
-          <p:cNvPr id="10" name="">
-            <a:extLst xmlns:a="http://schemas.openxmlformats.org/drawingml/2006/main">
+          <p:cNvPr id="10" name="Rectangle 9">
+            <a:extLst>
               <a:ext uri="{FF2B5EF4-FFF2-40B4-BE49-F238E27FC236}">
                 <a16:creationId xmlns:a16="http://schemas.microsoft.com/office/drawing/2014/main" id="{EBE40A1C-53E6-49AF-A020-D518E1C94FCA}"/>
               </a:ext>
             </a:extLst>
           </p:cNvPr>
           <p:cNvSpPr>
-            <a:spLocks xmlns:a="http://schemas.openxmlformats.org/drawingml/2006/main" noGrp="1"/>
-          </p:cNvSpPr>
-          <p:nvPr/>
-        </p:nvSpPr>
-        <p:spPr>
-          <a:xfrm xmlns:a="http://schemas.openxmlformats.org/drawingml/2006/main">
+            <a:spLocks noGrp="1"/>
+          </p:cNvSpPr>
+          <p:nvPr/>
+        </p:nvSpPr>
+        <p:spPr>
+          <a:xfrm>
             <a:off x="419100" y="2400300"/>
             <a:ext cx="2857500" cy="781050"/>
           </a:xfrm>
-          <a:prstGeom xmlns:a="http://schemas.openxmlformats.org/drawingml/2006/main" prst="rect">
-            <a:avLst/>
-          </a:prstGeom>
-          <a:solidFill xmlns:a="http://schemas.openxmlformats.org/drawingml/2006/main">
+          <a:prstGeom prst="rect">
+            <a:avLst/>
+          </a:prstGeom>
+          <a:solidFill>
             <a:srgbClr val="FFFFFF"/>
           </a:solidFill>
-          <a:ln xmlns:a="http://schemas.openxmlformats.org/drawingml/2006/main" w="9525">
+          <a:ln w="9525">
             <a:solidFill>
               <a:srgbClr val="B8BCC4"/>
             </a:solidFill>
@@ -4641,38 +4480,38 @@
       </p:sp>
       <p:sp>
         <p:nvSpPr>
-          <p:cNvPr id="11" name="">
-            <a:extLst xmlns:a="http://schemas.openxmlformats.org/drawingml/2006/main">
+          <p:cNvPr id="11" name="Rectangle 10">
+            <a:extLst>
               <a:ext uri="{FF2B5EF4-FFF2-40B4-BE49-F238E27FC236}">
                 <a16:creationId xmlns:a16="http://schemas.microsoft.com/office/drawing/2014/main" id="{37288C1F-BFD9-4358-9B50-2852B0101FC8}"/>
               </a:ext>
             </a:extLst>
           </p:cNvPr>
           <p:cNvSpPr>
-            <a:spLocks xmlns:a="http://schemas.openxmlformats.org/drawingml/2006/main" noGrp="1"/>
-          </p:cNvSpPr>
-          <p:nvPr/>
-        </p:nvSpPr>
-        <p:spPr>
-          <a:xfrm xmlns:a="http://schemas.openxmlformats.org/drawingml/2006/main">
+            <a:spLocks noGrp="1"/>
+          </p:cNvSpPr>
+          <p:nvPr/>
+        </p:nvSpPr>
+        <p:spPr>
+          <a:xfrm>
             <a:off x="552450" y="2571750"/>
             <a:ext cx="2590800" cy="552450"/>
           </a:xfrm>
-          <a:prstGeom xmlns:a="http://schemas.openxmlformats.org/drawingml/2006/main" prst="rect">
-            <a:avLst/>
-          </a:prstGeom>
-          <a:noFill xmlns:a="http://schemas.openxmlformats.org/drawingml/2006/main"/>
-          <a:ln xmlns:a="http://schemas.openxmlformats.org/drawingml/2006/main" w="0">
-            <a:noFill/>
-            <a:prstDash val="solid"/>
-          </a:ln>
-        </p:spPr>
-        <p:txBody>
-          <a:bodyPr xmlns:a="http://schemas.openxmlformats.org/drawingml/2006/main" anchor="ctr">
-            <a:normAutofit fontScale="100000"/>
+          <a:prstGeom prst="rect">
+            <a:avLst/>
+          </a:prstGeom>
+          <a:noFill/>
+          <a:ln w="0">
+            <a:noFill/>
+            <a:prstDash val="solid"/>
+          </a:ln>
+        </p:spPr>
+        <p:txBody>
+          <a:bodyPr anchor="ctr">
+            <a:normAutofit/>
           </a:bodyPr>
-          <a:lstStyle xmlns:a="http://schemas.openxmlformats.org/drawingml/2006/main"/>
-          <a:p xmlns:a="http://schemas.openxmlformats.org/drawingml/2006/main">
+          <a:lstStyle/>
+          <a:p>
             <a:pPr algn="l">
               <a:defRPr sz="1275" b="0">
                 <a:solidFill>
@@ -4699,30 +4538,30 @@
       </p:sp>
       <p:sp>
         <p:nvSpPr>
-          <p:cNvPr id="12" name="">
-            <a:extLst xmlns:a="http://schemas.openxmlformats.org/drawingml/2006/main">
+          <p:cNvPr id="12" name="Rectangle 11">
+            <a:extLst>
               <a:ext uri="{FF2B5EF4-FFF2-40B4-BE49-F238E27FC236}">
                 <a16:creationId xmlns:a16="http://schemas.microsoft.com/office/drawing/2014/main" id="{7851A417-0951-4DF5-B3AA-8D5B9D2E08E1}"/>
               </a:ext>
             </a:extLst>
           </p:cNvPr>
           <p:cNvSpPr>
-            <a:spLocks xmlns:a="http://schemas.openxmlformats.org/drawingml/2006/main" noGrp="1"/>
-          </p:cNvSpPr>
-          <p:nvPr/>
-        </p:nvSpPr>
-        <p:spPr>
-          <a:xfrm xmlns:a="http://schemas.openxmlformats.org/drawingml/2006/main">
+            <a:spLocks noGrp="1"/>
+          </p:cNvSpPr>
+          <p:nvPr/>
+        </p:nvSpPr>
+        <p:spPr>
+          <a:xfrm>
             <a:off x="3276600" y="2400300"/>
             <a:ext cx="1619250" cy="781050"/>
           </a:xfrm>
-          <a:prstGeom xmlns:a="http://schemas.openxmlformats.org/drawingml/2006/main" prst="rect">
-            <a:avLst/>
-          </a:prstGeom>
-          <a:solidFill xmlns:a="http://schemas.openxmlformats.org/drawingml/2006/main">
+          <a:prstGeom prst="rect">
+            <a:avLst/>
+          </a:prstGeom>
+          <a:solidFill>
             <a:srgbClr val="FFFFFF"/>
           </a:solidFill>
-          <a:ln xmlns:a="http://schemas.openxmlformats.org/drawingml/2006/main" w="9525">
+          <a:ln w="9525">
             <a:solidFill>
               <a:srgbClr val="B8BCC4"/>
             </a:solidFill>
@@ -4732,38 +4571,38 @@
       </p:sp>
       <p:sp>
         <p:nvSpPr>
-          <p:cNvPr id="13" name="">
-            <a:extLst xmlns:a="http://schemas.openxmlformats.org/drawingml/2006/main">
+          <p:cNvPr id="13" name="Rectangle 12">
+            <a:extLst>
               <a:ext uri="{FF2B5EF4-FFF2-40B4-BE49-F238E27FC236}">
                 <a16:creationId xmlns:a16="http://schemas.microsoft.com/office/drawing/2014/main" id="{80837EA4-7EC4-4FFE-B205-38B27E139824}"/>
               </a:ext>
             </a:extLst>
           </p:cNvPr>
           <p:cNvSpPr>
-            <a:spLocks xmlns:a="http://schemas.openxmlformats.org/drawingml/2006/main" noGrp="1"/>
-          </p:cNvSpPr>
-          <p:nvPr/>
-        </p:nvSpPr>
-        <p:spPr>
-          <a:xfrm xmlns:a="http://schemas.openxmlformats.org/drawingml/2006/main">
+            <a:spLocks noGrp="1"/>
+          </p:cNvSpPr>
+          <p:nvPr/>
+        </p:nvSpPr>
+        <p:spPr>
+          <a:xfrm>
             <a:off x="3409950" y="2571750"/>
             <a:ext cx="1352550" cy="552450"/>
           </a:xfrm>
-          <a:prstGeom xmlns:a="http://schemas.openxmlformats.org/drawingml/2006/main" prst="rect">
-            <a:avLst/>
-          </a:prstGeom>
-          <a:noFill xmlns:a="http://schemas.openxmlformats.org/drawingml/2006/main"/>
-          <a:ln xmlns:a="http://schemas.openxmlformats.org/drawingml/2006/main" w="0">
-            <a:noFill/>
-            <a:prstDash val="solid"/>
-          </a:ln>
-        </p:spPr>
-        <p:txBody>
-          <a:bodyPr xmlns:a="http://schemas.openxmlformats.org/drawingml/2006/main" anchor="ctr">
-            <a:normAutofit fontScale="100000"/>
+          <a:prstGeom prst="rect">
+            <a:avLst/>
+          </a:prstGeom>
+          <a:noFill/>
+          <a:ln w="0">
+            <a:noFill/>
+            <a:prstDash val="solid"/>
+          </a:ln>
+        </p:spPr>
+        <p:txBody>
+          <a:bodyPr anchor="ctr">
+            <a:normAutofit/>
           </a:bodyPr>
-          <a:lstStyle xmlns:a="http://schemas.openxmlformats.org/drawingml/2006/main"/>
-          <a:p xmlns:a="http://schemas.openxmlformats.org/drawingml/2006/main">
+          <a:lstStyle/>
+          <a:p>
             <a:pPr algn="l">
               <a:defRPr sz="1275" b="0">
                 <a:solidFill>
@@ -4790,30 +4629,30 @@
       </p:sp>
       <p:sp>
         <p:nvSpPr>
-          <p:cNvPr id="14" name="">
-            <a:extLst xmlns:a="http://schemas.openxmlformats.org/drawingml/2006/main">
+          <p:cNvPr id="14" name="Rectangle 13">
+            <a:extLst>
               <a:ext uri="{FF2B5EF4-FFF2-40B4-BE49-F238E27FC236}">
                 <a16:creationId xmlns:a16="http://schemas.microsoft.com/office/drawing/2014/main" id="{243A5C5F-A4E8-4EB8-8867-FA7AC34ED475}"/>
               </a:ext>
             </a:extLst>
           </p:cNvPr>
           <p:cNvSpPr>
-            <a:spLocks xmlns:a="http://schemas.openxmlformats.org/drawingml/2006/main" noGrp="1"/>
-          </p:cNvSpPr>
-          <p:nvPr/>
-        </p:nvSpPr>
-        <p:spPr>
-          <a:xfrm xmlns:a="http://schemas.openxmlformats.org/drawingml/2006/main">
+            <a:spLocks noGrp="1"/>
+          </p:cNvSpPr>
+          <p:nvPr/>
+        </p:nvSpPr>
+        <p:spPr>
+          <a:xfrm>
             <a:off x="4895850" y="2400300"/>
             <a:ext cx="2476500" cy="781050"/>
           </a:xfrm>
-          <a:prstGeom xmlns:a="http://schemas.openxmlformats.org/drawingml/2006/main" prst="rect">
-            <a:avLst/>
-          </a:prstGeom>
-          <a:solidFill xmlns:a="http://schemas.openxmlformats.org/drawingml/2006/main">
+          <a:prstGeom prst="rect">
+            <a:avLst/>
+          </a:prstGeom>
+          <a:solidFill>
             <a:srgbClr val="FFFFFF"/>
           </a:solidFill>
-          <a:ln xmlns:a="http://schemas.openxmlformats.org/drawingml/2006/main" w="9525">
+          <a:ln w="9525">
             <a:solidFill>
               <a:srgbClr val="B8BCC4"/>
             </a:solidFill>
@@ -4823,38 +4662,38 @@
       </p:sp>
       <p:sp>
         <p:nvSpPr>
-          <p:cNvPr id="15" name="">
-            <a:extLst xmlns:a="http://schemas.openxmlformats.org/drawingml/2006/main">
+          <p:cNvPr id="15" name="Rectangle 14">
+            <a:extLst>
               <a:ext uri="{FF2B5EF4-FFF2-40B4-BE49-F238E27FC236}">
                 <a16:creationId xmlns:a16="http://schemas.microsoft.com/office/drawing/2014/main" id="{B7250922-32B2-4969-9C74-34A2122B782B}"/>
               </a:ext>
             </a:extLst>
           </p:cNvPr>
           <p:cNvSpPr>
-            <a:spLocks xmlns:a="http://schemas.openxmlformats.org/drawingml/2006/main" noGrp="1"/>
-          </p:cNvSpPr>
-          <p:nvPr/>
-        </p:nvSpPr>
-        <p:spPr>
-          <a:xfrm xmlns:a="http://schemas.openxmlformats.org/drawingml/2006/main">
+            <a:spLocks noGrp="1"/>
+          </p:cNvSpPr>
+          <p:nvPr/>
+        </p:nvSpPr>
+        <p:spPr>
+          <a:xfrm>
             <a:off x="5029200" y="2571750"/>
             <a:ext cx="2209800" cy="552450"/>
           </a:xfrm>
-          <a:prstGeom xmlns:a="http://schemas.openxmlformats.org/drawingml/2006/main" prst="rect">
-            <a:avLst/>
-          </a:prstGeom>
-          <a:noFill xmlns:a="http://schemas.openxmlformats.org/drawingml/2006/main"/>
-          <a:ln xmlns:a="http://schemas.openxmlformats.org/drawingml/2006/main" w="0">
-            <a:noFill/>
-            <a:prstDash val="solid"/>
-          </a:ln>
-        </p:spPr>
-        <p:txBody>
-          <a:bodyPr xmlns:a="http://schemas.openxmlformats.org/drawingml/2006/main" anchor="ctr">
-            <a:normAutofit fontScale="100000"/>
+          <a:prstGeom prst="rect">
+            <a:avLst/>
+          </a:prstGeom>
+          <a:noFill/>
+          <a:ln w="0">
+            <a:noFill/>
+            <a:prstDash val="solid"/>
+          </a:ln>
+        </p:spPr>
+        <p:txBody>
+          <a:bodyPr anchor="ctr">
+            <a:normAutofit/>
           </a:bodyPr>
-          <a:lstStyle xmlns:a="http://schemas.openxmlformats.org/drawingml/2006/main"/>
-          <a:p xmlns:a="http://schemas.openxmlformats.org/drawingml/2006/main">
+          <a:lstStyle/>
+          <a:p>
             <a:pPr algn="l">
               <a:defRPr sz="1275" b="0">
                 <a:solidFill>
@@ -4881,30 +4720,30 @@
       </p:sp>
       <p:sp>
         <p:nvSpPr>
-          <p:cNvPr id="16" name="">
-            <a:extLst xmlns:a="http://schemas.openxmlformats.org/drawingml/2006/main">
+          <p:cNvPr id="16" name="Rectangle 15">
+            <a:extLst>
               <a:ext uri="{FF2B5EF4-FFF2-40B4-BE49-F238E27FC236}">
                 <a16:creationId xmlns:a16="http://schemas.microsoft.com/office/drawing/2014/main" id="{7C46D8C0-C7B2-4F45-8B1F-78640ACC5ED4}"/>
               </a:ext>
             </a:extLst>
           </p:cNvPr>
           <p:cNvSpPr>
-            <a:spLocks xmlns:a="http://schemas.openxmlformats.org/drawingml/2006/main" noGrp="1"/>
-          </p:cNvSpPr>
-          <p:nvPr/>
-        </p:nvSpPr>
-        <p:spPr>
-          <a:xfrm xmlns:a="http://schemas.openxmlformats.org/drawingml/2006/main">
+            <a:spLocks noGrp="1"/>
+          </p:cNvSpPr>
+          <p:nvPr/>
+        </p:nvSpPr>
+        <p:spPr>
+          <a:xfrm>
             <a:off x="7372350" y="2400300"/>
             <a:ext cx="3981450" cy="781050"/>
           </a:xfrm>
-          <a:prstGeom xmlns:a="http://schemas.openxmlformats.org/drawingml/2006/main" prst="rect">
-            <a:avLst/>
-          </a:prstGeom>
-          <a:solidFill xmlns:a="http://schemas.openxmlformats.org/drawingml/2006/main">
+          <a:prstGeom prst="rect">
+            <a:avLst/>
+          </a:prstGeom>
+          <a:solidFill>
             <a:srgbClr val="FFFFFF"/>
           </a:solidFill>
-          <a:ln xmlns:a="http://schemas.openxmlformats.org/drawingml/2006/main" w="9525">
+          <a:ln w="9525">
             <a:solidFill>
               <a:srgbClr val="B8BCC4"/>
             </a:solidFill>
@@ -4914,38 +4753,38 @@
       </p:sp>
       <p:sp>
         <p:nvSpPr>
-          <p:cNvPr id="17" name="">
-            <a:extLst xmlns:a="http://schemas.openxmlformats.org/drawingml/2006/main">
+          <p:cNvPr id="17" name="Rectangle 16">
+            <a:extLst>
               <a:ext uri="{FF2B5EF4-FFF2-40B4-BE49-F238E27FC236}">
                 <a16:creationId xmlns:a16="http://schemas.microsoft.com/office/drawing/2014/main" id="{3DCDD11E-159E-413C-944A-CFD1029E0C52}"/>
               </a:ext>
             </a:extLst>
           </p:cNvPr>
           <p:cNvSpPr>
-            <a:spLocks xmlns:a="http://schemas.openxmlformats.org/drawingml/2006/main" noGrp="1"/>
-          </p:cNvSpPr>
-          <p:nvPr/>
-        </p:nvSpPr>
-        <p:spPr>
-          <a:xfrm xmlns:a="http://schemas.openxmlformats.org/drawingml/2006/main">
+            <a:spLocks noGrp="1"/>
+          </p:cNvSpPr>
+          <p:nvPr/>
+        </p:nvSpPr>
+        <p:spPr>
+          <a:xfrm>
             <a:off x="7505700" y="2571750"/>
             <a:ext cx="3714750" cy="552450"/>
           </a:xfrm>
-          <a:prstGeom xmlns:a="http://schemas.openxmlformats.org/drawingml/2006/main" prst="rect">
-            <a:avLst/>
-          </a:prstGeom>
-          <a:noFill xmlns:a="http://schemas.openxmlformats.org/drawingml/2006/main"/>
-          <a:ln xmlns:a="http://schemas.openxmlformats.org/drawingml/2006/main" w="0">
-            <a:noFill/>
-            <a:prstDash val="solid"/>
-          </a:ln>
-        </p:spPr>
-        <p:txBody>
-          <a:bodyPr xmlns:a="http://schemas.openxmlformats.org/drawingml/2006/main" anchor="ctr">
-            <a:normAutofit fontScale="100000"/>
+          <a:prstGeom prst="rect">
+            <a:avLst/>
+          </a:prstGeom>
+          <a:noFill/>
+          <a:ln w="0">
+            <a:noFill/>
+            <a:prstDash val="solid"/>
+          </a:ln>
+        </p:spPr>
+        <p:txBody>
+          <a:bodyPr anchor="ctr">
+            <a:normAutofit/>
           </a:bodyPr>
-          <a:lstStyle xmlns:a="http://schemas.openxmlformats.org/drawingml/2006/main"/>
-          <a:p xmlns:a="http://schemas.openxmlformats.org/drawingml/2006/main">
+          <a:lstStyle/>
+          <a:p>
             <a:pPr algn="l">
               <a:defRPr sz="1275" b="0">
                 <a:solidFill>
@@ -4972,30 +4811,30 @@
       </p:sp>
       <p:sp>
         <p:nvSpPr>
-          <p:cNvPr id="18" name="">
-            <a:extLst xmlns:a="http://schemas.openxmlformats.org/drawingml/2006/main">
+          <p:cNvPr id="18" name="Rectangle 17">
+            <a:extLst>
               <a:ext uri="{FF2B5EF4-FFF2-40B4-BE49-F238E27FC236}">
                 <a16:creationId xmlns:a16="http://schemas.microsoft.com/office/drawing/2014/main" id="{DDB195F1-DCFE-45EE-861A-C57D872671D7}"/>
               </a:ext>
             </a:extLst>
           </p:cNvPr>
           <p:cNvSpPr>
-            <a:spLocks xmlns:a="http://schemas.openxmlformats.org/drawingml/2006/main" noGrp="1"/>
-          </p:cNvSpPr>
-          <p:nvPr/>
-        </p:nvSpPr>
-        <p:spPr>
-          <a:xfrm xmlns:a="http://schemas.openxmlformats.org/drawingml/2006/main">
+            <a:spLocks noGrp="1"/>
+          </p:cNvSpPr>
+          <p:nvPr/>
+        </p:nvSpPr>
+        <p:spPr>
+          <a:xfrm>
             <a:off x="419100" y="3181350"/>
             <a:ext cx="2857500" cy="781050"/>
           </a:xfrm>
-          <a:prstGeom xmlns:a="http://schemas.openxmlformats.org/drawingml/2006/main" prst="rect">
-            <a:avLst/>
-          </a:prstGeom>
-          <a:solidFill xmlns:a="http://schemas.openxmlformats.org/drawingml/2006/main">
+          <a:prstGeom prst="rect">
+            <a:avLst/>
+          </a:prstGeom>
+          <a:solidFill>
             <a:srgbClr val="FFFFFF"/>
           </a:solidFill>
-          <a:ln xmlns:a="http://schemas.openxmlformats.org/drawingml/2006/main" w="9525">
+          <a:ln w="9525">
             <a:solidFill>
               <a:srgbClr val="B8BCC4"/>
             </a:solidFill>
@@ -5005,38 +4844,38 @@
       </p:sp>
       <p:sp>
         <p:nvSpPr>
-          <p:cNvPr id="19" name="">
-            <a:extLst xmlns:a="http://schemas.openxmlformats.org/drawingml/2006/main">
+          <p:cNvPr id="19" name="Rectangle 18">
+            <a:extLst>
               <a:ext uri="{FF2B5EF4-FFF2-40B4-BE49-F238E27FC236}">
                 <a16:creationId xmlns:a16="http://schemas.microsoft.com/office/drawing/2014/main" id="{275DDD57-2BB0-4537-A37D-1C088070539B}"/>
               </a:ext>
             </a:extLst>
           </p:cNvPr>
           <p:cNvSpPr>
-            <a:spLocks xmlns:a="http://schemas.openxmlformats.org/drawingml/2006/main" noGrp="1"/>
-          </p:cNvSpPr>
-          <p:nvPr/>
-        </p:nvSpPr>
-        <p:spPr>
-          <a:xfrm xmlns:a="http://schemas.openxmlformats.org/drawingml/2006/main">
+            <a:spLocks noGrp="1"/>
+          </p:cNvSpPr>
+          <p:nvPr/>
+        </p:nvSpPr>
+        <p:spPr>
+          <a:xfrm>
             <a:off x="552450" y="3352800"/>
             <a:ext cx="2590800" cy="552450"/>
           </a:xfrm>
-          <a:prstGeom xmlns:a="http://schemas.openxmlformats.org/drawingml/2006/main" prst="rect">
-            <a:avLst/>
-          </a:prstGeom>
-          <a:noFill xmlns:a="http://schemas.openxmlformats.org/drawingml/2006/main"/>
-          <a:ln xmlns:a="http://schemas.openxmlformats.org/drawingml/2006/main" w="0">
-            <a:noFill/>
-            <a:prstDash val="solid"/>
-          </a:ln>
-        </p:spPr>
-        <p:txBody>
-          <a:bodyPr xmlns:a="http://schemas.openxmlformats.org/drawingml/2006/main" anchor="ctr">
-            <a:normAutofit fontScale="100000"/>
+          <a:prstGeom prst="rect">
+            <a:avLst/>
+          </a:prstGeom>
+          <a:noFill/>
+          <a:ln w="0">
+            <a:noFill/>
+            <a:prstDash val="solid"/>
+          </a:ln>
+        </p:spPr>
+        <p:txBody>
+          <a:bodyPr anchor="ctr">
+            <a:normAutofit/>
           </a:bodyPr>
-          <a:lstStyle xmlns:a="http://schemas.openxmlformats.org/drawingml/2006/main"/>
-          <a:p xmlns:a="http://schemas.openxmlformats.org/drawingml/2006/main">
+          <a:lstStyle/>
+          <a:p>
             <a:pPr algn="l">
               <a:defRPr sz="1275" b="0">
                 <a:solidFill>
@@ -5063,30 +4902,30 @@
       </p:sp>
       <p:sp>
         <p:nvSpPr>
-          <p:cNvPr id="20" name="">
-            <a:extLst xmlns:a="http://schemas.openxmlformats.org/drawingml/2006/main">
+          <p:cNvPr id="20" name="Rectangle 19">
+            <a:extLst>
               <a:ext uri="{FF2B5EF4-FFF2-40B4-BE49-F238E27FC236}">
                 <a16:creationId xmlns:a16="http://schemas.microsoft.com/office/drawing/2014/main" id="{0B368F9C-7586-4190-B11B-3D0C5C281D54}"/>
               </a:ext>
             </a:extLst>
           </p:cNvPr>
           <p:cNvSpPr>
-            <a:spLocks xmlns:a="http://schemas.openxmlformats.org/drawingml/2006/main" noGrp="1"/>
-          </p:cNvSpPr>
-          <p:nvPr/>
-        </p:nvSpPr>
-        <p:spPr>
-          <a:xfrm xmlns:a="http://schemas.openxmlformats.org/drawingml/2006/main">
+            <a:spLocks noGrp="1"/>
+          </p:cNvSpPr>
+          <p:nvPr/>
+        </p:nvSpPr>
+        <p:spPr>
+          <a:xfrm>
             <a:off x="3276600" y="3181350"/>
             <a:ext cx="1619250" cy="781050"/>
           </a:xfrm>
-          <a:prstGeom xmlns:a="http://schemas.openxmlformats.org/drawingml/2006/main" prst="rect">
-            <a:avLst/>
-          </a:prstGeom>
-          <a:solidFill xmlns:a="http://schemas.openxmlformats.org/drawingml/2006/main">
+          <a:prstGeom prst="rect">
+            <a:avLst/>
+          </a:prstGeom>
+          <a:solidFill>
             <a:srgbClr val="FDE2E2"/>
           </a:solidFill>
-          <a:ln xmlns:a="http://schemas.openxmlformats.org/drawingml/2006/main" w="9525">
+          <a:ln w="9525">
             <a:solidFill>
               <a:srgbClr val="B8BCC4"/>
             </a:solidFill>
@@ -5096,38 +4935,38 @@
       </p:sp>
       <p:sp>
         <p:nvSpPr>
-          <p:cNvPr id="21" name="">
-            <a:extLst xmlns:a="http://schemas.openxmlformats.org/drawingml/2006/main">
+          <p:cNvPr id="21" name="Rectangle 20">
+            <a:extLst>
               <a:ext uri="{FF2B5EF4-FFF2-40B4-BE49-F238E27FC236}">
                 <a16:creationId xmlns:a16="http://schemas.microsoft.com/office/drawing/2014/main" id="{D1F4AC69-82AB-49EC-876F-90A3FE086912}"/>
               </a:ext>
             </a:extLst>
           </p:cNvPr>
           <p:cNvSpPr>
-            <a:spLocks xmlns:a="http://schemas.openxmlformats.org/drawingml/2006/main" noGrp="1"/>
-          </p:cNvSpPr>
-          <p:nvPr/>
-        </p:nvSpPr>
-        <p:spPr>
-          <a:xfrm xmlns:a="http://schemas.openxmlformats.org/drawingml/2006/main">
+            <a:spLocks noGrp="1"/>
+          </p:cNvSpPr>
+          <p:nvPr/>
+        </p:nvSpPr>
+        <p:spPr>
+          <a:xfrm>
             <a:off x="3409950" y="3352800"/>
             <a:ext cx="1352550" cy="552450"/>
           </a:xfrm>
-          <a:prstGeom xmlns:a="http://schemas.openxmlformats.org/drawingml/2006/main" prst="rect">
-            <a:avLst/>
-          </a:prstGeom>
-          <a:noFill xmlns:a="http://schemas.openxmlformats.org/drawingml/2006/main"/>
-          <a:ln xmlns:a="http://schemas.openxmlformats.org/drawingml/2006/main" w="0">
-            <a:noFill/>
-            <a:prstDash val="solid"/>
-          </a:ln>
-        </p:spPr>
-        <p:txBody>
-          <a:bodyPr xmlns:a="http://schemas.openxmlformats.org/drawingml/2006/main" anchor="ctr">
-            <a:normAutofit fontScale="100000"/>
+          <a:prstGeom prst="rect">
+            <a:avLst/>
+          </a:prstGeom>
+          <a:noFill/>
+          <a:ln w="0">
+            <a:noFill/>
+            <a:prstDash val="solid"/>
+          </a:ln>
+        </p:spPr>
+        <p:txBody>
+          <a:bodyPr anchor="ctr">
+            <a:normAutofit/>
           </a:bodyPr>
-          <a:lstStyle xmlns:a="http://schemas.openxmlformats.org/drawingml/2006/main"/>
-          <a:p xmlns:a="http://schemas.openxmlformats.org/drawingml/2006/main">
+          <a:lstStyle/>
+          <a:p>
             <a:pPr algn="l">
               <a:defRPr sz="1275" b="0">
                 <a:solidFill>
@@ -5154,30 +4993,30 @@
       </p:sp>
       <p:sp>
         <p:nvSpPr>
-          <p:cNvPr id="22" name="">
-            <a:extLst xmlns:a="http://schemas.openxmlformats.org/drawingml/2006/main">
+          <p:cNvPr id="22" name="Rectangle 21">
+            <a:extLst>
               <a:ext uri="{FF2B5EF4-FFF2-40B4-BE49-F238E27FC236}">
                 <a16:creationId xmlns:a16="http://schemas.microsoft.com/office/drawing/2014/main" id="{CF0511B5-9B48-424D-990A-F8CE5112AA58}"/>
               </a:ext>
             </a:extLst>
           </p:cNvPr>
           <p:cNvSpPr>
-            <a:spLocks xmlns:a="http://schemas.openxmlformats.org/drawingml/2006/main" noGrp="1"/>
-          </p:cNvSpPr>
-          <p:nvPr/>
-        </p:nvSpPr>
-        <p:spPr>
-          <a:xfrm xmlns:a="http://schemas.openxmlformats.org/drawingml/2006/main">
+            <a:spLocks noGrp="1"/>
+          </p:cNvSpPr>
+          <p:nvPr/>
+        </p:nvSpPr>
+        <p:spPr>
+          <a:xfrm>
             <a:off x="4895850" y="3181350"/>
             <a:ext cx="2476500" cy="781050"/>
           </a:xfrm>
-          <a:prstGeom xmlns:a="http://schemas.openxmlformats.org/drawingml/2006/main" prst="rect">
-            <a:avLst/>
-          </a:prstGeom>
-          <a:solidFill xmlns:a="http://schemas.openxmlformats.org/drawingml/2006/main">
+          <a:prstGeom prst="rect">
+            <a:avLst/>
+          </a:prstGeom>
+          <a:solidFill>
             <a:srgbClr val="FFFFFF"/>
           </a:solidFill>
-          <a:ln xmlns:a="http://schemas.openxmlformats.org/drawingml/2006/main" w="9525">
+          <a:ln w="9525">
             <a:solidFill>
               <a:srgbClr val="B8BCC4"/>
             </a:solidFill>
@@ -5187,38 +5026,38 @@
       </p:sp>
       <p:sp>
         <p:nvSpPr>
-          <p:cNvPr id="23" name="">
-            <a:extLst xmlns:a="http://schemas.openxmlformats.org/drawingml/2006/main">
+          <p:cNvPr id="23" name="Rectangle 22">
+            <a:extLst>
               <a:ext uri="{FF2B5EF4-FFF2-40B4-BE49-F238E27FC236}">
                 <a16:creationId xmlns:a16="http://schemas.microsoft.com/office/drawing/2014/main" id="{B55AAA06-0444-4282-B84E-E9A4D71E89B6}"/>
               </a:ext>
             </a:extLst>
           </p:cNvPr>
           <p:cNvSpPr>
-            <a:spLocks xmlns:a="http://schemas.openxmlformats.org/drawingml/2006/main" noGrp="1"/>
-          </p:cNvSpPr>
-          <p:nvPr/>
-        </p:nvSpPr>
-        <p:spPr>
-          <a:xfrm xmlns:a="http://schemas.openxmlformats.org/drawingml/2006/main">
+            <a:spLocks noGrp="1"/>
+          </p:cNvSpPr>
+          <p:nvPr/>
+        </p:nvSpPr>
+        <p:spPr>
+          <a:xfrm>
             <a:off x="5029200" y="3352800"/>
             <a:ext cx="2209800" cy="552450"/>
           </a:xfrm>
-          <a:prstGeom xmlns:a="http://schemas.openxmlformats.org/drawingml/2006/main" prst="rect">
-            <a:avLst/>
-          </a:prstGeom>
-          <a:noFill xmlns:a="http://schemas.openxmlformats.org/drawingml/2006/main"/>
-          <a:ln xmlns:a="http://schemas.openxmlformats.org/drawingml/2006/main" w="0">
-            <a:noFill/>
-            <a:prstDash val="solid"/>
-          </a:ln>
-        </p:spPr>
-        <p:txBody>
-          <a:bodyPr xmlns:a="http://schemas.openxmlformats.org/drawingml/2006/main" anchor="ctr">
-            <a:normAutofit fontScale="100000"/>
+          <a:prstGeom prst="rect">
+            <a:avLst/>
+          </a:prstGeom>
+          <a:noFill/>
+          <a:ln w="0">
+            <a:noFill/>
+            <a:prstDash val="solid"/>
+          </a:ln>
+        </p:spPr>
+        <p:txBody>
+          <a:bodyPr anchor="ctr">
+            <a:normAutofit/>
           </a:bodyPr>
-          <a:lstStyle xmlns:a="http://schemas.openxmlformats.org/drawingml/2006/main"/>
-          <a:p xmlns:a="http://schemas.openxmlformats.org/drawingml/2006/main">
+          <a:lstStyle/>
+          <a:p>
             <a:pPr algn="l">
               <a:defRPr sz="1275" b="0">
                 <a:solidFill>
@@ -5245,30 +5084,30 @@
       </p:sp>
       <p:sp>
         <p:nvSpPr>
-          <p:cNvPr id="24" name="">
-            <a:extLst xmlns:a="http://schemas.openxmlformats.org/drawingml/2006/main">
+          <p:cNvPr id="24" name="Rectangle 23">
+            <a:extLst>
               <a:ext uri="{FF2B5EF4-FFF2-40B4-BE49-F238E27FC236}">
                 <a16:creationId xmlns:a16="http://schemas.microsoft.com/office/drawing/2014/main" id="{EDBB60EF-FC6A-4341-996E-50864455D71F}"/>
               </a:ext>
             </a:extLst>
           </p:cNvPr>
           <p:cNvSpPr>
-            <a:spLocks xmlns:a="http://schemas.openxmlformats.org/drawingml/2006/main" noGrp="1"/>
-          </p:cNvSpPr>
-          <p:nvPr/>
-        </p:nvSpPr>
-        <p:spPr>
-          <a:xfrm xmlns:a="http://schemas.openxmlformats.org/drawingml/2006/main">
+            <a:spLocks noGrp="1"/>
+          </p:cNvSpPr>
+          <p:nvPr/>
+        </p:nvSpPr>
+        <p:spPr>
+          <a:xfrm>
             <a:off x="7372350" y="3181350"/>
             <a:ext cx="3981450" cy="781050"/>
           </a:xfrm>
-          <a:prstGeom xmlns:a="http://schemas.openxmlformats.org/drawingml/2006/main" prst="rect">
-            <a:avLst/>
-          </a:prstGeom>
-          <a:solidFill xmlns:a="http://schemas.openxmlformats.org/drawingml/2006/main">
+          <a:prstGeom prst="rect">
+            <a:avLst/>
+          </a:prstGeom>
+          <a:solidFill>
             <a:srgbClr val="FFFFFF"/>
           </a:solidFill>
-          <a:ln xmlns:a="http://schemas.openxmlformats.org/drawingml/2006/main" w="9525">
+          <a:ln w="9525">
             <a:solidFill>
               <a:srgbClr val="B8BCC4"/>
             </a:solidFill>
@@ -5278,38 +5117,38 @@
       </p:sp>
       <p:sp>
         <p:nvSpPr>
-          <p:cNvPr id="25" name="">
-            <a:extLst xmlns:a="http://schemas.openxmlformats.org/drawingml/2006/main">
+          <p:cNvPr id="25" name="Rectangle 24">
+            <a:extLst>
               <a:ext uri="{FF2B5EF4-FFF2-40B4-BE49-F238E27FC236}">
                 <a16:creationId xmlns:a16="http://schemas.microsoft.com/office/drawing/2014/main" id="{B1E24FDE-DAA6-4EBE-8E71-6D015C656D4E}"/>
               </a:ext>
             </a:extLst>
           </p:cNvPr>
           <p:cNvSpPr>
-            <a:spLocks xmlns:a="http://schemas.openxmlformats.org/drawingml/2006/main" noGrp="1"/>
-          </p:cNvSpPr>
-          <p:nvPr/>
-        </p:nvSpPr>
-        <p:spPr>
-          <a:xfrm xmlns:a="http://schemas.openxmlformats.org/drawingml/2006/main">
+            <a:spLocks noGrp="1"/>
+          </p:cNvSpPr>
+          <p:nvPr/>
+        </p:nvSpPr>
+        <p:spPr>
+          <a:xfrm>
             <a:off x="7505700" y="3352800"/>
             <a:ext cx="3714750" cy="552450"/>
           </a:xfrm>
-          <a:prstGeom xmlns:a="http://schemas.openxmlformats.org/drawingml/2006/main" prst="rect">
-            <a:avLst/>
-          </a:prstGeom>
-          <a:noFill xmlns:a="http://schemas.openxmlformats.org/drawingml/2006/main"/>
-          <a:ln xmlns:a="http://schemas.openxmlformats.org/drawingml/2006/main" w="0">
-            <a:noFill/>
-            <a:prstDash val="solid"/>
-          </a:ln>
-        </p:spPr>
-        <p:txBody>
-          <a:bodyPr xmlns:a="http://schemas.openxmlformats.org/drawingml/2006/main" anchor="ctr">
-            <a:normAutofit fontScale="100000"/>
+          <a:prstGeom prst="rect">
+            <a:avLst/>
+          </a:prstGeom>
+          <a:noFill/>
+          <a:ln w="0">
+            <a:noFill/>
+            <a:prstDash val="solid"/>
+          </a:ln>
+        </p:spPr>
+        <p:txBody>
+          <a:bodyPr anchor="ctr">
+            <a:normAutofit/>
           </a:bodyPr>
-          <a:lstStyle xmlns:a="http://schemas.openxmlformats.org/drawingml/2006/main"/>
-          <a:p xmlns:a="http://schemas.openxmlformats.org/drawingml/2006/main">
+          <a:lstStyle/>
+          <a:p>
             <a:pPr algn="l">
               <a:defRPr sz="1275" b="0">
                 <a:solidFill>
@@ -5336,30 +5175,30 @@
       </p:sp>
       <p:sp>
         <p:nvSpPr>
-          <p:cNvPr id="26" name="">
-            <a:extLst xmlns:a="http://schemas.openxmlformats.org/drawingml/2006/main">
+          <p:cNvPr id="26" name="Rectangle 25">
+            <a:extLst>
               <a:ext uri="{FF2B5EF4-FFF2-40B4-BE49-F238E27FC236}">
                 <a16:creationId xmlns:a16="http://schemas.microsoft.com/office/drawing/2014/main" id="{6D47F8B5-C316-4C75-AF25-48DE4B2CFAE8}"/>
               </a:ext>
             </a:extLst>
           </p:cNvPr>
           <p:cNvSpPr>
-            <a:spLocks xmlns:a="http://schemas.openxmlformats.org/drawingml/2006/main" noGrp="1"/>
-          </p:cNvSpPr>
-          <p:nvPr/>
-        </p:nvSpPr>
-        <p:spPr>
-          <a:xfrm xmlns:a="http://schemas.openxmlformats.org/drawingml/2006/main">
+            <a:spLocks noGrp="1"/>
+          </p:cNvSpPr>
+          <p:nvPr/>
+        </p:nvSpPr>
+        <p:spPr>
+          <a:xfrm>
             <a:off x="419100" y="3962400"/>
             <a:ext cx="2857500" cy="781050"/>
           </a:xfrm>
-          <a:prstGeom xmlns:a="http://schemas.openxmlformats.org/drawingml/2006/main" prst="rect">
-            <a:avLst/>
-          </a:prstGeom>
-          <a:solidFill xmlns:a="http://schemas.openxmlformats.org/drawingml/2006/main">
+          <a:prstGeom prst="rect">
+            <a:avLst/>
+          </a:prstGeom>
+          <a:solidFill>
             <a:srgbClr val="FFFFFF"/>
           </a:solidFill>
-          <a:ln xmlns:a="http://schemas.openxmlformats.org/drawingml/2006/main" w="9525">
+          <a:ln w="9525">
             <a:solidFill>
               <a:srgbClr val="B8BCC4"/>
             </a:solidFill>
@@ -5369,38 +5208,38 @@
       </p:sp>
       <p:sp>
         <p:nvSpPr>
-          <p:cNvPr id="27" name="">
-            <a:extLst xmlns:a="http://schemas.openxmlformats.org/drawingml/2006/main">
+          <p:cNvPr id="27" name="Rectangle 26">
+            <a:extLst>
               <a:ext uri="{FF2B5EF4-FFF2-40B4-BE49-F238E27FC236}">
                 <a16:creationId xmlns:a16="http://schemas.microsoft.com/office/drawing/2014/main" id="{4C12D430-7126-4A97-B93A-7DDE1B65D878}"/>
               </a:ext>
             </a:extLst>
           </p:cNvPr>
           <p:cNvSpPr>
-            <a:spLocks xmlns:a="http://schemas.openxmlformats.org/drawingml/2006/main" noGrp="1"/>
-          </p:cNvSpPr>
-          <p:nvPr/>
-        </p:nvSpPr>
-        <p:spPr>
-          <a:xfrm xmlns:a="http://schemas.openxmlformats.org/drawingml/2006/main">
+            <a:spLocks noGrp="1"/>
+          </p:cNvSpPr>
+          <p:nvPr/>
+        </p:nvSpPr>
+        <p:spPr>
+          <a:xfrm>
             <a:off x="552450" y="4133850"/>
             <a:ext cx="2590800" cy="552450"/>
           </a:xfrm>
-          <a:prstGeom xmlns:a="http://schemas.openxmlformats.org/drawingml/2006/main" prst="rect">
-            <a:avLst/>
-          </a:prstGeom>
-          <a:noFill xmlns:a="http://schemas.openxmlformats.org/drawingml/2006/main"/>
-          <a:ln xmlns:a="http://schemas.openxmlformats.org/drawingml/2006/main" w="0">
-            <a:noFill/>
-            <a:prstDash val="solid"/>
-          </a:ln>
-        </p:spPr>
-        <p:txBody>
-          <a:bodyPr xmlns:a="http://schemas.openxmlformats.org/drawingml/2006/main" anchor="ctr">
-            <a:normAutofit fontScale="100000"/>
+          <a:prstGeom prst="rect">
+            <a:avLst/>
+          </a:prstGeom>
+          <a:noFill/>
+          <a:ln w="0">
+            <a:noFill/>
+            <a:prstDash val="solid"/>
+          </a:ln>
+        </p:spPr>
+        <p:txBody>
+          <a:bodyPr anchor="ctr">
+            <a:normAutofit/>
           </a:bodyPr>
-          <a:lstStyle xmlns:a="http://schemas.openxmlformats.org/drawingml/2006/main"/>
-          <a:p xmlns:a="http://schemas.openxmlformats.org/drawingml/2006/main">
+          <a:lstStyle/>
+          <a:p>
             <a:pPr algn="l">
               <a:defRPr sz="1275" b="0">
                 <a:solidFill>
@@ -5427,30 +5266,30 @@
       </p:sp>
       <p:sp>
         <p:nvSpPr>
-          <p:cNvPr id="28" name="">
-            <a:extLst xmlns:a="http://schemas.openxmlformats.org/drawingml/2006/main">
+          <p:cNvPr id="28" name="Rectangle 27">
+            <a:extLst>
               <a:ext uri="{FF2B5EF4-FFF2-40B4-BE49-F238E27FC236}">
                 <a16:creationId xmlns:a16="http://schemas.microsoft.com/office/drawing/2014/main" id="{40B0085B-E1C7-46A4-8EB6-9914CFEE8DBD}"/>
               </a:ext>
             </a:extLst>
           </p:cNvPr>
           <p:cNvSpPr>
-            <a:spLocks xmlns:a="http://schemas.openxmlformats.org/drawingml/2006/main" noGrp="1"/>
-          </p:cNvSpPr>
-          <p:nvPr/>
-        </p:nvSpPr>
-        <p:spPr>
-          <a:xfrm xmlns:a="http://schemas.openxmlformats.org/drawingml/2006/main">
+            <a:spLocks noGrp="1"/>
+          </p:cNvSpPr>
+          <p:nvPr/>
+        </p:nvSpPr>
+        <p:spPr>
+          <a:xfrm>
             <a:off x="3276600" y="3962400"/>
             <a:ext cx="1619250" cy="781050"/>
           </a:xfrm>
-          <a:prstGeom xmlns:a="http://schemas.openxmlformats.org/drawingml/2006/main" prst="rect">
-            <a:avLst/>
-          </a:prstGeom>
-          <a:solidFill xmlns:a="http://schemas.openxmlformats.org/drawingml/2006/main">
+          <a:prstGeom prst="rect">
+            <a:avLst/>
+          </a:prstGeom>
+          <a:solidFill>
             <a:srgbClr val="FFFFFF"/>
           </a:solidFill>
-          <a:ln xmlns:a="http://schemas.openxmlformats.org/drawingml/2006/main" w="9525">
+          <a:ln w="9525">
             <a:solidFill>
               <a:srgbClr val="B8BCC4"/>
             </a:solidFill>
@@ -5460,38 +5299,38 @@
       </p:sp>
       <p:sp>
         <p:nvSpPr>
-          <p:cNvPr id="29" name="">
-            <a:extLst xmlns:a="http://schemas.openxmlformats.org/drawingml/2006/main">
+          <p:cNvPr id="29" name="Rectangle 28">
+            <a:extLst>
               <a:ext uri="{FF2B5EF4-FFF2-40B4-BE49-F238E27FC236}">
                 <a16:creationId xmlns:a16="http://schemas.microsoft.com/office/drawing/2014/main" id="{873460AB-36E2-42ED-B07E-12FEA590A743}"/>
               </a:ext>
             </a:extLst>
           </p:cNvPr>
           <p:cNvSpPr>
-            <a:spLocks xmlns:a="http://schemas.openxmlformats.org/drawingml/2006/main" noGrp="1"/>
-          </p:cNvSpPr>
-          <p:nvPr/>
-        </p:nvSpPr>
-        <p:spPr>
-          <a:xfrm xmlns:a="http://schemas.openxmlformats.org/drawingml/2006/main">
+            <a:spLocks noGrp="1"/>
+          </p:cNvSpPr>
+          <p:nvPr/>
+        </p:nvSpPr>
+        <p:spPr>
+          <a:xfrm>
             <a:off x="3409950" y="4133850"/>
             <a:ext cx="1352550" cy="552450"/>
           </a:xfrm>
-          <a:prstGeom xmlns:a="http://schemas.openxmlformats.org/drawingml/2006/main" prst="rect">
-            <a:avLst/>
-          </a:prstGeom>
-          <a:noFill xmlns:a="http://schemas.openxmlformats.org/drawingml/2006/main"/>
-          <a:ln xmlns:a="http://schemas.openxmlformats.org/drawingml/2006/main" w="0">
-            <a:noFill/>
-            <a:prstDash val="solid"/>
-          </a:ln>
-        </p:spPr>
-        <p:txBody>
-          <a:bodyPr xmlns:a="http://schemas.openxmlformats.org/drawingml/2006/main" anchor="ctr">
-            <a:normAutofit fontScale="100000"/>
+          <a:prstGeom prst="rect">
+            <a:avLst/>
+          </a:prstGeom>
+          <a:noFill/>
+          <a:ln w="0">
+            <a:noFill/>
+            <a:prstDash val="solid"/>
+          </a:ln>
+        </p:spPr>
+        <p:txBody>
+          <a:bodyPr anchor="ctr">
+            <a:normAutofit/>
           </a:bodyPr>
-          <a:lstStyle xmlns:a="http://schemas.openxmlformats.org/drawingml/2006/main"/>
-          <a:p xmlns:a="http://schemas.openxmlformats.org/drawingml/2006/main">
+          <a:lstStyle/>
+          <a:p>
             <a:pPr algn="l">
               <a:defRPr sz="1275" b="0">
                 <a:solidFill>
@@ -5518,30 +5357,30 @@
       </p:sp>
       <p:sp>
         <p:nvSpPr>
-          <p:cNvPr id="30" name="">
-            <a:extLst xmlns:a="http://schemas.openxmlformats.org/drawingml/2006/main">
+          <p:cNvPr id="30" name="Rectangle 29">
+            <a:extLst>
               <a:ext uri="{FF2B5EF4-FFF2-40B4-BE49-F238E27FC236}">
                 <a16:creationId xmlns:a16="http://schemas.microsoft.com/office/drawing/2014/main" id="{5DC6D62A-398E-4B72-B548-4CB448A94A27}"/>
               </a:ext>
             </a:extLst>
           </p:cNvPr>
           <p:cNvSpPr>
-            <a:spLocks xmlns:a="http://schemas.openxmlformats.org/drawingml/2006/main" noGrp="1"/>
-          </p:cNvSpPr>
-          <p:nvPr/>
-        </p:nvSpPr>
-        <p:spPr>
-          <a:xfrm xmlns:a="http://schemas.openxmlformats.org/drawingml/2006/main">
+            <a:spLocks noGrp="1"/>
+          </p:cNvSpPr>
+          <p:nvPr/>
+        </p:nvSpPr>
+        <p:spPr>
+          <a:xfrm>
             <a:off x="4895850" y="3962400"/>
             <a:ext cx="2476500" cy="781050"/>
           </a:xfrm>
-          <a:prstGeom xmlns:a="http://schemas.openxmlformats.org/drawingml/2006/main" prst="rect">
-            <a:avLst/>
-          </a:prstGeom>
-          <a:solidFill xmlns:a="http://schemas.openxmlformats.org/drawingml/2006/main">
+          <a:prstGeom prst="rect">
+            <a:avLst/>
+          </a:prstGeom>
+          <a:solidFill>
             <a:srgbClr val="FFFFFF"/>
           </a:solidFill>
-          <a:ln xmlns:a="http://schemas.openxmlformats.org/drawingml/2006/main" w="9525">
+          <a:ln w="9525">
             <a:solidFill>
               <a:srgbClr val="B8BCC4"/>
             </a:solidFill>
@@ -5551,38 +5390,38 @@
       </p:sp>
       <p:sp>
         <p:nvSpPr>
-          <p:cNvPr id="31" name="">
-            <a:extLst xmlns:a="http://schemas.openxmlformats.org/drawingml/2006/main">
+          <p:cNvPr id="31" name="Rectangle 30">
+            <a:extLst>
               <a:ext uri="{FF2B5EF4-FFF2-40B4-BE49-F238E27FC236}">
                 <a16:creationId xmlns:a16="http://schemas.microsoft.com/office/drawing/2014/main" id="{59EFA5AC-20E3-4DDB-A7A4-D3E8860FB4DD}"/>
               </a:ext>
             </a:extLst>
           </p:cNvPr>
           <p:cNvSpPr>
-            <a:spLocks xmlns:a="http://schemas.openxmlformats.org/drawingml/2006/main" noGrp="1"/>
-          </p:cNvSpPr>
-          <p:nvPr/>
-        </p:nvSpPr>
-        <p:spPr>
-          <a:xfrm xmlns:a="http://schemas.openxmlformats.org/drawingml/2006/main">
+            <a:spLocks noGrp="1"/>
+          </p:cNvSpPr>
+          <p:nvPr/>
+        </p:nvSpPr>
+        <p:spPr>
+          <a:xfrm>
             <a:off x="5029200" y="4133850"/>
             <a:ext cx="2209800" cy="552450"/>
           </a:xfrm>
-          <a:prstGeom xmlns:a="http://schemas.openxmlformats.org/drawingml/2006/main" prst="rect">
-            <a:avLst/>
-          </a:prstGeom>
-          <a:noFill xmlns:a="http://schemas.openxmlformats.org/drawingml/2006/main"/>
-          <a:ln xmlns:a="http://schemas.openxmlformats.org/drawingml/2006/main" w="0">
-            <a:noFill/>
-            <a:prstDash val="solid"/>
-          </a:ln>
-        </p:spPr>
-        <p:txBody>
-          <a:bodyPr xmlns:a="http://schemas.openxmlformats.org/drawingml/2006/main" anchor="ctr">
-            <a:normAutofit fontScale="100000"/>
+          <a:prstGeom prst="rect">
+            <a:avLst/>
+          </a:prstGeom>
+          <a:noFill/>
+          <a:ln w="0">
+            <a:noFill/>
+            <a:prstDash val="solid"/>
+          </a:ln>
+        </p:spPr>
+        <p:txBody>
+          <a:bodyPr anchor="ctr">
+            <a:normAutofit/>
           </a:bodyPr>
-          <a:lstStyle xmlns:a="http://schemas.openxmlformats.org/drawingml/2006/main"/>
-          <a:p xmlns:a="http://schemas.openxmlformats.org/drawingml/2006/main">
+          <a:lstStyle/>
+          <a:p>
             <a:pPr algn="l">
               <a:defRPr sz="1275" b="0">
                 <a:solidFill>
@@ -5609,30 +5448,30 @@
       </p:sp>
       <p:sp>
         <p:nvSpPr>
-          <p:cNvPr id="32" name="">
-            <a:extLst xmlns:a="http://schemas.openxmlformats.org/drawingml/2006/main">
+          <p:cNvPr id="32" name="Rectangle 31">
+            <a:extLst>
               <a:ext uri="{FF2B5EF4-FFF2-40B4-BE49-F238E27FC236}">
                 <a16:creationId xmlns:a16="http://schemas.microsoft.com/office/drawing/2014/main" id="{08EBD057-CFB4-4ABD-B5A5-027A197BCB33}"/>
               </a:ext>
             </a:extLst>
           </p:cNvPr>
           <p:cNvSpPr>
-            <a:spLocks xmlns:a="http://schemas.openxmlformats.org/drawingml/2006/main" noGrp="1"/>
-          </p:cNvSpPr>
-          <p:nvPr/>
-        </p:nvSpPr>
-        <p:spPr>
-          <a:xfrm xmlns:a="http://schemas.openxmlformats.org/drawingml/2006/main">
+            <a:spLocks noGrp="1"/>
+          </p:cNvSpPr>
+          <p:nvPr/>
+        </p:nvSpPr>
+        <p:spPr>
+          <a:xfrm>
             <a:off x="7372350" y="3962400"/>
             <a:ext cx="3981450" cy="781050"/>
           </a:xfrm>
-          <a:prstGeom xmlns:a="http://schemas.openxmlformats.org/drawingml/2006/main" prst="rect">
-            <a:avLst/>
-          </a:prstGeom>
-          <a:solidFill xmlns:a="http://schemas.openxmlformats.org/drawingml/2006/main">
+          <a:prstGeom prst="rect">
+            <a:avLst/>
+          </a:prstGeom>
+          <a:solidFill>
             <a:srgbClr val="FFFFFF"/>
           </a:solidFill>
-          <a:ln xmlns:a="http://schemas.openxmlformats.org/drawingml/2006/main" w="9525">
+          <a:ln w="9525">
             <a:solidFill>
               <a:srgbClr val="B8BCC4"/>
             </a:solidFill>
@@ -5642,38 +5481,38 @@
       </p:sp>
       <p:sp>
         <p:nvSpPr>
-          <p:cNvPr id="33" name="">
-            <a:extLst xmlns:a="http://schemas.openxmlformats.org/drawingml/2006/main">
+          <p:cNvPr id="33" name="Rectangle 32">
+            <a:extLst>
               <a:ext uri="{FF2B5EF4-FFF2-40B4-BE49-F238E27FC236}">
                 <a16:creationId xmlns:a16="http://schemas.microsoft.com/office/drawing/2014/main" id="{CFAC8F4F-D380-4027-A744-06B66B115403}"/>
               </a:ext>
             </a:extLst>
           </p:cNvPr>
           <p:cNvSpPr>
-            <a:spLocks xmlns:a="http://schemas.openxmlformats.org/drawingml/2006/main" noGrp="1"/>
-          </p:cNvSpPr>
-          <p:nvPr/>
-        </p:nvSpPr>
-        <p:spPr>
-          <a:xfrm xmlns:a="http://schemas.openxmlformats.org/drawingml/2006/main">
+            <a:spLocks noGrp="1"/>
+          </p:cNvSpPr>
+          <p:nvPr/>
+        </p:nvSpPr>
+        <p:spPr>
+          <a:xfrm>
             <a:off x="7505700" y="4133850"/>
             <a:ext cx="3714750" cy="552450"/>
           </a:xfrm>
-          <a:prstGeom xmlns:a="http://schemas.openxmlformats.org/drawingml/2006/main" prst="rect">
-            <a:avLst/>
-          </a:prstGeom>
-          <a:noFill xmlns:a="http://schemas.openxmlformats.org/drawingml/2006/main"/>
-          <a:ln xmlns:a="http://schemas.openxmlformats.org/drawingml/2006/main" w="0">
-            <a:noFill/>
-            <a:prstDash val="solid"/>
-          </a:ln>
-        </p:spPr>
-        <p:txBody>
-          <a:bodyPr xmlns:a="http://schemas.openxmlformats.org/drawingml/2006/main" anchor="ctr">
-            <a:normAutofit fontScale="100000"/>
+          <a:prstGeom prst="rect">
+            <a:avLst/>
+          </a:prstGeom>
+          <a:noFill/>
+          <a:ln w="0">
+            <a:noFill/>
+            <a:prstDash val="solid"/>
+          </a:ln>
+        </p:spPr>
+        <p:txBody>
+          <a:bodyPr anchor="ctr">
+            <a:normAutofit/>
           </a:bodyPr>
-          <a:lstStyle xmlns:a="http://schemas.openxmlformats.org/drawingml/2006/main"/>
-          <a:p xmlns:a="http://schemas.openxmlformats.org/drawingml/2006/main">
+          <a:lstStyle/>
+          <a:p>
             <a:pPr algn="l">
               <a:defRPr sz="1275" b="0">
                 <a:solidFill>
@@ -5700,38 +5539,38 @@
       </p:sp>
       <p:sp>
         <p:nvSpPr>
-          <p:cNvPr id="34" name="">
-            <a:extLst xmlns:a="http://schemas.openxmlformats.org/drawingml/2006/main">
+          <p:cNvPr id="34" name="Rectangle 33">
+            <a:extLst>
               <a:ext uri="{FF2B5EF4-FFF2-40B4-BE49-F238E27FC236}">
                 <a16:creationId xmlns:a16="http://schemas.microsoft.com/office/drawing/2014/main" id="{4ED1276C-F964-4C6C-83A2-D86266FA9EE9}"/>
               </a:ext>
             </a:extLst>
           </p:cNvPr>
           <p:cNvSpPr>
-            <a:spLocks xmlns:a="http://schemas.openxmlformats.org/drawingml/2006/main" noGrp="1"/>
-          </p:cNvSpPr>
-          <p:nvPr/>
-        </p:nvSpPr>
-        <p:spPr>
-          <a:xfrm xmlns:a="http://schemas.openxmlformats.org/drawingml/2006/main">
+            <a:spLocks noGrp="1"/>
+          </p:cNvSpPr>
+          <p:nvPr/>
+        </p:nvSpPr>
+        <p:spPr>
+          <a:xfrm>
             <a:off x="419100" y="6419850"/>
             <a:ext cx="3429000" cy="209550"/>
           </a:xfrm>
-          <a:prstGeom xmlns:a="http://schemas.openxmlformats.org/drawingml/2006/main" prst="rect">
-            <a:avLst/>
-          </a:prstGeom>
-          <a:noFill xmlns:a="http://schemas.openxmlformats.org/drawingml/2006/main"/>
-          <a:ln xmlns:a="http://schemas.openxmlformats.org/drawingml/2006/main" w="0">
-            <a:noFill/>
-            <a:prstDash val="solid"/>
-          </a:ln>
-        </p:spPr>
-        <p:txBody>
-          <a:bodyPr xmlns:a="http://schemas.openxmlformats.org/drawingml/2006/main" anchor="t">
+          <a:prstGeom prst="rect">
+            <a:avLst/>
+          </a:prstGeom>
+          <a:noFill/>
+          <a:ln w="0">
+            <a:noFill/>
+            <a:prstDash val="solid"/>
+          </a:ln>
+        </p:spPr>
+        <p:txBody>
+          <a:bodyPr anchor="t">
             <a:normAutofit fontScale="86111"/>
           </a:bodyPr>
-          <a:lstStyle xmlns:a="http://schemas.openxmlformats.org/drawingml/2006/main"/>
-          <a:p xmlns:a="http://schemas.openxmlformats.org/drawingml/2006/main">
+          <a:lstStyle/>
+          <a:p>
             <a:pPr algn="l">
               <a:defRPr sz="900" b="0">
                 <a:solidFill>
@@ -5758,38 +5597,38 @@
       </p:sp>
       <p:sp>
         <p:nvSpPr>
-          <p:cNvPr id="35" name="">
-            <a:extLst xmlns:a="http://schemas.openxmlformats.org/drawingml/2006/main">
+          <p:cNvPr id="35" name="Rectangle 34">
+            <a:extLst>
               <a:ext uri="{FF2B5EF4-FFF2-40B4-BE49-F238E27FC236}">
                 <a16:creationId xmlns:a16="http://schemas.microsoft.com/office/drawing/2014/main" id="{C46E9286-47E4-40F6-AE51-982C693C04D7}"/>
               </a:ext>
             </a:extLst>
           </p:cNvPr>
           <p:cNvSpPr>
-            <a:spLocks xmlns:a="http://schemas.openxmlformats.org/drawingml/2006/main" noGrp="1"/>
-          </p:cNvSpPr>
-          <p:nvPr/>
-        </p:nvSpPr>
-        <p:spPr>
-          <a:xfrm xmlns:a="http://schemas.openxmlformats.org/drawingml/2006/main">
+            <a:spLocks noGrp="1"/>
+          </p:cNvSpPr>
+          <p:nvPr/>
+        </p:nvSpPr>
+        <p:spPr>
+          <a:xfrm>
             <a:off x="11239500" y="6419850"/>
             <a:ext cx="523875" cy="209550"/>
           </a:xfrm>
-          <a:prstGeom xmlns:a="http://schemas.openxmlformats.org/drawingml/2006/main" prst="rect">
-            <a:avLst/>
-          </a:prstGeom>
-          <a:noFill xmlns:a="http://schemas.openxmlformats.org/drawingml/2006/main"/>
-          <a:ln xmlns:a="http://schemas.openxmlformats.org/drawingml/2006/main" w="0">
-            <a:noFill/>
-            <a:prstDash val="solid"/>
-          </a:ln>
-        </p:spPr>
-        <p:txBody>
-          <a:bodyPr xmlns:a="http://schemas.openxmlformats.org/drawingml/2006/main" anchor="t">
+          <a:prstGeom prst="rect">
+            <a:avLst/>
+          </a:prstGeom>
+          <a:noFill/>
+          <a:ln w="0">
+            <a:noFill/>
+            <a:prstDash val="solid"/>
+          </a:ln>
+        </p:spPr>
+        <p:txBody>
+          <a:bodyPr anchor="t">
             <a:normAutofit fontScale="86111"/>
           </a:bodyPr>
-          <a:lstStyle xmlns:a="http://schemas.openxmlformats.org/drawingml/2006/main"/>
-          <a:p xmlns:a="http://schemas.openxmlformats.org/drawingml/2006/main">
+          <a:lstStyle/>
+          <a:p>
             <a:pPr algn="r">
               <a:defRPr sz="900" b="0">
                 <a:solidFill>
@@ -5821,17 +5660,21 @@
       </p:ext>
     </p:extLst>
   </p:cSld>
+  <p:clrMapOvr>
+    <a:masterClrMapping/>
+  </p:clrMapOvr>
 </p:sld>
 </file>
 
 <file path=ppt/slides/slide6.xml><?xml version="1.0" encoding="utf-8"?>
-<p:sld xmlns:p="http://schemas.openxmlformats.org/presentationml/2006/main">
+<p:sld xmlns:a="http://schemas.openxmlformats.org/drawingml/2006/main" xmlns:r="http://schemas.openxmlformats.org/officeDocument/2006/relationships" xmlns:p="http://schemas.openxmlformats.org/presentationml/2006/main">
   <p:cSld>
     <p:bg>
       <p:bgPr>
-        <a:solidFill xmlns:a="http://schemas.openxmlformats.org/drawingml/2006/main">
+        <a:solidFill>
           <a:srgbClr val="FFFFFF"/>
         </a:solidFill>
+        <a:effectLst/>
       </p:bgPr>
     </p:bg>
     <p:spTree>
@@ -5841,42 +5684,47 @@
         <p:nvPr/>
       </p:nvGrpSpPr>
       <p:grpSpPr>
-        <a:xfrm xmlns:a="http://schemas.openxmlformats.org/drawingml/2006/main"/>
+        <a:xfrm>
+          <a:off x="0" y="0"/>
+          <a:ext cx="0" cy="0"/>
+          <a:chOff x="0" y="0"/>
+          <a:chExt cx="0" cy="0"/>
+        </a:xfrm>
       </p:grpSpPr>
       <p:sp>
         <p:nvSpPr>
-          <p:cNvPr id="16" name="">
-            <a:extLst xmlns:a="http://schemas.openxmlformats.org/drawingml/2006/main">
+          <p:cNvPr id="16" name="Rectangle 15">
+            <a:extLst>
               <a:ext uri="{FF2B5EF4-FFF2-40B4-BE49-F238E27FC236}">
                 <a16:creationId xmlns:a16="http://schemas.microsoft.com/office/drawing/2014/main" id="{AD030893-6AE3-421E-BAE7-DDC5372E738B}"/>
               </a:ext>
             </a:extLst>
           </p:cNvPr>
           <p:cNvSpPr>
-            <a:spLocks xmlns:a="http://schemas.openxmlformats.org/drawingml/2006/main" noGrp="1"/>
-          </p:cNvSpPr>
-          <p:nvPr/>
-        </p:nvSpPr>
-        <p:spPr>
-          <a:xfrm xmlns:a="http://schemas.openxmlformats.org/drawingml/2006/main">
+            <a:spLocks noGrp="1"/>
+          </p:cNvSpPr>
+          <p:nvPr/>
+        </p:nvSpPr>
+        <p:spPr>
+          <a:xfrm>
             <a:off x="419100" y="361950"/>
             <a:ext cx="10477500" cy="723900"/>
           </a:xfrm>
-          <a:prstGeom xmlns:a="http://schemas.openxmlformats.org/drawingml/2006/main" prst="rect">
-            <a:avLst/>
-          </a:prstGeom>
-          <a:noFill xmlns:a="http://schemas.openxmlformats.org/drawingml/2006/main"/>
-          <a:ln xmlns:a="http://schemas.openxmlformats.org/drawingml/2006/main" w="0">
-            <a:noFill/>
-            <a:prstDash val="solid"/>
-          </a:ln>
-        </p:spPr>
-        <p:txBody>
-          <a:bodyPr xmlns:a="http://schemas.openxmlformats.org/drawingml/2006/main" anchor="t">
-            <a:normAutofit fontScale="100000"/>
+          <a:prstGeom prst="rect">
+            <a:avLst/>
+          </a:prstGeom>
+          <a:noFill/>
+          <a:ln w="0">
+            <a:noFill/>
+            <a:prstDash val="solid"/>
+          </a:ln>
+        </p:spPr>
+        <p:txBody>
+          <a:bodyPr anchor="t">
+            <a:normAutofit/>
           </a:bodyPr>
-          <a:lstStyle xmlns:a="http://schemas.openxmlformats.org/drawingml/2006/main"/>
-          <a:p xmlns:a="http://schemas.openxmlformats.org/drawingml/2006/main">
+          <a:lstStyle/>
+          <a:p>
             <a:pPr algn="l">
               <a:defRPr sz="3000" b="1">
                 <a:solidFill>
@@ -5903,71 +5751,71 @@
       </p:sp>
       <p:sp>
         <p:nvSpPr>
-          <p:cNvPr id="2" name="">
-            <a:extLst xmlns:a="http://schemas.openxmlformats.org/drawingml/2006/main">
+          <p:cNvPr id="2" name="Rounded Rectangle 1">
+            <a:extLst>
               <a:ext uri="{FF2B5EF4-FFF2-40B4-BE49-F238E27FC236}">
                 <a16:creationId xmlns:a16="http://schemas.microsoft.com/office/drawing/2014/main" id="{D71E9C2A-20F6-4316-ADC0-F6811C1661D8}"/>
               </a:ext>
             </a:extLst>
           </p:cNvPr>
           <p:cNvSpPr>
-            <a:spLocks xmlns:a="http://schemas.openxmlformats.org/drawingml/2006/main" noGrp="1"/>
-          </p:cNvSpPr>
-          <p:nvPr/>
-        </p:nvSpPr>
-        <p:spPr>
-          <a:xfrm xmlns:a="http://schemas.openxmlformats.org/drawingml/2006/main">
+            <a:spLocks noGrp="1"/>
+          </p:cNvSpPr>
+          <p:nvPr/>
+        </p:nvSpPr>
+        <p:spPr>
+          <a:xfrm>
             <a:off x="419100" y="1657350"/>
             <a:ext cx="552450" cy="552450"/>
           </a:xfrm>
-          <a:prstGeom xmlns:a="http://schemas.openxmlformats.org/drawingml/2006/main" prst="roundRect">
+          <a:prstGeom prst="roundRect">
             <a:avLst>
               <a:gd name="adj" fmla="val 20690"/>
             </a:avLst>
           </a:prstGeom>
-          <a:solidFill xmlns:a="http://schemas.openxmlformats.org/drawingml/2006/main">
+          <a:solidFill>
             <a:srgbClr val="3D8DFF"/>
           </a:solidFill>
-          <a:ln xmlns:a="http://schemas.openxmlformats.org/drawingml/2006/main" w="0">
-            <a:noFill/>
-            <a:prstDash val="solid"/>
-          </a:ln>
-        </p:spPr>
-      </p:sp>
-      <p:sp>
-        <p:nvSpPr>
-          <p:cNvPr id="3" name="">
-            <a:extLst xmlns:a="http://schemas.openxmlformats.org/drawingml/2006/main">
+          <a:ln w="0">
+            <a:noFill/>
+            <a:prstDash val="solid"/>
+          </a:ln>
+        </p:spPr>
+      </p:sp>
+      <p:sp>
+        <p:nvSpPr>
+          <p:cNvPr id="3" name="Rectangle 2">
+            <a:extLst>
               <a:ext uri="{FF2B5EF4-FFF2-40B4-BE49-F238E27FC236}">
                 <a16:creationId xmlns:a16="http://schemas.microsoft.com/office/drawing/2014/main" id="{7C5F09DE-0182-4288-B78E-5234D95CBDA0}"/>
               </a:ext>
             </a:extLst>
           </p:cNvPr>
           <p:cNvSpPr>
-            <a:spLocks xmlns:a="http://schemas.openxmlformats.org/drawingml/2006/main" noGrp="1"/>
-          </p:cNvSpPr>
-          <p:nvPr/>
-        </p:nvSpPr>
-        <p:spPr>
-          <a:xfrm xmlns:a="http://schemas.openxmlformats.org/drawingml/2006/main">
+            <a:spLocks noGrp="1"/>
+          </p:cNvSpPr>
+          <p:nvPr/>
+        </p:nvSpPr>
+        <p:spPr>
+          <a:xfrm>
             <a:off x="419100" y="1752600"/>
             <a:ext cx="552450" cy="381000"/>
           </a:xfrm>
-          <a:prstGeom xmlns:a="http://schemas.openxmlformats.org/drawingml/2006/main" prst="rect">
-            <a:avLst/>
-          </a:prstGeom>
-          <a:noFill xmlns:a="http://schemas.openxmlformats.org/drawingml/2006/main"/>
-          <a:ln xmlns:a="http://schemas.openxmlformats.org/drawingml/2006/main" w="0">
-            <a:noFill/>
-            <a:prstDash val="solid"/>
-          </a:ln>
-        </p:spPr>
-        <p:txBody>
-          <a:bodyPr xmlns:a="http://schemas.openxmlformats.org/drawingml/2006/main" anchor="ctr">
-            <a:normAutofit fontScale="100000"/>
+          <a:prstGeom prst="rect">
+            <a:avLst/>
+          </a:prstGeom>
+          <a:noFill/>
+          <a:ln w="0">
+            <a:noFill/>
+            <a:prstDash val="solid"/>
+          </a:ln>
+        </p:spPr>
+        <p:txBody>
+          <a:bodyPr anchor="ctr">
+            <a:normAutofit/>
           </a:bodyPr>
-          <a:lstStyle xmlns:a="http://schemas.openxmlformats.org/drawingml/2006/main"/>
-          <a:p xmlns:a="http://schemas.openxmlformats.org/drawingml/2006/main">
+          <a:lstStyle/>
+          <a:p>
             <a:pPr algn="ctr">
               <a:defRPr sz="1650" b="1">
                 <a:solidFill>
@@ -5994,38 +5842,38 @@
       </p:sp>
       <p:sp>
         <p:nvSpPr>
-          <p:cNvPr id="4" name="">
-            <a:extLst xmlns:a="http://schemas.openxmlformats.org/drawingml/2006/main">
+          <p:cNvPr id="4" name="Rectangle 3">
+            <a:extLst>
               <a:ext uri="{FF2B5EF4-FFF2-40B4-BE49-F238E27FC236}">
                 <a16:creationId xmlns:a16="http://schemas.microsoft.com/office/drawing/2014/main" id="{3A1287CA-D059-455D-910B-38008DE5F8FA}"/>
               </a:ext>
             </a:extLst>
           </p:cNvPr>
           <p:cNvSpPr>
-            <a:spLocks xmlns:a="http://schemas.openxmlformats.org/drawingml/2006/main" noGrp="1"/>
-          </p:cNvSpPr>
-          <p:nvPr/>
-        </p:nvSpPr>
-        <p:spPr>
-          <a:xfrm xmlns:a="http://schemas.openxmlformats.org/drawingml/2006/main">
+            <a:spLocks noGrp="1"/>
+          </p:cNvSpPr>
+          <p:nvPr/>
+        </p:nvSpPr>
+        <p:spPr>
+          <a:xfrm>
             <a:off x="1257300" y="1733550"/>
             <a:ext cx="5905500" cy="476250"/>
           </a:xfrm>
-          <a:prstGeom xmlns:a="http://schemas.openxmlformats.org/drawingml/2006/main" prst="rect">
-            <a:avLst/>
-          </a:prstGeom>
-          <a:noFill xmlns:a="http://schemas.openxmlformats.org/drawingml/2006/main"/>
-          <a:ln xmlns:a="http://schemas.openxmlformats.org/drawingml/2006/main" w="0">
-            <a:noFill/>
-            <a:prstDash val="solid"/>
-          </a:ln>
-        </p:spPr>
-        <p:txBody>
-          <a:bodyPr xmlns:a="http://schemas.openxmlformats.org/drawingml/2006/main" anchor="ctr">
-            <a:normAutofit fontScale="100000"/>
+          <a:prstGeom prst="rect">
+            <a:avLst/>
+          </a:prstGeom>
+          <a:noFill/>
+          <a:ln w="0">
+            <a:noFill/>
+            <a:prstDash val="solid"/>
+          </a:ln>
+        </p:spPr>
+        <p:txBody>
+          <a:bodyPr anchor="ctr">
+            <a:normAutofit/>
           </a:bodyPr>
-          <a:lstStyle xmlns:a="http://schemas.openxmlformats.org/drawingml/2006/main"/>
-          <a:p xmlns:a="http://schemas.openxmlformats.org/drawingml/2006/main">
+          <a:lstStyle/>
+          <a:p>
             <a:pPr algn="l">
               <a:defRPr sz="1950" b="1">
                 <a:solidFill>
@@ -6052,71 +5900,71 @@
       </p:sp>
       <p:sp>
         <p:nvSpPr>
-          <p:cNvPr id="5" name="">
-            <a:extLst xmlns:a="http://schemas.openxmlformats.org/drawingml/2006/main">
+          <p:cNvPr id="5" name="Rounded Rectangle 4">
+            <a:extLst>
               <a:ext uri="{FF2B5EF4-FFF2-40B4-BE49-F238E27FC236}">
                 <a16:creationId xmlns:a16="http://schemas.microsoft.com/office/drawing/2014/main" id="{CD248F87-68A4-426D-9454-E63A6F6BF770}"/>
               </a:ext>
             </a:extLst>
           </p:cNvPr>
           <p:cNvSpPr>
-            <a:spLocks xmlns:a="http://schemas.openxmlformats.org/drawingml/2006/main" noGrp="1"/>
-          </p:cNvSpPr>
-          <p:nvPr/>
-        </p:nvSpPr>
-        <p:spPr>
-          <a:xfrm xmlns:a="http://schemas.openxmlformats.org/drawingml/2006/main">
+            <a:spLocks noGrp="1"/>
+          </p:cNvSpPr>
+          <p:nvPr/>
+        </p:nvSpPr>
+        <p:spPr>
+          <a:xfrm>
             <a:off x="419100" y="2724150"/>
             <a:ext cx="552450" cy="552450"/>
           </a:xfrm>
-          <a:prstGeom xmlns:a="http://schemas.openxmlformats.org/drawingml/2006/main" prst="roundRect">
+          <a:prstGeom prst="roundRect">
             <a:avLst>
               <a:gd name="adj" fmla="val 20690"/>
             </a:avLst>
           </a:prstGeom>
-          <a:solidFill xmlns:a="http://schemas.openxmlformats.org/drawingml/2006/main">
+          <a:solidFill>
             <a:srgbClr val="3D8DFF"/>
           </a:solidFill>
-          <a:ln xmlns:a="http://schemas.openxmlformats.org/drawingml/2006/main" w="0">
-            <a:noFill/>
-            <a:prstDash val="solid"/>
-          </a:ln>
-        </p:spPr>
-      </p:sp>
-      <p:sp>
-        <p:nvSpPr>
-          <p:cNvPr id="6" name="">
-            <a:extLst xmlns:a="http://schemas.openxmlformats.org/drawingml/2006/main">
+          <a:ln w="0">
+            <a:noFill/>
+            <a:prstDash val="solid"/>
+          </a:ln>
+        </p:spPr>
+      </p:sp>
+      <p:sp>
+        <p:nvSpPr>
+          <p:cNvPr id="6" name="Rectangle 5">
+            <a:extLst>
               <a:ext uri="{FF2B5EF4-FFF2-40B4-BE49-F238E27FC236}">
                 <a16:creationId xmlns:a16="http://schemas.microsoft.com/office/drawing/2014/main" id="{FEF4AF0C-36EF-4427-8EAA-0D6406B642FA}"/>
               </a:ext>
             </a:extLst>
           </p:cNvPr>
           <p:cNvSpPr>
-            <a:spLocks xmlns:a="http://schemas.openxmlformats.org/drawingml/2006/main" noGrp="1"/>
-          </p:cNvSpPr>
-          <p:nvPr/>
-        </p:nvSpPr>
-        <p:spPr>
-          <a:xfrm xmlns:a="http://schemas.openxmlformats.org/drawingml/2006/main">
+            <a:spLocks noGrp="1"/>
+          </p:cNvSpPr>
+          <p:nvPr/>
+        </p:nvSpPr>
+        <p:spPr>
+          <a:xfrm>
             <a:off x="419100" y="2819400"/>
             <a:ext cx="552450" cy="381000"/>
           </a:xfrm>
-          <a:prstGeom xmlns:a="http://schemas.openxmlformats.org/drawingml/2006/main" prst="rect">
-            <a:avLst/>
-          </a:prstGeom>
-          <a:noFill xmlns:a="http://schemas.openxmlformats.org/drawingml/2006/main"/>
-          <a:ln xmlns:a="http://schemas.openxmlformats.org/drawingml/2006/main" w="0">
-            <a:noFill/>
-            <a:prstDash val="solid"/>
-          </a:ln>
-        </p:spPr>
-        <p:txBody>
-          <a:bodyPr xmlns:a="http://schemas.openxmlformats.org/drawingml/2006/main" anchor="ctr">
-            <a:normAutofit fontScale="100000"/>
+          <a:prstGeom prst="rect">
+            <a:avLst/>
+          </a:prstGeom>
+          <a:noFill/>
+          <a:ln w="0">
+            <a:noFill/>
+            <a:prstDash val="solid"/>
+          </a:ln>
+        </p:spPr>
+        <p:txBody>
+          <a:bodyPr anchor="ctr">
+            <a:normAutofit/>
           </a:bodyPr>
-          <a:lstStyle xmlns:a="http://schemas.openxmlformats.org/drawingml/2006/main"/>
-          <a:p xmlns:a="http://schemas.openxmlformats.org/drawingml/2006/main">
+          <a:lstStyle/>
+          <a:p>
             <a:pPr algn="ctr">
               <a:defRPr sz="1650" b="1">
                 <a:solidFill>
@@ -6143,38 +5991,38 @@
       </p:sp>
       <p:sp>
         <p:nvSpPr>
-          <p:cNvPr id="7" name="">
-            <a:extLst xmlns:a="http://schemas.openxmlformats.org/drawingml/2006/main">
+          <p:cNvPr id="7" name="Rectangle 6">
+            <a:extLst>
               <a:ext uri="{FF2B5EF4-FFF2-40B4-BE49-F238E27FC236}">
                 <a16:creationId xmlns:a16="http://schemas.microsoft.com/office/drawing/2014/main" id="{8214D55A-17B0-4979-A0E5-D63E00AF1E40}"/>
               </a:ext>
             </a:extLst>
           </p:cNvPr>
           <p:cNvSpPr>
-            <a:spLocks xmlns:a="http://schemas.openxmlformats.org/drawingml/2006/main" noGrp="1"/>
-          </p:cNvSpPr>
-          <p:nvPr/>
-        </p:nvSpPr>
-        <p:spPr>
-          <a:xfrm xmlns:a="http://schemas.openxmlformats.org/drawingml/2006/main">
+            <a:spLocks noGrp="1"/>
+          </p:cNvSpPr>
+          <p:nvPr/>
+        </p:nvSpPr>
+        <p:spPr>
+          <a:xfrm>
             <a:off x="1257300" y="2800350"/>
             <a:ext cx="5905500" cy="476250"/>
           </a:xfrm>
-          <a:prstGeom xmlns:a="http://schemas.openxmlformats.org/drawingml/2006/main" prst="rect">
-            <a:avLst/>
-          </a:prstGeom>
-          <a:noFill xmlns:a="http://schemas.openxmlformats.org/drawingml/2006/main"/>
-          <a:ln xmlns:a="http://schemas.openxmlformats.org/drawingml/2006/main" w="0">
-            <a:noFill/>
-            <a:prstDash val="solid"/>
-          </a:ln>
-        </p:spPr>
-        <p:txBody>
-          <a:bodyPr xmlns:a="http://schemas.openxmlformats.org/drawingml/2006/main" anchor="ctr">
-            <a:normAutofit fontScale="100000"/>
+          <a:prstGeom prst="rect">
+            <a:avLst/>
+          </a:prstGeom>
+          <a:noFill/>
+          <a:ln w="0">
+            <a:noFill/>
+            <a:prstDash val="solid"/>
+          </a:ln>
+        </p:spPr>
+        <p:txBody>
+          <a:bodyPr anchor="ctr">
+            <a:normAutofit/>
           </a:bodyPr>
-          <a:lstStyle xmlns:a="http://schemas.openxmlformats.org/drawingml/2006/main"/>
-          <a:p xmlns:a="http://schemas.openxmlformats.org/drawingml/2006/main">
+          <a:lstStyle/>
+          <a:p>
             <a:pPr algn="l">
               <a:defRPr sz="1950" b="1">
                 <a:solidFill>
@@ -6201,71 +6049,71 @@
       </p:sp>
       <p:sp>
         <p:nvSpPr>
-          <p:cNvPr id="8" name="">
-            <a:extLst xmlns:a="http://schemas.openxmlformats.org/drawingml/2006/main">
+          <p:cNvPr id="8" name="Rounded Rectangle 7">
+            <a:extLst>
               <a:ext uri="{FF2B5EF4-FFF2-40B4-BE49-F238E27FC236}">
                 <a16:creationId xmlns:a16="http://schemas.microsoft.com/office/drawing/2014/main" id="{DF27FD19-8A06-4986-ADB4-BD6B8C71DDD6}"/>
               </a:ext>
             </a:extLst>
           </p:cNvPr>
           <p:cNvSpPr>
-            <a:spLocks xmlns:a="http://schemas.openxmlformats.org/drawingml/2006/main" noGrp="1"/>
-          </p:cNvSpPr>
-          <p:nvPr/>
-        </p:nvSpPr>
-        <p:spPr>
-          <a:xfrm xmlns:a="http://schemas.openxmlformats.org/drawingml/2006/main">
+            <a:spLocks noGrp="1"/>
+          </p:cNvSpPr>
+          <p:nvPr/>
+        </p:nvSpPr>
+        <p:spPr>
+          <a:xfrm>
             <a:off x="419100" y="3790950"/>
             <a:ext cx="552450" cy="552450"/>
           </a:xfrm>
-          <a:prstGeom xmlns:a="http://schemas.openxmlformats.org/drawingml/2006/main" prst="roundRect">
+          <a:prstGeom prst="roundRect">
             <a:avLst>
               <a:gd name="adj" fmla="val 20690"/>
             </a:avLst>
           </a:prstGeom>
-          <a:solidFill xmlns:a="http://schemas.openxmlformats.org/drawingml/2006/main">
+          <a:solidFill>
             <a:srgbClr val="3D8DFF"/>
           </a:solidFill>
-          <a:ln xmlns:a="http://schemas.openxmlformats.org/drawingml/2006/main" w="0">
-            <a:noFill/>
-            <a:prstDash val="solid"/>
-          </a:ln>
-        </p:spPr>
-      </p:sp>
-      <p:sp>
-        <p:nvSpPr>
-          <p:cNvPr id="9" name="">
-            <a:extLst xmlns:a="http://schemas.openxmlformats.org/drawingml/2006/main">
+          <a:ln w="0">
+            <a:noFill/>
+            <a:prstDash val="solid"/>
+          </a:ln>
+        </p:spPr>
+      </p:sp>
+      <p:sp>
+        <p:nvSpPr>
+          <p:cNvPr id="9" name="Rectangle 8">
+            <a:extLst>
               <a:ext uri="{FF2B5EF4-FFF2-40B4-BE49-F238E27FC236}">
                 <a16:creationId xmlns:a16="http://schemas.microsoft.com/office/drawing/2014/main" id="{E46C04D6-6E14-461A-B40E-A44E96157E6F}"/>
               </a:ext>
             </a:extLst>
           </p:cNvPr>
           <p:cNvSpPr>
-            <a:spLocks xmlns:a="http://schemas.openxmlformats.org/drawingml/2006/main" noGrp="1"/>
-          </p:cNvSpPr>
-          <p:nvPr/>
-        </p:nvSpPr>
-        <p:spPr>
-          <a:xfrm xmlns:a="http://schemas.openxmlformats.org/drawingml/2006/main">
+            <a:spLocks noGrp="1"/>
+          </p:cNvSpPr>
+          <p:nvPr/>
+        </p:nvSpPr>
+        <p:spPr>
+          <a:xfrm>
             <a:off x="419100" y="3886200"/>
             <a:ext cx="552450" cy="381000"/>
           </a:xfrm>
-          <a:prstGeom xmlns:a="http://schemas.openxmlformats.org/drawingml/2006/main" prst="rect">
-            <a:avLst/>
-          </a:prstGeom>
-          <a:noFill xmlns:a="http://schemas.openxmlformats.org/drawingml/2006/main"/>
-          <a:ln xmlns:a="http://schemas.openxmlformats.org/drawingml/2006/main" w="0">
-            <a:noFill/>
-            <a:prstDash val="solid"/>
-          </a:ln>
-        </p:spPr>
-        <p:txBody>
-          <a:bodyPr xmlns:a="http://schemas.openxmlformats.org/drawingml/2006/main" anchor="ctr">
-            <a:normAutofit fontScale="100000"/>
+          <a:prstGeom prst="rect">
+            <a:avLst/>
+          </a:prstGeom>
+          <a:noFill/>
+          <a:ln w="0">
+            <a:noFill/>
+            <a:prstDash val="solid"/>
+          </a:ln>
+        </p:spPr>
+        <p:txBody>
+          <a:bodyPr anchor="ctr">
+            <a:normAutofit/>
           </a:bodyPr>
-          <a:lstStyle xmlns:a="http://schemas.openxmlformats.org/drawingml/2006/main"/>
-          <a:p xmlns:a="http://schemas.openxmlformats.org/drawingml/2006/main">
+          <a:lstStyle/>
+          <a:p>
             <a:pPr algn="ctr">
               <a:defRPr sz="1650" b="1">
                 <a:solidFill>
@@ -6292,38 +6140,38 @@
       </p:sp>
       <p:sp>
         <p:nvSpPr>
-          <p:cNvPr id="10" name="">
-            <a:extLst xmlns:a="http://schemas.openxmlformats.org/drawingml/2006/main">
+          <p:cNvPr id="10" name="Rectangle 9">
+            <a:extLst>
               <a:ext uri="{FF2B5EF4-FFF2-40B4-BE49-F238E27FC236}">
                 <a16:creationId xmlns:a16="http://schemas.microsoft.com/office/drawing/2014/main" id="{5DBF252B-1F88-4F0A-BE3E-D958902AE071}"/>
               </a:ext>
             </a:extLst>
           </p:cNvPr>
           <p:cNvSpPr>
-            <a:spLocks xmlns:a="http://schemas.openxmlformats.org/drawingml/2006/main" noGrp="1"/>
-          </p:cNvSpPr>
-          <p:nvPr/>
-        </p:nvSpPr>
-        <p:spPr>
-          <a:xfrm xmlns:a="http://schemas.openxmlformats.org/drawingml/2006/main">
+            <a:spLocks noGrp="1"/>
+          </p:cNvSpPr>
+          <p:nvPr/>
+        </p:nvSpPr>
+        <p:spPr>
+          <a:xfrm>
             <a:off x="1257300" y="3867150"/>
             <a:ext cx="5905500" cy="476250"/>
           </a:xfrm>
-          <a:prstGeom xmlns:a="http://schemas.openxmlformats.org/drawingml/2006/main" prst="rect">
-            <a:avLst/>
-          </a:prstGeom>
-          <a:noFill xmlns:a="http://schemas.openxmlformats.org/drawingml/2006/main"/>
-          <a:ln xmlns:a="http://schemas.openxmlformats.org/drawingml/2006/main" w="0">
-            <a:noFill/>
-            <a:prstDash val="solid"/>
-          </a:ln>
-        </p:spPr>
-        <p:txBody>
-          <a:bodyPr xmlns:a="http://schemas.openxmlformats.org/drawingml/2006/main" anchor="ctr">
-            <a:normAutofit fontScale="100000"/>
+          <a:prstGeom prst="rect">
+            <a:avLst/>
+          </a:prstGeom>
+          <a:noFill/>
+          <a:ln w="0">
+            <a:noFill/>
+            <a:prstDash val="solid"/>
+          </a:ln>
+        </p:spPr>
+        <p:txBody>
+          <a:bodyPr anchor="ctr">
+            <a:normAutofit/>
           </a:bodyPr>
-          <a:lstStyle xmlns:a="http://schemas.openxmlformats.org/drawingml/2006/main"/>
-          <a:p xmlns:a="http://schemas.openxmlformats.org/drawingml/2006/main">
+          <a:lstStyle/>
+          <a:p>
             <a:pPr algn="l">
               <a:defRPr sz="1950" b="1">
                 <a:solidFill>
@@ -6350,69 +6198,69 @@
       </p:sp>
       <p:sp>
         <p:nvSpPr>
-          <p:cNvPr id="11" name="">
-            <a:extLst xmlns:a="http://schemas.openxmlformats.org/drawingml/2006/main">
+          <p:cNvPr id="11" name="Rectangle 10">
+            <a:extLst>
               <a:ext uri="{FF2B5EF4-FFF2-40B4-BE49-F238E27FC236}">
                 <a16:creationId xmlns:a16="http://schemas.microsoft.com/office/drawing/2014/main" id="{B9DA4131-54F7-4914-9B6B-BA66DF328FF1}"/>
               </a:ext>
             </a:extLst>
           </p:cNvPr>
           <p:cNvSpPr>
-            <a:spLocks xmlns:a="http://schemas.openxmlformats.org/drawingml/2006/main" noGrp="1"/>
-          </p:cNvSpPr>
-          <p:nvPr/>
-        </p:nvSpPr>
-        <p:spPr>
-          <a:xfrm xmlns:a="http://schemas.openxmlformats.org/drawingml/2006/main">
+            <a:spLocks noGrp="1"/>
+          </p:cNvSpPr>
+          <p:nvPr/>
+        </p:nvSpPr>
+        <p:spPr>
+          <a:xfrm>
             <a:off x="7943850" y="1657350"/>
             <a:ext cx="3829050" cy="3124200"/>
           </a:xfrm>
-          <a:prstGeom xmlns:a="http://schemas.openxmlformats.org/drawingml/2006/main" prst="rect">
-            <a:avLst/>
-          </a:prstGeom>
-          <a:solidFill xmlns:a="http://schemas.openxmlformats.org/drawingml/2006/main">
+          <a:prstGeom prst="rect">
+            <a:avLst/>
+          </a:prstGeom>
+          <a:solidFill>
             <a:srgbClr val="EDEDED"/>
           </a:solidFill>
-          <a:ln xmlns:a="http://schemas.openxmlformats.org/drawingml/2006/main" w="0">
-            <a:noFill/>
-            <a:prstDash val="solid"/>
-          </a:ln>
-        </p:spPr>
-      </p:sp>
-      <p:sp>
-        <p:nvSpPr>
-          <p:cNvPr id="12" name="">
-            <a:extLst xmlns:a="http://schemas.openxmlformats.org/drawingml/2006/main">
+          <a:ln w="0">
+            <a:noFill/>
+            <a:prstDash val="solid"/>
+          </a:ln>
+        </p:spPr>
+      </p:sp>
+      <p:sp>
+        <p:nvSpPr>
+          <p:cNvPr id="12" name="Rectangle 11">
+            <a:extLst>
               <a:ext uri="{FF2B5EF4-FFF2-40B4-BE49-F238E27FC236}">
                 <a16:creationId xmlns:a16="http://schemas.microsoft.com/office/drawing/2014/main" id="{F94CA480-5211-49C8-A8D8-F1604BE1BB1A}"/>
               </a:ext>
             </a:extLst>
           </p:cNvPr>
           <p:cNvSpPr>
-            <a:spLocks xmlns:a="http://schemas.openxmlformats.org/drawingml/2006/main" noGrp="1"/>
-          </p:cNvSpPr>
-          <p:nvPr/>
-        </p:nvSpPr>
-        <p:spPr>
-          <a:xfrm xmlns:a="http://schemas.openxmlformats.org/drawingml/2006/main">
+            <a:spLocks noGrp="1"/>
+          </p:cNvSpPr>
+          <p:nvPr/>
+        </p:nvSpPr>
+        <p:spPr>
+          <a:xfrm>
             <a:off x="8343900" y="2457450"/>
             <a:ext cx="3048000" cy="666750"/>
           </a:xfrm>
-          <a:prstGeom xmlns:a="http://schemas.openxmlformats.org/drawingml/2006/main" prst="rect">
-            <a:avLst/>
-          </a:prstGeom>
-          <a:noFill xmlns:a="http://schemas.openxmlformats.org/drawingml/2006/main"/>
-          <a:ln xmlns:a="http://schemas.openxmlformats.org/drawingml/2006/main" w="0">
-            <a:noFill/>
-            <a:prstDash val="solid"/>
-          </a:ln>
-        </p:spPr>
-        <p:txBody>
-          <a:bodyPr xmlns:a="http://schemas.openxmlformats.org/drawingml/2006/main" anchor="t">
-            <a:normAutofit fontScale="100000"/>
+          <a:prstGeom prst="rect">
+            <a:avLst/>
+          </a:prstGeom>
+          <a:noFill/>
+          <a:ln w="0">
+            <a:noFill/>
+            <a:prstDash val="solid"/>
+          </a:ln>
+        </p:spPr>
+        <p:txBody>
+          <a:bodyPr anchor="t">
+            <a:normAutofit/>
           </a:bodyPr>
-          <a:lstStyle xmlns:a="http://schemas.openxmlformats.org/drawingml/2006/main"/>
-          <a:p xmlns:a="http://schemas.openxmlformats.org/drawingml/2006/main">
+          <a:lstStyle/>
+          <a:p>
             <a:pPr algn="l">
               <a:defRPr sz="3450" b="1">
                 <a:solidFill>
@@ -6439,38 +6287,38 @@
       </p:sp>
       <p:sp>
         <p:nvSpPr>
-          <p:cNvPr id="13" name="">
-            <a:extLst xmlns:a="http://schemas.openxmlformats.org/drawingml/2006/main">
+          <p:cNvPr id="13" name="Rectangle 12">
+            <a:extLst>
               <a:ext uri="{FF2B5EF4-FFF2-40B4-BE49-F238E27FC236}">
                 <a16:creationId xmlns:a16="http://schemas.microsoft.com/office/drawing/2014/main" id="{BF82BF57-5065-4005-963B-7C0D652FF0D6}"/>
               </a:ext>
             </a:extLst>
           </p:cNvPr>
           <p:cNvSpPr>
-            <a:spLocks xmlns:a="http://schemas.openxmlformats.org/drawingml/2006/main" noGrp="1"/>
-          </p:cNvSpPr>
-          <p:nvPr/>
-        </p:nvSpPr>
-        <p:spPr>
-          <a:xfrm xmlns:a="http://schemas.openxmlformats.org/drawingml/2006/main">
+            <a:spLocks noGrp="1"/>
+          </p:cNvSpPr>
+          <p:nvPr/>
+        </p:nvSpPr>
+        <p:spPr>
+          <a:xfrm>
             <a:off x="8343900" y="3352800"/>
             <a:ext cx="2857500" cy="571500"/>
           </a:xfrm>
-          <a:prstGeom xmlns:a="http://schemas.openxmlformats.org/drawingml/2006/main" prst="rect">
-            <a:avLst/>
-          </a:prstGeom>
-          <a:noFill xmlns:a="http://schemas.openxmlformats.org/drawingml/2006/main"/>
-          <a:ln xmlns:a="http://schemas.openxmlformats.org/drawingml/2006/main" w="0">
-            <a:noFill/>
-            <a:prstDash val="solid"/>
-          </a:ln>
-        </p:spPr>
-        <p:txBody>
-          <a:bodyPr xmlns:a="http://schemas.openxmlformats.org/drawingml/2006/main" anchor="t">
-            <a:normAutofit fontScale="100000"/>
+          <a:prstGeom prst="rect">
+            <a:avLst/>
+          </a:prstGeom>
+          <a:noFill/>
+          <a:ln w="0">
+            <a:noFill/>
+            <a:prstDash val="solid"/>
+          </a:ln>
+        </p:spPr>
+        <p:txBody>
+          <a:bodyPr anchor="t">
+            <a:normAutofit/>
           </a:bodyPr>
-          <a:lstStyle xmlns:a="http://schemas.openxmlformats.org/drawingml/2006/main"/>
-          <a:p xmlns:a="http://schemas.openxmlformats.org/drawingml/2006/main">
+          <a:lstStyle/>
+          <a:p>
             <a:pPr algn="l">
               <a:defRPr sz="1800" b="0">
                 <a:solidFill>
@@ -6497,38 +6345,38 @@
       </p:sp>
       <p:sp>
         <p:nvSpPr>
-          <p:cNvPr id="14" name="">
-            <a:extLst xmlns:a="http://schemas.openxmlformats.org/drawingml/2006/main">
+          <p:cNvPr id="14" name="Rectangle 13">
+            <a:extLst>
               <a:ext uri="{FF2B5EF4-FFF2-40B4-BE49-F238E27FC236}">
                 <a16:creationId xmlns:a16="http://schemas.microsoft.com/office/drawing/2014/main" id="{49EFB74D-2A49-4A36-AC8A-D9A5305A0FE4}"/>
               </a:ext>
             </a:extLst>
           </p:cNvPr>
           <p:cNvSpPr>
-            <a:spLocks xmlns:a="http://schemas.openxmlformats.org/drawingml/2006/main" noGrp="1"/>
-          </p:cNvSpPr>
-          <p:nvPr/>
-        </p:nvSpPr>
-        <p:spPr>
-          <a:xfrm xmlns:a="http://schemas.openxmlformats.org/drawingml/2006/main">
+            <a:spLocks noGrp="1"/>
+          </p:cNvSpPr>
+          <p:nvPr/>
+        </p:nvSpPr>
+        <p:spPr>
+          <a:xfrm>
             <a:off x="419100" y="6419850"/>
             <a:ext cx="3429000" cy="209550"/>
           </a:xfrm>
-          <a:prstGeom xmlns:a="http://schemas.openxmlformats.org/drawingml/2006/main" prst="rect">
-            <a:avLst/>
-          </a:prstGeom>
-          <a:noFill xmlns:a="http://schemas.openxmlformats.org/drawingml/2006/main"/>
-          <a:ln xmlns:a="http://schemas.openxmlformats.org/drawingml/2006/main" w="0">
-            <a:noFill/>
-            <a:prstDash val="solid"/>
-          </a:ln>
-        </p:spPr>
-        <p:txBody>
-          <a:bodyPr xmlns:a="http://schemas.openxmlformats.org/drawingml/2006/main" anchor="t">
+          <a:prstGeom prst="rect">
+            <a:avLst/>
+          </a:prstGeom>
+          <a:noFill/>
+          <a:ln w="0">
+            <a:noFill/>
+            <a:prstDash val="solid"/>
+          </a:ln>
+        </p:spPr>
+        <p:txBody>
+          <a:bodyPr anchor="t">
             <a:normAutofit fontScale="86111"/>
           </a:bodyPr>
-          <a:lstStyle xmlns:a="http://schemas.openxmlformats.org/drawingml/2006/main"/>
-          <a:p xmlns:a="http://schemas.openxmlformats.org/drawingml/2006/main">
+          <a:lstStyle/>
+          <a:p>
             <a:pPr algn="l">
               <a:defRPr sz="900" b="0">
                 <a:solidFill>
@@ -6555,38 +6403,38 @@
       </p:sp>
       <p:sp>
         <p:nvSpPr>
-          <p:cNvPr id="15" name="">
-            <a:extLst xmlns:a="http://schemas.openxmlformats.org/drawingml/2006/main">
+          <p:cNvPr id="15" name="Rectangle 14">
+            <a:extLst>
               <a:ext uri="{FF2B5EF4-FFF2-40B4-BE49-F238E27FC236}">
                 <a16:creationId xmlns:a16="http://schemas.microsoft.com/office/drawing/2014/main" id="{E3AAC648-4097-4D26-BB61-B4577E14FD63}"/>
               </a:ext>
             </a:extLst>
           </p:cNvPr>
           <p:cNvSpPr>
-            <a:spLocks xmlns:a="http://schemas.openxmlformats.org/drawingml/2006/main" noGrp="1"/>
-          </p:cNvSpPr>
-          <p:nvPr/>
-        </p:nvSpPr>
-        <p:spPr>
-          <a:xfrm xmlns:a="http://schemas.openxmlformats.org/drawingml/2006/main">
+            <a:spLocks noGrp="1"/>
+          </p:cNvSpPr>
+          <p:nvPr/>
+        </p:nvSpPr>
+        <p:spPr>
+          <a:xfrm>
             <a:off x="11239500" y="6419850"/>
             <a:ext cx="523875" cy="209550"/>
           </a:xfrm>
-          <a:prstGeom xmlns:a="http://schemas.openxmlformats.org/drawingml/2006/main" prst="rect">
-            <a:avLst/>
-          </a:prstGeom>
-          <a:noFill xmlns:a="http://schemas.openxmlformats.org/drawingml/2006/main"/>
-          <a:ln xmlns:a="http://schemas.openxmlformats.org/drawingml/2006/main" w="0">
-            <a:noFill/>
-            <a:prstDash val="solid"/>
-          </a:ln>
-        </p:spPr>
-        <p:txBody>
-          <a:bodyPr xmlns:a="http://schemas.openxmlformats.org/drawingml/2006/main" anchor="t">
+          <a:prstGeom prst="rect">
+            <a:avLst/>
+          </a:prstGeom>
+          <a:noFill/>
+          <a:ln w="0">
+            <a:noFill/>
+            <a:prstDash val="solid"/>
+          </a:ln>
+        </p:spPr>
+        <p:txBody>
+          <a:bodyPr anchor="t">
             <a:normAutofit fontScale="86111"/>
           </a:bodyPr>
-          <a:lstStyle xmlns:a="http://schemas.openxmlformats.org/drawingml/2006/main"/>
-          <a:p xmlns:a="http://schemas.openxmlformats.org/drawingml/2006/main">
+          <a:lstStyle/>
+          <a:p>
             <a:pPr algn="r">
               <a:defRPr sz="900" b="0">
                 <a:solidFill>
@@ -6618,6 +6466,9 @@
       </p:ext>
     </p:extLst>
   </p:cSld>
+  <p:clrMapOvr>
+    <a:masterClrMapping/>
+  </p:clrMapOvr>
 </p:sld>
 </file>
 
@@ -6863,5 +6714,254 @@
       </a:bgFillStyleLst>
     </a:fmtScheme>
   </a:themeElements>
+  <a:objectDefaults/>
+  <a:extraClrSchemeLst/>
+</a:theme>
+</file>
+
+<file path=ppt/theme/theme2.xml><?xml version="1.0" encoding="utf-8"?>
+<a:theme xmlns:a="http://schemas.openxmlformats.org/drawingml/2006/main" name="ChatGPT">
+  <a:themeElements>
+    <a:clrScheme name="ChatGPT">
+      <a:dk1>
+        <a:srgbClr val="000000"/>
+      </a:dk1>
+      <a:lt1>
+        <a:srgbClr val="FFFFFF"/>
+      </a:lt1>
+      <a:dk2>
+        <a:srgbClr val="0E2841"/>
+      </a:dk2>
+      <a:lt2>
+        <a:srgbClr val="E8E8E8"/>
+      </a:lt2>
+      <a:accent1>
+        <a:srgbClr val="156082"/>
+      </a:accent1>
+      <a:accent2>
+        <a:srgbClr val="E97132"/>
+      </a:accent2>
+      <a:accent3>
+        <a:srgbClr val="196B24"/>
+      </a:accent3>
+      <a:accent4>
+        <a:srgbClr val="0F9ED5"/>
+      </a:accent4>
+      <a:accent5>
+        <a:srgbClr val="A02B93"/>
+      </a:accent5>
+      <a:accent6>
+        <a:srgbClr val="4EA72E"/>
+      </a:accent6>
+      <a:hlink>
+        <a:srgbClr val="467886"/>
+      </a:hlink>
+      <a:folHlink>
+        <a:srgbClr val="96607D"/>
+      </a:folHlink>
+    </a:clrScheme>
+    <a:fontScheme name="Office">
+      <a:majorFont>
+        <a:latin typeface="Calibri Light"/>
+        <a:ea typeface="Calibri Light"/>
+        <a:cs typeface="Calibri Light"/>
+      </a:majorFont>
+      <a:minorFont>
+        <a:latin typeface="Calibri"/>
+        <a:ea typeface="Calibri"/>
+        <a:cs typeface="Calibri"/>
+      </a:minorFont>
+    </a:fontScheme>
+    <a:fmtScheme name="ChatGPT">
+      <a:fillStyleLst>
+        <a:solidFill>
+          <a:schemeClr val="phClr"/>
+        </a:solidFill>
+        <a:gradFill>
+          <a:gsLst>
+            <a:gs pos="0">
+              <a:schemeClr val="phClr">
+                <a:tint val="67000"/>
+                <a:lumMod val="110000"/>
+                <a:satMod val="105000"/>
+              </a:schemeClr>
+            </a:gs>
+            <a:gs pos="50000">
+              <a:schemeClr val="phClr">
+                <a:tint val="73000"/>
+                <a:lumMod val="105000"/>
+                <a:satMod val="103000"/>
+              </a:schemeClr>
+            </a:gs>
+            <a:gs pos="100000">
+              <a:schemeClr val="phClr">
+                <a:tint val="81000"/>
+                <a:lumMod val="105000"/>
+                <a:satMod val="109000"/>
+              </a:schemeClr>
+            </a:gs>
+          </a:gsLst>
+          <a:lin ang="5400000" scaled="0"/>
+        </a:gradFill>
+        <a:gradFill>
+          <a:gsLst>
+            <a:gs pos="0">
+              <a:schemeClr val="phClr">
+                <a:tint val="94000"/>
+                <a:lumMod val="102000"/>
+                <a:satMod val="103000"/>
+              </a:schemeClr>
+            </a:gs>
+            <a:gs pos="50000">
+              <a:schemeClr val="phClr">
+                <a:shade val="100000"/>
+                <a:lumMod val="100000"/>
+                <a:satMod val="110000"/>
+              </a:schemeClr>
+            </a:gs>
+            <a:gs pos="100000">
+              <a:schemeClr val="phClr">
+                <a:shade val="78000"/>
+                <a:lumMod val="99000"/>
+                <a:satMod val="120000"/>
+              </a:schemeClr>
+            </a:gs>
+          </a:gsLst>
+          <a:lin ang="5400000" scaled="0"/>
+        </a:gradFill>
+      </a:fillStyleLst>
+      <a:lnStyleLst>
+        <a:ln w="12700">
+          <a:solidFill>
+            <a:schemeClr val="phClr"/>
+          </a:solidFill>
+          <a:prstDash val="solid"/>
+        </a:ln>
+        <a:ln w="19050">
+          <a:solidFill>
+            <a:schemeClr val="phClr"/>
+          </a:solidFill>
+          <a:prstDash val="solid"/>
+        </a:ln>
+        <a:ln w="25400">
+          <a:solidFill>
+            <a:schemeClr val="phClr"/>
+          </a:solidFill>
+          <a:prstDash val="solid"/>
+        </a:ln>
+      </a:lnStyleLst>
+      <a:effectStyleLst>
+        <a:effectStyle>
+          <a:effectLst/>
+        </a:effectStyle>
+        <a:effectStyle>
+          <a:effectLst/>
+        </a:effectStyle>
+        <a:effectStyle>
+          <a:effectLst>
+            <a:outerShdw blurRad="57150" dist="19050" dir="5400000">
+              <a:srgbClr val="000000">
+                <a:alpha val="16000"/>
+              </a:srgbClr>
+            </a:outerShdw>
+          </a:effectLst>
+        </a:effectStyle>
+        <a:effectStyle>
+          <a:effectLst>
+            <a:outerShdw blurRad="19050" dist="9525" dir="5400000">
+              <a:srgbClr val="000000">
+                <a:alpha val="6000"/>
+              </a:srgbClr>
+            </a:outerShdw>
+          </a:effectLst>
+        </a:effectStyle>
+        <a:effectStyle>
+          <a:effectLst>
+            <a:outerShdw blurRad="28575" dist="9525" dir="5400000">
+              <a:srgbClr val="000000">
+                <a:alpha val="8000"/>
+              </a:srgbClr>
+            </a:outerShdw>
+          </a:effectLst>
+        </a:effectStyle>
+        <a:effectStyle>
+          <a:effectLst>
+            <a:outerShdw blurRad="57150" dist="19050" dir="5400000">
+              <a:srgbClr val="000000">
+                <a:alpha val="10000"/>
+              </a:srgbClr>
+            </a:outerShdw>
+          </a:effectLst>
+        </a:effectStyle>
+        <a:effectStyle>
+          <a:effectLst>
+            <a:outerShdw blurRad="114300" dist="38100" dir="5400000">
+              <a:srgbClr val="000000">
+                <a:alpha val="12000"/>
+              </a:srgbClr>
+            </a:outerShdw>
+          </a:effectLst>
+        </a:effectStyle>
+        <a:effectStyle>
+          <a:effectLst>
+            <a:outerShdw blurRad="171450" dist="57150" dir="5400000">
+              <a:srgbClr val="000000">
+                <a:alpha val="16000"/>
+              </a:srgbClr>
+            </a:outerShdw>
+          </a:effectLst>
+        </a:effectStyle>
+        <a:effectStyle>
+          <a:effectLst>
+            <a:outerShdw blurRad="266700" dist="95250" dir="5400000">
+              <a:srgbClr val="000000">
+                <a:alpha val="24000"/>
+              </a:srgbClr>
+            </a:outerShdw>
+          </a:effectLst>
+        </a:effectStyle>
+      </a:effectStyleLst>
+      <a:bgFillStyleLst>
+        <a:solidFill>
+          <a:schemeClr val="phClr"/>
+        </a:solidFill>
+        <a:solidFill>
+          <a:schemeClr val="phClr">
+            <a:tint val="95000"/>
+            <a:satMod val="170000"/>
+          </a:schemeClr>
+        </a:solidFill>
+        <a:gradFill>
+          <a:gsLst>
+            <a:gs pos="0">
+              <a:schemeClr val="phClr">
+                <a:tint val="93000"/>
+                <a:shade val="98000"/>
+                <a:lumMod val="102000"/>
+                <a:satMod val="150000"/>
+              </a:schemeClr>
+            </a:gs>
+            <a:gs pos="50000">
+              <a:schemeClr val="phClr">
+                <a:tint val="98000"/>
+                <a:shade val="90000"/>
+                <a:lumMod val="103000"/>
+                <a:satMod val="130000"/>
+              </a:schemeClr>
+            </a:gs>
+            <a:gs pos="100000">
+              <a:schemeClr val="phClr">
+                <a:shade val="63000"/>
+                <a:satMod val="120000"/>
+              </a:schemeClr>
+            </a:gs>
+          </a:gsLst>
+          <a:lin ang="5400000" scaled="0"/>
+        </a:gradFill>
+      </a:bgFillStyleLst>
+    </a:fmtScheme>
+  </a:themeElements>
+  <a:objectDefaults/>
+  <a:extraClrSchemeLst/>
 </a:theme>
 </file>